--- a/Testing-Delete/investigation_v1.pptx
+++ b/Testing-Delete/investigation_v1.pptx
@@ -6,6 +6,12 @@
   </p:sldMasterIdLst>
   <p:sldIdLst>
     <p:sldId id="256" r:id="rId2"/>
+    <p:sldId id="257" r:id="rId3"/>
+    <p:sldId id="258" r:id="rId4"/>
+    <p:sldId id="259" r:id="rId5"/>
+    <p:sldId id="260" r:id="rId6"/>
+    <p:sldId id="261" r:id="rId7"/>
+    <p:sldId id="262" r:id="rId8"/>
   </p:sldIdLst>
   <p:sldSz cx="12192000" cy="6858000"/>
   <p:notesSz cx="6858000" cy="9144000"/>
@@ -104,13 +110,18 @@
       </a:defRPr>
     </a:lvl9pPr>
   </p:defaultTextStyle>
+  <p:extLst>
+    <p:ext uri="{EFAFB233-063F-42B5-8137-9DF3F51BA10A}">
+      <p15:sldGuideLst xmlns:p15="http://schemas.microsoft.com/office/powerpoint/2012/main"/>
+    </p:ext>
+  </p:extLst>
 </p:presentation>
 </file>
 
 <file path=ppt/revisionInfo.xml><?xml version="1.0" encoding="utf-8"?>
 <p1510:revInfo xmlns:a="http://schemas.openxmlformats.org/drawingml/2006/main" xmlns:r="http://schemas.openxmlformats.org/officeDocument/2006/relationships" xmlns:p1510="http://schemas.microsoft.com/office/powerpoint/2015/10/main">
   <p1510:revLst>
-    <p1510:client id="{A37911E8-7C51-4F37-84AD-497340CEC656}" v="2" dt="2024-08-08T16:38:14.884"/>
+    <p1510:client id="{A37911E8-7C51-4F37-84AD-497340CEC656}" v="60" dt="2024-08-09T11:16:30.947"/>
   </p1510:revLst>
 </p1510:revInfo>
 </file>
@@ -120,7 +131,7 @@
   <pc:docChgLst>
     <pc:chgData name="Cardoso, Pedro" userId="ee006439-85a0-498f-b89d-0754036c0812" providerId="ADAL" clId="{A37911E8-7C51-4F37-84AD-497340CEC656}"/>
     <pc:docChg chg="undo custSel addSld modSld">
-      <pc:chgData name="Cardoso, Pedro" userId="ee006439-85a0-498f-b89d-0754036c0812" providerId="ADAL" clId="{A37911E8-7C51-4F37-84AD-497340CEC656}" dt="2024-08-08T16:38:27.049" v="443" actId="14100"/>
+      <pc:chgData name="Cardoso, Pedro" userId="ee006439-85a0-498f-b89d-0754036c0812" providerId="ADAL" clId="{A37911E8-7C51-4F37-84AD-497340CEC656}" dt="2024-08-09T11:39:28.834" v="1283" actId="20577"/>
       <pc:docMkLst>
         <pc:docMk/>
       </pc:docMkLst>
@@ -178,6 +189,296 @@
             <ac:picMk id="6" creationId="{76242039-785F-E524-711B-9E43C97DD348}"/>
           </ac:picMkLst>
         </pc:picChg>
+      </pc:sldChg>
+      <pc:sldChg chg="addSp delSp modSp new mod">
+        <pc:chgData name="Cardoso, Pedro" userId="ee006439-85a0-498f-b89d-0754036c0812" providerId="ADAL" clId="{A37911E8-7C51-4F37-84AD-497340CEC656}" dt="2024-08-09T11:36:08.383" v="1060" actId="20577"/>
+        <pc:sldMkLst>
+          <pc:docMk/>
+          <pc:sldMk cId="4020432183" sldId="257"/>
+        </pc:sldMkLst>
+        <pc:spChg chg="del">
+          <ac:chgData name="Cardoso, Pedro" userId="ee006439-85a0-498f-b89d-0754036c0812" providerId="ADAL" clId="{A37911E8-7C51-4F37-84AD-497340CEC656}" dt="2024-08-09T10:58:54.832" v="445" actId="478"/>
+          <ac:spMkLst>
+            <pc:docMk/>
+            <pc:sldMk cId="4020432183" sldId="257"/>
+            <ac:spMk id="2" creationId="{F7D56D41-A32C-0EE8-C1AA-E2300C2BFAF2}"/>
+          </ac:spMkLst>
+        </pc:spChg>
+        <pc:spChg chg="del">
+          <ac:chgData name="Cardoso, Pedro" userId="ee006439-85a0-498f-b89d-0754036c0812" providerId="ADAL" clId="{A37911E8-7C51-4F37-84AD-497340CEC656}" dt="2024-08-09T10:58:55.181" v="446" actId="478"/>
+          <ac:spMkLst>
+            <pc:docMk/>
+            <pc:sldMk cId="4020432183" sldId="257"/>
+            <ac:spMk id="3" creationId="{002CE44C-3F60-EA04-76E7-A2777484397E}"/>
+          </ac:spMkLst>
+        </pc:spChg>
+        <pc:spChg chg="add mod">
+          <ac:chgData name="Cardoso, Pedro" userId="ee006439-85a0-498f-b89d-0754036c0812" providerId="ADAL" clId="{A37911E8-7C51-4F37-84AD-497340CEC656}" dt="2024-08-09T11:04:10.199" v="604" actId="20577"/>
+          <ac:spMkLst>
+            <pc:docMk/>
+            <pc:sldMk cId="4020432183" sldId="257"/>
+            <ac:spMk id="5" creationId="{B7E67A8E-C4EE-2E68-D094-CEDFD1BFD3E7}"/>
+          </ac:spMkLst>
+        </pc:spChg>
+        <pc:spChg chg="add mod">
+          <ac:chgData name="Cardoso, Pedro" userId="ee006439-85a0-498f-b89d-0754036c0812" providerId="ADAL" clId="{A37911E8-7C51-4F37-84AD-497340CEC656}" dt="2024-08-09T11:16:27.412" v="926"/>
+          <ac:spMkLst>
+            <pc:docMk/>
+            <pc:sldMk cId="4020432183" sldId="257"/>
+            <ac:spMk id="6" creationId="{2655FA58-0658-DE30-EE58-A759F7EEF13D}"/>
+          </ac:spMkLst>
+        </pc:spChg>
+        <pc:spChg chg="add mod">
+          <ac:chgData name="Cardoso, Pedro" userId="ee006439-85a0-498f-b89d-0754036c0812" providerId="ADAL" clId="{A37911E8-7C51-4F37-84AD-497340CEC656}" dt="2024-08-09T11:16:27.412" v="926"/>
+          <ac:spMkLst>
+            <pc:docMk/>
+            <pc:sldMk cId="4020432183" sldId="257"/>
+            <ac:spMk id="7" creationId="{355321E9-8D4A-6A3F-6A58-38C2A4A23D81}"/>
+          </ac:spMkLst>
+        </pc:spChg>
+        <pc:spChg chg="add mod">
+          <ac:chgData name="Cardoso, Pedro" userId="ee006439-85a0-498f-b89d-0754036c0812" providerId="ADAL" clId="{A37911E8-7C51-4F37-84AD-497340CEC656}" dt="2024-08-09T11:16:27.412" v="926"/>
+          <ac:spMkLst>
+            <pc:docMk/>
+            <pc:sldMk cId="4020432183" sldId="257"/>
+            <ac:spMk id="8" creationId="{D79C47EC-D2B4-47D3-2616-F4351202F5EF}"/>
+          </ac:spMkLst>
+        </pc:spChg>
+        <pc:graphicFrameChg chg="add mod modGraphic">
+          <ac:chgData name="Cardoso, Pedro" userId="ee006439-85a0-498f-b89d-0754036c0812" providerId="ADAL" clId="{A37911E8-7C51-4F37-84AD-497340CEC656}" dt="2024-08-09T11:36:08.383" v="1060" actId="20577"/>
+          <ac:graphicFrameMkLst>
+            <pc:docMk/>
+            <pc:sldMk cId="4020432183" sldId="257"/>
+            <ac:graphicFrameMk id="4" creationId="{66C6E2E5-8FCC-4CA6-092E-05ABC3F9C97F}"/>
+          </ac:graphicFrameMkLst>
+        </pc:graphicFrameChg>
+      </pc:sldChg>
+      <pc:sldChg chg="addSp modSp add mod">
+        <pc:chgData name="Cardoso, Pedro" userId="ee006439-85a0-498f-b89d-0754036c0812" providerId="ADAL" clId="{A37911E8-7C51-4F37-84AD-497340CEC656}" dt="2024-08-09T11:35:11.908" v="1005" actId="20577"/>
+        <pc:sldMkLst>
+          <pc:docMk/>
+          <pc:sldMk cId="2823083646" sldId="258"/>
+        </pc:sldMkLst>
+        <pc:spChg chg="add mod">
+          <ac:chgData name="Cardoso, Pedro" userId="ee006439-85a0-498f-b89d-0754036c0812" providerId="ADAL" clId="{A37911E8-7C51-4F37-84AD-497340CEC656}" dt="2024-08-09T11:16:28.491" v="927"/>
+          <ac:spMkLst>
+            <pc:docMk/>
+            <pc:sldMk cId="2823083646" sldId="258"/>
+            <ac:spMk id="2" creationId="{9C25414E-08EF-96DA-2C41-F2FB41322122}"/>
+          </ac:spMkLst>
+        </pc:spChg>
+        <pc:spChg chg="add mod">
+          <ac:chgData name="Cardoso, Pedro" userId="ee006439-85a0-498f-b89d-0754036c0812" providerId="ADAL" clId="{A37911E8-7C51-4F37-84AD-497340CEC656}" dt="2024-08-09T11:16:28.491" v="927"/>
+          <ac:spMkLst>
+            <pc:docMk/>
+            <pc:sldMk cId="2823083646" sldId="258"/>
+            <ac:spMk id="3" creationId="{BE903BD1-7492-8ADA-C1DE-AB44FAE47E97}"/>
+          </ac:spMkLst>
+        </pc:spChg>
+        <pc:spChg chg="add mod">
+          <ac:chgData name="Cardoso, Pedro" userId="ee006439-85a0-498f-b89d-0754036c0812" providerId="ADAL" clId="{A37911E8-7C51-4F37-84AD-497340CEC656}" dt="2024-08-09T11:16:28.491" v="927"/>
+          <ac:spMkLst>
+            <pc:docMk/>
+            <pc:sldMk cId="2823083646" sldId="258"/>
+            <ac:spMk id="6" creationId="{4A6D3B11-6E04-67DD-2E5E-E5EF9882F09C}"/>
+          </ac:spMkLst>
+        </pc:spChg>
+        <pc:graphicFrameChg chg="mod modGraphic">
+          <ac:chgData name="Cardoso, Pedro" userId="ee006439-85a0-498f-b89d-0754036c0812" providerId="ADAL" clId="{A37911E8-7C51-4F37-84AD-497340CEC656}" dt="2024-08-09T11:35:11.908" v="1005" actId="20577"/>
+          <ac:graphicFrameMkLst>
+            <pc:docMk/>
+            <pc:sldMk cId="2823083646" sldId="258"/>
+            <ac:graphicFrameMk id="4" creationId="{66C6E2E5-8FCC-4CA6-092E-05ABC3F9C97F}"/>
+          </ac:graphicFrameMkLst>
+        </pc:graphicFrameChg>
+      </pc:sldChg>
+      <pc:sldChg chg="addSp modSp add mod">
+        <pc:chgData name="Cardoso, Pedro" userId="ee006439-85a0-498f-b89d-0754036c0812" providerId="ADAL" clId="{A37911E8-7C51-4F37-84AD-497340CEC656}" dt="2024-08-09T11:37:06.031" v="1125" actId="20577"/>
+        <pc:sldMkLst>
+          <pc:docMk/>
+          <pc:sldMk cId="3869274370" sldId="259"/>
+        </pc:sldMkLst>
+        <pc:spChg chg="add mod">
+          <ac:chgData name="Cardoso, Pedro" userId="ee006439-85a0-498f-b89d-0754036c0812" providerId="ADAL" clId="{A37911E8-7C51-4F37-84AD-497340CEC656}" dt="2024-08-09T11:16:29.152" v="928"/>
+          <ac:spMkLst>
+            <pc:docMk/>
+            <pc:sldMk cId="3869274370" sldId="259"/>
+            <ac:spMk id="2" creationId="{FDA9F1ED-D0AE-448D-E9A0-E936CDE0642C}"/>
+          </ac:spMkLst>
+        </pc:spChg>
+        <pc:spChg chg="add mod">
+          <ac:chgData name="Cardoso, Pedro" userId="ee006439-85a0-498f-b89d-0754036c0812" providerId="ADAL" clId="{A37911E8-7C51-4F37-84AD-497340CEC656}" dt="2024-08-09T11:16:29.152" v="928"/>
+          <ac:spMkLst>
+            <pc:docMk/>
+            <pc:sldMk cId="3869274370" sldId="259"/>
+            <ac:spMk id="3" creationId="{D9DEA1FD-127B-49C8-E2E9-3D899125209C}"/>
+          </ac:spMkLst>
+        </pc:spChg>
+        <pc:spChg chg="mod">
+          <ac:chgData name="Cardoso, Pedro" userId="ee006439-85a0-498f-b89d-0754036c0812" providerId="ADAL" clId="{A37911E8-7C51-4F37-84AD-497340CEC656}" dt="2024-08-09T11:06:38.838" v="676" actId="20577"/>
+          <ac:spMkLst>
+            <pc:docMk/>
+            <pc:sldMk cId="3869274370" sldId="259"/>
+            <ac:spMk id="5" creationId="{B7E67A8E-C4EE-2E68-D094-CEDFD1BFD3E7}"/>
+          </ac:spMkLst>
+        </pc:spChg>
+        <pc:spChg chg="add mod">
+          <ac:chgData name="Cardoso, Pedro" userId="ee006439-85a0-498f-b89d-0754036c0812" providerId="ADAL" clId="{A37911E8-7C51-4F37-84AD-497340CEC656}" dt="2024-08-09T11:16:29.152" v="928"/>
+          <ac:spMkLst>
+            <pc:docMk/>
+            <pc:sldMk cId="3869274370" sldId="259"/>
+            <ac:spMk id="6" creationId="{40E3BF6B-80F0-EF10-B546-137551973A0B}"/>
+          </ac:spMkLst>
+        </pc:spChg>
+        <pc:graphicFrameChg chg="mod modGraphic">
+          <ac:chgData name="Cardoso, Pedro" userId="ee006439-85a0-498f-b89d-0754036c0812" providerId="ADAL" clId="{A37911E8-7C51-4F37-84AD-497340CEC656}" dt="2024-08-09T11:37:06.031" v="1125" actId="20577"/>
+          <ac:graphicFrameMkLst>
+            <pc:docMk/>
+            <pc:sldMk cId="3869274370" sldId="259"/>
+            <ac:graphicFrameMk id="4" creationId="{66C6E2E5-8FCC-4CA6-092E-05ABC3F9C97F}"/>
+          </ac:graphicFrameMkLst>
+        </pc:graphicFrameChg>
+      </pc:sldChg>
+      <pc:sldChg chg="addSp modSp add mod">
+        <pc:chgData name="Cardoso, Pedro" userId="ee006439-85a0-498f-b89d-0754036c0812" providerId="ADAL" clId="{A37911E8-7C51-4F37-84AD-497340CEC656}" dt="2024-08-09T11:37:57.937" v="1176" actId="20577"/>
+        <pc:sldMkLst>
+          <pc:docMk/>
+          <pc:sldMk cId="3695857818" sldId="260"/>
+        </pc:sldMkLst>
+        <pc:spChg chg="add mod">
+          <ac:chgData name="Cardoso, Pedro" userId="ee006439-85a0-498f-b89d-0754036c0812" providerId="ADAL" clId="{A37911E8-7C51-4F37-84AD-497340CEC656}" dt="2024-08-09T11:16:29.737" v="929"/>
+          <ac:spMkLst>
+            <pc:docMk/>
+            <pc:sldMk cId="3695857818" sldId="260"/>
+            <ac:spMk id="2" creationId="{ADD6DA72-BF0C-B873-A9DF-A2D849EC5698}"/>
+          </ac:spMkLst>
+        </pc:spChg>
+        <pc:spChg chg="add mod">
+          <ac:chgData name="Cardoso, Pedro" userId="ee006439-85a0-498f-b89d-0754036c0812" providerId="ADAL" clId="{A37911E8-7C51-4F37-84AD-497340CEC656}" dt="2024-08-09T11:16:29.737" v="929"/>
+          <ac:spMkLst>
+            <pc:docMk/>
+            <pc:sldMk cId="3695857818" sldId="260"/>
+            <ac:spMk id="3" creationId="{BA750573-D24D-5626-5CFB-2FF8FB5CBDED}"/>
+          </ac:spMkLst>
+        </pc:spChg>
+        <pc:spChg chg="mod">
+          <ac:chgData name="Cardoso, Pedro" userId="ee006439-85a0-498f-b89d-0754036c0812" providerId="ADAL" clId="{A37911E8-7C51-4F37-84AD-497340CEC656}" dt="2024-08-09T11:08:38.552" v="730" actId="20577"/>
+          <ac:spMkLst>
+            <pc:docMk/>
+            <pc:sldMk cId="3695857818" sldId="260"/>
+            <ac:spMk id="5" creationId="{B7E67A8E-C4EE-2E68-D094-CEDFD1BFD3E7}"/>
+          </ac:spMkLst>
+        </pc:spChg>
+        <pc:spChg chg="add mod">
+          <ac:chgData name="Cardoso, Pedro" userId="ee006439-85a0-498f-b89d-0754036c0812" providerId="ADAL" clId="{A37911E8-7C51-4F37-84AD-497340CEC656}" dt="2024-08-09T11:16:29.737" v="929"/>
+          <ac:spMkLst>
+            <pc:docMk/>
+            <pc:sldMk cId="3695857818" sldId="260"/>
+            <ac:spMk id="6" creationId="{08B94C40-E918-F1C9-2504-21D29AC4C015}"/>
+          </ac:spMkLst>
+        </pc:spChg>
+        <pc:graphicFrameChg chg="mod modGraphic">
+          <ac:chgData name="Cardoso, Pedro" userId="ee006439-85a0-498f-b89d-0754036c0812" providerId="ADAL" clId="{A37911E8-7C51-4F37-84AD-497340CEC656}" dt="2024-08-09T11:37:57.937" v="1176" actId="20577"/>
+          <ac:graphicFrameMkLst>
+            <pc:docMk/>
+            <pc:sldMk cId="3695857818" sldId="260"/>
+            <ac:graphicFrameMk id="4" creationId="{66C6E2E5-8FCC-4CA6-092E-05ABC3F9C97F}"/>
+          </ac:graphicFrameMkLst>
+        </pc:graphicFrameChg>
+      </pc:sldChg>
+      <pc:sldChg chg="addSp modSp add mod">
+        <pc:chgData name="Cardoso, Pedro" userId="ee006439-85a0-498f-b89d-0754036c0812" providerId="ADAL" clId="{A37911E8-7C51-4F37-84AD-497340CEC656}" dt="2024-08-09T11:38:46.898" v="1234" actId="20577"/>
+        <pc:sldMkLst>
+          <pc:docMk/>
+          <pc:sldMk cId="2852127733" sldId="261"/>
+        </pc:sldMkLst>
+        <pc:spChg chg="add mod">
+          <ac:chgData name="Cardoso, Pedro" userId="ee006439-85a0-498f-b89d-0754036c0812" providerId="ADAL" clId="{A37911E8-7C51-4F37-84AD-497340CEC656}" dt="2024-08-09T11:16:30.342" v="930"/>
+          <ac:spMkLst>
+            <pc:docMk/>
+            <pc:sldMk cId="2852127733" sldId="261"/>
+            <ac:spMk id="2" creationId="{4082D9A0-5F8F-67CF-B880-D0F898ADEB50}"/>
+          </ac:spMkLst>
+        </pc:spChg>
+        <pc:spChg chg="add mod">
+          <ac:chgData name="Cardoso, Pedro" userId="ee006439-85a0-498f-b89d-0754036c0812" providerId="ADAL" clId="{A37911E8-7C51-4F37-84AD-497340CEC656}" dt="2024-08-09T11:16:30.342" v="930"/>
+          <ac:spMkLst>
+            <pc:docMk/>
+            <pc:sldMk cId="2852127733" sldId="261"/>
+            <ac:spMk id="3" creationId="{3860DE33-7E13-A8EC-BBE0-8D820E1C4D64}"/>
+          </ac:spMkLst>
+        </pc:spChg>
+        <pc:spChg chg="mod">
+          <ac:chgData name="Cardoso, Pedro" userId="ee006439-85a0-498f-b89d-0754036c0812" providerId="ADAL" clId="{A37911E8-7C51-4F37-84AD-497340CEC656}" dt="2024-08-09T11:10:29.625" v="793" actId="20577"/>
+          <ac:spMkLst>
+            <pc:docMk/>
+            <pc:sldMk cId="2852127733" sldId="261"/>
+            <ac:spMk id="5" creationId="{B7E67A8E-C4EE-2E68-D094-CEDFD1BFD3E7}"/>
+          </ac:spMkLst>
+        </pc:spChg>
+        <pc:spChg chg="add mod">
+          <ac:chgData name="Cardoso, Pedro" userId="ee006439-85a0-498f-b89d-0754036c0812" providerId="ADAL" clId="{A37911E8-7C51-4F37-84AD-497340CEC656}" dt="2024-08-09T11:16:30.342" v="930"/>
+          <ac:spMkLst>
+            <pc:docMk/>
+            <pc:sldMk cId="2852127733" sldId="261"/>
+            <ac:spMk id="6" creationId="{F8290A0C-7548-0947-E7C2-00D85C830A3F}"/>
+          </ac:spMkLst>
+        </pc:spChg>
+        <pc:graphicFrameChg chg="mod modGraphic">
+          <ac:chgData name="Cardoso, Pedro" userId="ee006439-85a0-498f-b89d-0754036c0812" providerId="ADAL" clId="{A37911E8-7C51-4F37-84AD-497340CEC656}" dt="2024-08-09T11:38:46.898" v="1234" actId="20577"/>
+          <ac:graphicFrameMkLst>
+            <pc:docMk/>
+            <pc:sldMk cId="2852127733" sldId="261"/>
+            <ac:graphicFrameMk id="4" creationId="{66C6E2E5-8FCC-4CA6-092E-05ABC3F9C97F}"/>
+          </ac:graphicFrameMkLst>
+        </pc:graphicFrameChg>
+      </pc:sldChg>
+      <pc:sldChg chg="addSp modSp add mod">
+        <pc:chgData name="Cardoso, Pedro" userId="ee006439-85a0-498f-b89d-0754036c0812" providerId="ADAL" clId="{A37911E8-7C51-4F37-84AD-497340CEC656}" dt="2024-08-09T11:39:28.834" v="1283" actId="20577"/>
+        <pc:sldMkLst>
+          <pc:docMk/>
+          <pc:sldMk cId="1046862339" sldId="262"/>
+        </pc:sldMkLst>
+        <pc:spChg chg="add mod">
+          <ac:chgData name="Cardoso, Pedro" userId="ee006439-85a0-498f-b89d-0754036c0812" providerId="ADAL" clId="{A37911E8-7C51-4F37-84AD-497340CEC656}" dt="2024-08-09T11:16:30.947" v="931"/>
+          <ac:spMkLst>
+            <pc:docMk/>
+            <pc:sldMk cId="1046862339" sldId="262"/>
+            <ac:spMk id="2" creationId="{FD487EDE-BA7C-8F71-0CA3-43FEC16448D9}"/>
+          </ac:spMkLst>
+        </pc:spChg>
+        <pc:spChg chg="add mod">
+          <ac:chgData name="Cardoso, Pedro" userId="ee006439-85a0-498f-b89d-0754036c0812" providerId="ADAL" clId="{A37911E8-7C51-4F37-84AD-497340CEC656}" dt="2024-08-09T11:16:30.947" v="931"/>
+          <ac:spMkLst>
+            <pc:docMk/>
+            <pc:sldMk cId="1046862339" sldId="262"/>
+            <ac:spMk id="3" creationId="{A84063EE-F1D5-2D03-DBAD-EAEFF961CC5A}"/>
+          </ac:spMkLst>
+        </pc:spChg>
+        <pc:spChg chg="mod">
+          <ac:chgData name="Cardoso, Pedro" userId="ee006439-85a0-498f-b89d-0754036c0812" providerId="ADAL" clId="{A37911E8-7C51-4F37-84AD-497340CEC656}" dt="2024-08-09T11:12:45.288" v="862" actId="20577"/>
+          <ac:spMkLst>
+            <pc:docMk/>
+            <pc:sldMk cId="1046862339" sldId="262"/>
+            <ac:spMk id="5" creationId="{B7E67A8E-C4EE-2E68-D094-CEDFD1BFD3E7}"/>
+          </ac:spMkLst>
+        </pc:spChg>
+        <pc:spChg chg="add mod">
+          <ac:chgData name="Cardoso, Pedro" userId="ee006439-85a0-498f-b89d-0754036c0812" providerId="ADAL" clId="{A37911E8-7C51-4F37-84AD-497340CEC656}" dt="2024-08-09T11:16:30.947" v="931"/>
+          <ac:spMkLst>
+            <pc:docMk/>
+            <pc:sldMk cId="1046862339" sldId="262"/>
+            <ac:spMk id="6" creationId="{B2C346DC-47B9-0EA6-09FF-7B8374843493}"/>
+          </ac:spMkLst>
+        </pc:spChg>
+        <pc:graphicFrameChg chg="mod modGraphic">
+          <ac:chgData name="Cardoso, Pedro" userId="ee006439-85a0-498f-b89d-0754036c0812" providerId="ADAL" clId="{A37911E8-7C51-4F37-84AD-497340CEC656}" dt="2024-08-09T11:39:28.834" v="1283" actId="20577"/>
+          <ac:graphicFrameMkLst>
+            <pc:docMk/>
+            <pc:sldMk cId="1046862339" sldId="262"/>
+            <ac:graphicFrameMk id="4" creationId="{66C6E2E5-8FCC-4CA6-092E-05ABC3F9C97F}"/>
+          </ac:graphicFrameMkLst>
+        </pc:graphicFrameChg>
       </pc:sldChg>
     </pc:docChg>
   </pc:docChgLst>
@@ -333,7 +634,7 @@
           <a:p>
             <a:fld id="{B82202D8-5BD7-4544-8F96-87C05092BB09}" type="datetimeFigureOut">
               <a:rPr lang="en-GB" smtClean="0"/>
-              <a:t>08/08/2024</a:t>
+              <a:t>09/08/2024</a:t>
             </a:fld>
             <a:endParaRPr lang="en-GB"/>
           </a:p>
@@ -533,7 +834,7 @@
           <a:p>
             <a:fld id="{B82202D8-5BD7-4544-8F96-87C05092BB09}" type="datetimeFigureOut">
               <a:rPr lang="en-GB" smtClean="0"/>
-              <a:t>08/08/2024</a:t>
+              <a:t>09/08/2024</a:t>
             </a:fld>
             <a:endParaRPr lang="en-GB"/>
           </a:p>
@@ -743,7 +1044,7 @@
           <a:p>
             <a:fld id="{B82202D8-5BD7-4544-8F96-87C05092BB09}" type="datetimeFigureOut">
               <a:rPr lang="en-GB" smtClean="0"/>
-              <a:t>08/08/2024</a:t>
+              <a:t>09/08/2024</a:t>
             </a:fld>
             <a:endParaRPr lang="en-GB"/>
           </a:p>
@@ -943,7 +1244,7 @@
           <a:p>
             <a:fld id="{B82202D8-5BD7-4544-8F96-87C05092BB09}" type="datetimeFigureOut">
               <a:rPr lang="en-GB" smtClean="0"/>
-              <a:t>08/08/2024</a:t>
+              <a:t>09/08/2024</a:t>
             </a:fld>
             <a:endParaRPr lang="en-GB"/>
           </a:p>
@@ -1219,7 +1520,7 @@
           <a:p>
             <a:fld id="{B82202D8-5BD7-4544-8F96-87C05092BB09}" type="datetimeFigureOut">
               <a:rPr lang="en-GB" smtClean="0"/>
-              <a:t>08/08/2024</a:t>
+              <a:t>09/08/2024</a:t>
             </a:fld>
             <a:endParaRPr lang="en-GB"/>
           </a:p>
@@ -1487,7 +1788,7 @@
           <a:p>
             <a:fld id="{B82202D8-5BD7-4544-8F96-87C05092BB09}" type="datetimeFigureOut">
               <a:rPr lang="en-GB" smtClean="0"/>
-              <a:t>08/08/2024</a:t>
+              <a:t>09/08/2024</a:t>
             </a:fld>
             <a:endParaRPr lang="en-GB"/>
           </a:p>
@@ -1902,7 +2203,7 @@
           <a:p>
             <a:fld id="{B82202D8-5BD7-4544-8F96-87C05092BB09}" type="datetimeFigureOut">
               <a:rPr lang="en-GB" smtClean="0"/>
-              <a:t>08/08/2024</a:t>
+              <a:t>09/08/2024</a:t>
             </a:fld>
             <a:endParaRPr lang="en-GB"/>
           </a:p>
@@ -2044,7 +2345,7 @@
           <a:p>
             <a:fld id="{B82202D8-5BD7-4544-8F96-87C05092BB09}" type="datetimeFigureOut">
               <a:rPr lang="en-GB" smtClean="0"/>
-              <a:t>08/08/2024</a:t>
+              <a:t>09/08/2024</a:t>
             </a:fld>
             <a:endParaRPr lang="en-GB"/>
           </a:p>
@@ -2157,7 +2458,7 @@
           <a:p>
             <a:fld id="{B82202D8-5BD7-4544-8F96-87C05092BB09}" type="datetimeFigureOut">
               <a:rPr lang="en-GB" smtClean="0"/>
-              <a:t>08/08/2024</a:t>
+              <a:t>09/08/2024</a:t>
             </a:fld>
             <a:endParaRPr lang="en-GB"/>
           </a:p>
@@ -2470,7 +2771,7 @@
           <a:p>
             <a:fld id="{B82202D8-5BD7-4544-8F96-87C05092BB09}" type="datetimeFigureOut">
               <a:rPr lang="en-GB" smtClean="0"/>
-              <a:t>08/08/2024</a:t>
+              <a:t>09/08/2024</a:t>
             </a:fld>
             <a:endParaRPr lang="en-GB"/>
           </a:p>
@@ -2759,7 +3060,7 @@
           <a:p>
             <a:fld id="{B82202D8-5BD7-4544-8F96-87C05092BB09}" type="datetimeFigureOut">
               <a:rPr lang="en-GB" smtClean="0"/>
-              <a:t>08/08/2024</a:t>
+              <a:t>09/08/2024</a:t>
             </a:fld>
             <a:endParaRPr lang="en-GB"/>
           </a:p>
@@ -3002,7 +3303,7 @@
           <a:p>
             <a:fld id="{B82202D8-5BD7-4544-8F96-87C05092BB09}" type="datetimeFigureOut">
               <a:rPr lang="en-GB" smtClean="0"/>
-              <a:t>08/08/2024</a:t>
+              <a:t>09/08/2024</a:t>
             </a:fld>
             <a:endParaRPr lang="en-GB"/>
           </a:p>
@@ -3674,6 +3975,7314 @@
 </p:sld>
 </file>
 
+<file path=ppt/slides/slide2.xml><?xml version="1.0" encoding="utf-8"?>
+<p:sld xmlns:a="http://schemas.openxmlformats.org/drawingml/2006/main" xmlns:r="http://schemas.openxmlformats.org/officeDocument/2006/relationships" xmlns:p="http://schemas.openxmlformats.org/presentationml/2006/main">
+  <p:cSld>
+    <p:spTree>
+      <p:nvGrpSpPr>
+        <p:cNvPr id="1" name=""/>
+        <p:cNvGrpSpPr/>
+        <p:nvPr/>
+      </p:nvGrpSpPr>
+      <p:grpSpPr>
+        <a:xfrm>
+          <a:off x="0" y="0"/>
+          <a:ext cx="0" cy="0"/>
+          <a:chOff x="0" y="0"/>
+          <a:chExt cx="0" cy="0"/>
+        </a:xfrm>
+      </p:grpSpPr>
+      <p:graphicFrame>
+        <p:nvGraphicFramePr>
+          <p:cNvPr id="4" name="Table 3">
+            <a:extLst>
+              <a:ext uri="{FF2B5EF4-FFF2-40B4-BE49-F238E27FC236}">
+                <a16:creationId xmlns:a16="http://schemas.microsoft.com/office/drawing/2014/main" id="{66C6E2E5-8FCC-4CA6-092E-05ABC3F9C97F}"/>
+              </a:ext>
+            </a:extLst>
+          </p:cNvPr>
+          <p:cNvGraphicFramePr>
+            <a:graphicFrameLocks noGrp="1"/>
+          </p:cNvGraphicFramePr>
+          <p:nvPr>
+            <p:extLst>
+              <p:ext uri="{D42A27DB-BD31-4B8C-83A1-F6EECF244321}">
+                <p14:modId xmlns:p14="http://schemas.microsoft.com/office/powerpoint/2010/main" val="928915311"/>
+              </p:ext>
+            </p:extLst>
+          </p:nvPr>
+        </p:nvGraphicFramePr>
+        <p:xfrm>
+          <a:off x="717550" y="1310216"/>
+          <a:ext cx="10569097" cy="2966720"/>
+        </p:xfrm>
+        <a:graphic>
+          <a:graphicData uri="http://schemas.openxmlformats.org/drawingml/2006/table">
+            <a:tbl>
+              <a:tblPr firstRow="1" bandRow="1">
+                <a:tableStyleId>{5C22544A-7EE6-4342-B048-85BDC9FD1C3A}</a:tableStyleId>
+              </a:tblPr>
+              <a:tblGrid>
+                <a:gridCol w="1803273">
+                  <a:extLst>
+                    <a:ext uri="{9D8B030D-6E8A-4147-A177-3AD203B41FA5}">
+                      <a16:colId xmlns:a16="http://schemas.microsoft.com/office/drawing/2014/main" val="2591732828"/>
+                    </a:ext>
+                  </a:extLst>
+                </a:gridCol>
+                <a:gridCol w="1095728">
+                  <a:extLst>
+                    <a:ext uri="{9D8B030D-6E8A-4147-A177-3AD203B41FA5}">
+                      <a16:colId xmlns:a16="http://schemas.microsoft.com/office/drawing/2014/main" val="115166983"/>
+                    </a:ext>
+                  </a:extLst>
+                </a:gridCol>
+                <a:gridCol w="1095728">
+                  <a:extLst>
+                    <a:ext uri="{9D8B030D-6E8A-4147-A177-3AD203B41FA5}">
+                      <a16:colId xmlns:a16="http://schemas.microsoft.com/office/drawing/2014/main" val="2575733845"/>
+                    </a:ext>
+                  </a:extLst>
+                </a:gridCol>
+                <a:gridCol w="1095728">
+                  <a:extLst>
+                    <a:ext uri="{9D8B030D-6E8A-4147-A177-3AD203B41FA5}">
+                      <a16:colId xmlns:a16="http://schemas.microsoft.com/office/drawing/2014/main" val="3485148647"/>
+                    </a:ext>
+                  </a:extLst>
+                </a:gridCol>
+                <a:gridCol w="1095728">
+                  <a:extLst>
+                    <a:ext uri="{9D8B030D-6E8A-4147-A177-3AD203B41FA5}">
+                      <a16:colId xmlns:a16="http://schemas.microsoft.com/office/drawing/2014/main" val="1824331962"/>
+                    </a:ext>
+                  </a:extLst>
+                </a:gridCol>
+                <a:gridCol w="1095728">
+                  <a:extLst>
+                    <a:ext uri="{9D8B030D-6E8A-4147-A177-3AD203B41FA5}">
+                      <a16:colId xmlns:a16="http://schemas.microsoft.com/office/drawing/2014/main" val="3080864844"/>
+                    </a:ext>
+                  </a:extLst>
+                </a:gridCol>
+                <a:gridCol w="1095728">
+                  <a:extLst>
+                    <a:ext uri="{9D8B030D-6E8A-4147-A177-3AD203B41FA5}">
+                      <a16:colId xmlns:a16="http://schemas.microsoft.com/office/drawing/2014/main" val="449442134"/>
+                    </a:ext>
+                  </a:extLst>
+                </a:gridCol>
+                <a:gridCol w="1095728">
+                  <a:extLst>
+                    <a:ext uri="{9D8B030D-6E8A-4147-A177-3AD203B41FA5}">
+                      <a16:colId xmlns:a16="http://schemas.microsoft.com/office/drawing/2014/main" val="3152022562"/>
+                    </a:ext>
+                  </a:extLst>
+                </a:gridCol>
+                <a:gridCol w="1095728">
+                  <a:extLst>
+                    <a:ext uri="{9D8B030D-6E8A-4147-A177-3AD203B41FA5}">
+                      <a16:colId xmlns:a16="http://schemas.microsoft.com/office/drawing/2014/main" val="3621369029"/>
+                    </a:ext>
+                  </a:extLst>
+                </a:gridCol>
+              </a:tblGrid>
+              <a:tr h="370840">
+                <a:tc>
+                  <a:txBody>
+                    <a:bodyPr/>
+                    <a:lstStyle/>
+                    <a:p>
+                      <a:endParaRPr lang="en-GB" dirty="0"/>
+                    </a:p>
+                  </a:txBody>
+                  <a:tcPr/>
+                </a:tc>
+                <a:tc gridSpan="8">
+                  <a:txBody>
+                    <a:bodyPr/>
+                    <a:lstStyle/>
+                    <a:p>
+                      <a:r>
+                        <a:rPr lang="en-GB" dirty="0"/>
+                        <a:t>Drug periods recorded</a:t>
+                      </a:r>
+                    </a:p>
+                  </a:txBody>
+                  <a:tcPr/>
+                </a:tc>
+                <a:tc hMerge="1">
+                  <a:txBody>
+                    <a:bodyPr/>
+                    <a:lstStyle/>
+                    <a:p>
+                      <a:endParaRPr lang="en-GB" dirty="0"/>
+                    </a:p>
+                  </a:txBody>
+                  <a:tcPr/>
+                </a:tc>
+                <a:tc hMerge="1">
+                  <a:txBody>
+                    <a:bodyPr/>
+                    <a:lstStyle/>
+                    <a:p>
+                      <a:endParaRPr lang="en-GB" dirty="0"/>
+                    </a:p>
+                  </a:txBody>
+                  <a:tcPr/>
+                </a:tc>
+                <a:tc hMerge="1">
+                  <a:txBody>
+                    <a:bodyPr/>
+                    <a:lstStyle/>
+                    <a:p>
+                      <a:endParaRPr lang="en-GB" dirty="0"/>
+                    </a:p>
+                  </a:txBody>
+                  <a:tcPr/>
+                </a:tc>
+                <a:tc hMerge="1">
+                  <a:txBody>
+                    <a:bodyPr/>
+                    <a:lstStyle/>
+                    <a:p>
+                      <a:endParaRPr lang="en-GB" dirty="0"/>
+                    </a:p>
+                  </a:txBody>
+                  <a:tcPr/>
+                </a:tc>
+                <a:tc hMerge="1">
+                  <a:txBody>
+                    <a:bodyPr/>
+                    <a:lstStyle/>
+                    <a:p>
+                      <a:endParaRPr lang="en-GB" dirty="0"/>
+                    </a:p>
+                  </a:txBody>
+                  <a:tcPr/>
+                </a:tc>
+                <a:tc hMerge="1">
+                  <a:txBody>
+                    <a:bodyPr/>
+                    <a:lstStyle/>
+                    <a:p>
+                      <a:endParaRPr lang="en-GB" dirty="0"/>
+                    </a:p>
+                  </a:txBody>
+                  <a:tcPr/>
+                </a:tc>
+                <a:tc hMerge="1">
+                  <a:txBody>
+                    <a:bodyPr/>
+                    <a:lstStyle/>
+                    <a:p>
+                      <a:endParaRPr lang="en-GB" dirty="0"/>
+                    </a:p>
+                  </a:txBody>
+                  <a:tcPr/>
+                </a:tc>
+                <a:extLst>
+                  <a:ext uri="{0D108BD9-81ED-4DB2-BD59-A6C34878D82A}">
+                    <a16:rowId xmlns:a16="http://schemas.microsoft.com/office/drawing/2014/main" val="3449528469"/>
+                  </a:ext>
+                </a:extLst>
+              </a:tr>
+              <a:tr h="370840">
+                <a:tc>
+                  <a:txBody>
+                    <a:bodyPr/>
+                    <a:lstStyle/>
+                    <a:p>
+                      <a:r>
+                        <a:rPr lang="en-GB" dirty="0"/>
+                        <a:t>Discontinuation</a:t>
+                      </a:r>
+                    </a:p>
+                  </a:txBody>
+                  <a:tcPr/>
+                </a:tc>
+                <a:tc>
+                  <a:txBody>
+                    <a:bodyPr/>
+                    <a:lstStyle/>
+                    <a:p>
+                      <a:r>
+                        <a:rPr lang="en-GB" dirty="0"/>
+                        <a:t>1</a:t>
+                      </a:r>
+                    </a:p>
+                  </a:txBody>
+                  <a:tcPr/>
+                </a:tc>
+                <a:tc>
+                  <a:txBody>
+                    <a:bodyPr/>
+                    <a:lstStyle/>
+                    <a:p>
+                      <a:r>
+                        <a:rPr lang="en-GB" dirty="0"/>
+                        <a:t>2</a:t>
+                      </a:r>
+                    </a:p>
+                  </a:txBody>
+                  <a:tcPr/>
+                </a:tc>
+                <a:tc>
+                  <a:txBody>
+                    <a:bodyPr/>
+                    <a:lstStyle/>
+                    <a:p>
+                      <a:r>
+                        <a:rPr lang="en-GB" dirty="0"/>
+                        <a:t>3</a:t>
+                      </a:r>
+                    </a:p>
+                  </a:txBody>
+                  <a:tcPr/>
+                </a:tc>
+                <a:tc>
+                  <a:txBody>
+                    <a:bodyPr/>
+                    <a:lstStyle/>
+                    <a:p>
+                      <a:r>
+                        <a:rPr lang="en-GB" dirty="0"/>
+                        <a:t>4</a:t>
+                      </a:r>
+                    </a:p>
+                  </a:txBody>
+                  <a:tcPr/>
+                </a:tc>
+                <a:tc>
+                  <a:txBody>
+                    <a:bodyPr/>
+                    <a:lstStyle/>
+                    <a:p>
+                      <a:r>
+                        <a:rPr lang="en-GB" dirty="0"/>
+                        <a:t>5</a:t>
+                      </a:r>
+                    </a:p>
+                  </a:txBody>
+                  <a:tcPr/>
+                </a:tc>
+                <a:tc>
+                  <a:txBody>
+                    <a:bodyPr/>
+                    <a:lstStyle/>
+                    <a:p>
+                      <a:r>
+                        <a:rPr lang="en-GB" dirty="0"/>
+                        <a:t>6</a:t>
+                      </a:r>
+                    </a:p>
+                  </a:txBody>
+                  <a:tcPr/>
+                </a:tc>
+                <a:tc>
+                  <a:txBody>
+                    <a:bodyPr/>
+                    <a:lstStyle/>
+                    <a:p>
+                      <a:r>
+                        <a:rPr lang="en-GB" dirty="0"/>
+                        <a:t>7</a:t>
+                      </a:r>
+                    </a:p>
+                  </a:txBody>
+                  <a:tcPr/>
+                </a:tc>
+                <a:tc>
+                  <a:txBody>
+                    <a:bodyPr/>
+                    <a:lstStyle/>
+                    <a:p>
+                      <a:r>
+                        <a:rPr lang="en-GB" dirty="0"/>
+                        <a:t>8</a:t>
+                      </a:r>
+                    </a:p>
+                  </a:txBody>
+                  <a:tcPr/>
+                </a:tc>
+                <a:extLst>
+                  <a:ext uri="{0D108BD9-81ED-4DB2-BD59-A6C34878D82A}">
+                    <a16:rowId xmlns:a16="http://schemas.microsoft.com/office/drawing/2014/main" val="1496173031"/>
+                  </a:ext>
+                </a:extLst>
+              </a:tr>
+              <a:tr h="370840">
+                <a:tc>
+                  <a:txBody>
+                    <a:bodyPr/>
+                    <a:lstStyle/>
+                    <a:p>
+                      <a:r>
+                        <a:rPr lang="en-GB" dirty="0"/>
+                        <a:t>0 (n=149,123)</a:t>
+                      </a:r>
+                    </a:p>
+                  </a:txBody>
+                  <a:tcPr/>
+                </a:tc>
+                <a:tc>
+                  <a:txBody>
+                    <a:bodyPr/>
+                    <a:lstStyle/>
+                    <a:p>
+                      <a:r>
+                        <a:rPr lang="en-GB" dirty="0"/>
+                        <a:t>88.57</a:t>
+                      </a:r>
+                    </a:p>
+                  </a:txBody>
+                  <a:tcPr/>
+                </a:tc>
+                <a:tc>
+                  <a:txBody>
+                    <a:bodyPr/>
+                    <a:lstStyle/>
+                    <a:p>
+                      <a:r>
+                        <a:rPr lang="en-GB" dirty="0"/>
+                        <a:t>8.97</a:t>
+                      </a:r>
+                    </a:p>
+                  </a:txBody>
+                  <a:tcPr/>
+                </a:tc>
+                <a:tc>
+                  <a:txBody>
+                    <a:bodyPr/>
+                    <a:lstStyle/>
+                    <a:p>
+                      <a:r>
+                        <a:rPr lang="en-GB" dirty="0"/>
+                        <a:t>1.80</a:t>
+                      </a:r>
+                    </a:p>
+                  </a:txBody>
+                  <a:tcPr/>
+                </a:tc>
+                <a:tc>
+                  <a:txBody>
+                    <a:bodyPr/>
+                    <a:lstStyle/>
+                    <a:p>
+                      <a:r>
+                        <a:rPr lang="en-GB" dirty="0"/>
+                        <a:t>0.49</a:t>
+                      </a:r>
+                    </a:p>
+                  </a:txBody>
+                  <a:tcPr/>
+                </a:tc>
+                <a:tc>
+                  <a:txBody>
+                    <a:bodyPr/>
+                    <a:lstStyle/>
+                    <a:p>
+                      <a:r>
+                        <a:rPr lang="en-GB" dirty="0"/>
+                        <a:t>0.13</a:t>
+                      </a:r>
+                    </a:p>
+                  </a:txBody>
+                  <a:tcPr/>
+                </a:tc>
+                <a:tc>
+                  <a:txBody>
+                    <a:bodyPr/>
+                    <a:lstStyle/>
+                    <a:p>
+                      <a:r>
+                        <a:rPr lang="en-GB" dirty="0"/>
+                        <a:t>0.03</a:t>
+                      </a:r>
+                    </a:p>
+                  </a:txBody>
+                  <a:tcPr/>
+                </a:tc>
+                <a:tc>
+                  <a:txBody>
+                    <a:bodyPr/>
+                    <a:lstStyle/>
+                    <a:p>
+                      <a:r>
+                        <a:rPr lang="en-GB" dirty="0"/>
+                        <a:t>0.01</a:t>
+                      </a:r>
+                    </a:p>
+                  </a:txBody>
+                  <a:tcPr/>
+                </a:tc>
+                <a:tc>
+                  <a:txBody>
+                    <a:bodyPr/>
+                    <a:lstStyle/>
+                    <a:p>
+                      <a:r>
+                        <a:rPr lang="en-GB" dirty="0"/>
+                        <a:t>0.00</a:t>
+                      </a:r>
+                    </a:p>
+                  </a:txBody>
+                  <a:tcPr/>
+                </a:tc>
+                <a:extLst>
+                  <a:ext uri="{0D108BD9-81ED-4DB2-BD59-A6C34878D82A}">
+                    <a16:rowId xmlns:a16="http://schemas.microsoft.com/office/drawing/2014/main" val="926079196"/>
+                  </a:ext>
+                </a:extLst>
+              </a:tr>
+              <a:tr h="370840">
+                <a:tc>
+                  <a:txBody>
+                    <a:bodyPr/>
+                    <a:lstStyle/>
+                    <a:p>
+                      <a:r>
+                        <a:rPr lang="en-GB" dirty="0"/>
+                        <a:t>1 (n=5,585)</a:t>
+                      </a:r>
+                    </a:p>
+                  </a:txBody>
+                  <a:tcPr/>
+                </a:tc>
+                <a:tc>
+                  <a:txBody>
+                    <a:bodyPr/>
+                    <a:lstStyle/>
+                    <a:p>
+                      <a:r>
+                        <a:rPr lang="en-GB" dirty="0"/>
+                        <a:t>74.06</a:t>
+                      </a:r>
+                    </a:p>
+                  </a:txBody>
+                  <a:tcPr/>
+                </a:tc>
+                <a:tc>
+                  <a:txBody>
+                    <a:bodyPr/>
+                    <a:lstStyle/>
+                    <a:p>
+                      <a:r>
+                        <a:rPr lang="en-GB" dirty="0"/>
+                        <a:t>21.97</a:t>
+                      </a:r>
+                    </a:p>
+                  </a:txBody>
+                  <a:tcPr/>
+                </a:tc>
+                <a:tc>
+                  <a:txBody>
+                    <a:bodyPr/>
+                    <a:lstStyle/>
+                    <a:p>
+                      <a:r>
+                        <a:rPr lang="en-GB" dirty="0"/>
+                        <a:t>3.15</a:t>
+                      </a:r>
+                    </a:p>
+                  </a:txBody>
+                  <a:tcPr/>
+                </a:tc>
+                <a:tc>
+                  <a:txBody>
+                    <a:bodyPr/>
+                    <a:lstStyle/>
+                    <a:p>
+                      <a:r>
+                        <a:rPr lang="en-GB" dirty="0"/>
+                        <a:t>0.64</a:t>
+                      </a:r>
+                    </a:p>
+                  </a:txBody>
+                  <a:tcPr/>
+                </a:tc>
+                <a:tc>
+                  <a:txBody>
+                    <a:bodyPr/>
+                    <a:lstStyle/>
+                    <a:p>
+                      <a:r>
+                        <a:rPr lang="en-GB" dirty="0"/>
+                        <a:t>0.14</a:t>
+                      </a:r>
+                    </a:p>
+                  </a:txBody>
+                  <a:tcPr/>
+                </a:tc>
+                <a:tc>
+                  <a:txBody>
+                    <a:bodyPr/>
+                    <a:lstStyle/>
+                    <a:p>
+                      <a:r>
+                        <a:rPr lang="en-GB" dirty="0"/>
+                        <a:t>0.02</a:t>
+                      </a:r>
+                    </a:p>
+                  </a:txBody>
+                  <a:tcPr/>
+                </a:tc>
+                <a:tc>
+                  <a:txBody>
+                    <a:bodyPr/>
+                    <a:lstStyle/>
+                    <a:p>
+                      <a:r>
+                        <a:rPr lang="en-GB" dirty="0"/>
+                        <a:t>0.02</a:t>
+                      </a:r>
+                    </a:p>
+                  </a:txBody>
+                  <a:tcPr/>
+                </a:tc>
+                <a:tc>
+                  <a:txBody>
+                    <a:bodyPr/>
+                    <a:lstStyle/>
+                    <a:p>
+                      <a:r>
+                        <a:rPr lang="en-GB" dirty="0"/>
+                        <a:t>0.00</a:t>
+                      </a:r>
+                    </a:p>
+                  </a:txBody>
+                  <a:tcPr/>
+                </a:tc>
+                <a:extLst>
+                  <a:ext uri="{0D108BD9-81ED-4DB2-BD59-A6C34878D82A}">
+                    <a16:rowId xmlns:a16="http://schemas.microsoft.com/office/drawing/2014/main" val="1232296111"/>
+                  </a:ext>
+                </a:extLst>
+              </a:tr>
+              <a:tr h="370840">
+                <a:tc>
+                  <a:txBody>
+                    <a:bodyPr/>
+                    <a:lstStyle/>
+                    <a:p>
+                      <a:r>
+                        <a:rPr lang="en-GB" dirty="0"/>
+                        <a:t>2 (n=18,863)</a:t>
+                      </a:r>
+                    </a:p>
+                  </a:txBody>
+                  <a:tcPr/>
+                </a:tc>
+                <a:tc>
+                  <a:txBody>
+                    <a:bodyPr/>
+                    <a:lstStyle/>
+                    <a:p>
+                      <a:r>
+                        <a:rPr lang="en-GB" dirty="0"/>
+                        <a:t>55.46</a:t>
+                      </a:r>
+                    </a:p>
+                  </a:txBody>
+                  <a:tcPr/>
+                </a:tc>
+                <a:tc>
+                  <a:txBody>
+                    <a:bodyPr/>
+                    <a:lstStyle/>
+                    <a:p>
+                      <a:r>
+                        <a:rPr lang="en-GB" dirty="0"/>
+                        <a:t>32.00</a:t>
+                      </a:r>
+                    </a:p>
+                  </a:txBody>
+                  <a:tcPr/>
+                </a:tc>
+                <a:tc>
+                  <a:txBody>
+                    <a:bodyPr/>
+                    <a:lstStyle/>
+                    <a:p>
+                      <a:r>
+                        <a:rPr lang="en-GB" dirty="0"/>
+                        <a:t>8.40</a:t>
+                      </a:r>
+                    </a:p>
+                  </a:txBody>
+                  <a:tcPr/>
+                </a:tc>
+                <a:tc>
+                  <a:txBody>
+                    <a:bodyPr/>
+                    <a:lstStyle/>
+                    <a:p>
+                      <a:r>
+                        <a:rPr lang="en-GB" dirty="0"/>
+                        <a:t>2.89</a:t>
+                      </a:r>
+                    </a:p>
+                  </a:txBody>
+                  <a:tcPr/>
+                </a:tc>
+                <a:tc>
+                  <a:txBody>
+                    <a:bodyPr/>
+                    <a:lstStyle/>
+                    <a:p>
+                      <a:r>
+                        <a:rPr lang="en-GB" dirty="0"/>
+                        <a:t>0.95</a:t>
+                      </a:r>
+                    </a:p>
+                  </a:txBody>
+                  <a:tcPr/>
+                </a:tc>
+                <a:tc>
+                  <a:txBody>
+                    <a:bodyPr/>
+                    <a:lstStyle/>
+                    <a:p>
+                      <a:r>
+                        <a:rPr lang="en-GB" dirty="0"/>
+                        <a:t>0.22</a:t>
+                      </a:r>
+                    </a:p>
+                  </a:txBody>
+                  <a:tcPr/>
+                </a:tc>
+                <a:tc>
+                  <a:txBody>
+                    <a:bodyPr/>
+                    <a:lstStyle/>
+                    <a:p>
+                      <a:r>
+                        <a:rPr lang="en-GB" dirty="0"/>
+                        <a:t>0.06</a:t>
+                      </a:r>
+                    </a:p>
+                  </a:txBody>
+                  <a:tcPr/>
+                </a:tc>
+                <a:tc>
+                  <a:txBody>
+                    <a:bodyPr/>
+                    <a:lstStyle/>
+                    <a:p>
+                      <a:r>
+                        <a:rPr lang="en-GB" dirty="0"/>
+                        <a:t>0.02</a:t>
+                      </a:r>
+                    </a:p>
+                  </a:txBody>
+                  <a:tcPr/>
+                </a:tc>
+                <a:extLst>
+                  <a:ext uri="{0D108BD9-81ED-4DB2-BD59-A6C34878D82A}">
+                    <a16:rowId xmlns:a16="http://schemas.microsoft.com/office/drawing/2014/main" val="3569907657"/>
+                  </a:ext>
+                </a:extLst>
+              </a:tr>
+              <a:tr h="370840">
+                <a:tc>
+                  <a:txBody>
+                    <a:bodyPr/>
+                    <a:lstStyle/>
+                    <a:p>
+                      <a:r>
+                        <a:rPr lang="en-GB" dirty="0"/>
+                        <a:t>3 (n=300)</a:t>
+                      </a:r>
+                    </a:p>
+                  </a:txBody>
+                  <a:tcPr/>
+                </a:tc>
+                <a:tc>
+                  <a:txBody>
+                    <a:bodyPr/>
+                    <a:lstStyle/>
+                    <a:p>
+                      <a:r>
+                        <a:rPr lang="en-GB" dirty="0"/>
+                        <a:t>50.00</a:t>
+                      </a:r>
+                    </a:p>
+                  </a:txBody>
+                  <a:tcPr/>
+                </a:tc>
+                <a:tc>
+                  <a:txBody>
+                    <a:bodyPr/>
+                    <a:lstStyle/>
+                    <a:p>
+                      <a:r>
+                        <a:rPr lang="en-GB" dirty="0"/>
+                        <a:t>31.00</a:t>
+                      </a:r>
+                    </a:p>
+                  </a:txBody>
+                  <a:tcPr/>
+                </a:tc>
+                <a:tc>
+                  <a:txBody>
+                    <a:bodyPr/>
+                    <a:lstStyle/>
+                    <a:p>
+                      <a:r>
+                        <a:rPr lang="en-GB" dirty="0"/>
+                        <a:t>12.67</a:t>
+                      </a:r>
+                    </a:p>
+                  </a:txBody>
+                  <a:tcPr/>
+                </a:tc>
+                <a:tc>
+                  <a:txBody>
+                    <a:bodyPr/>
+                    <a:lstStyle/>
+                    <a:p>
+                      <a:r>
+                        <a:rPr lang="en-GB" dirty="0"/>
+                        <a:t>4.00</a:t>
+                      </a:r>
+                    </a:p>
+                  </a:txBody>
+                  <a:tcPr/>
+                </a:tc>
+                <a:tc>
+                  <a:txBody>
+                    <a:bodyPr/>
+                    <a:lstStyle/>
+                    <a:p>
+                      <a:r>
+                        <a:rPr lang="en-GB" dirty="0"/>
+                        <a:t>1.67</a:t>
+                      </a:r>
+                    </a:p>
+                  </a:txBody>
+                  <a:tcPr/>
+                </a:tc>
+                <a:tc>
+                  <a:txBody>
+                    <a:bodyPr/>
+                    <a:lstStyle/>
+                    <a:p>
+                      <a:r>
+                        <a:rPr lang="en-GB" dirty="0"/>
+                        <a:t>0.67</a:t>
+                      </a:r>
+                    </a:p>
+                  </a:txBody>
+                  <a:tcPr/>
+                </a:tc>
+                <a:tc>
+                  <a:txBody>
+                    <a:bodyPr/>
+                    <a:lstStyle/>
+                    <a:p>
+                      <a:r>
+                        <a:rPr lang="en-GB" dirty="0"/>
+                        <a:t>0.00</a:t>
+                      </a:r>
+                    </a:p>
+                  </a:txBody>
+                  <a:tcPr/>
+                </a:tc>
+                <a:tc>
+                  <a:txBody>
+                    <a:bodyPr/>
+                    <a:lstStyle/>
+                    <a:p>
+                      <a:r>
+                        <a:rPr lang="en-GB" dirty="0"/>
+                        <a:t>0.00</a:t>
+                      </a:r>
+                    </a:p>
+                  </a:txBody>
+                  <a:tcPr/>
+                </a:tc>
+                <a:extLst>
+                  <a:ext uri="{0D108BD9-81ED-4DB2-BD59-A6C34878D82A}">
+                    <a16:rowId xmlns:a16="http://schemas.microsoft.com/office/drawing/2014/main" val="2193292983"/>
+                  </a:ext>
+                </a:extLst>
+              </a:tr>
+              <a:tr h="370840">
+                <a:tc>
+                  <a:txBody>
+                    <a:bodyPr/>
+                    <a:lstStyle/>
+                    <a:p>
+                      <a:r>
+                        <a:rPr lang="en-GB" dirty="0"/>
+                        <a:t>4 (n=362)</a:t>
+                      </a:r>
+                    </a:p>
+                  </a:txBody>
+                  <a:tcPr/>
+                </a:tc>
+                <a:tc>
+                  <a:txBody>
+                    <a:bodyPr/>
+                    <a:lstStyle/>
+                    <a:p>
+                      <a:r>
+                        <a:rPr lang="en-GB" dirty="0"/>
+                        <a:t>100.00</a:t>
+                      </a:r>
+                    </a:p>
+                  </a:txBody>
+                  <a:tcPr/>
+                </a:tc>
+                <a:tc>
+                  <a:txBody>
+                    <a:bodyPr/>
+                    <a:lstStyle/>
+                    <a:p>
+                      <a:r>
+                        <a:rPr lang="en-GB" dirty="0"/>
+                        <a:t>0.00</a:t>
+                      </a:r>
+                    </a:p>
+                  </a:txBody>
+                  <a:tcPr/>
+                </a:tc>
+                <a:tc>
+                  <a:txBody>
+                    <a:bodyPr/>
+                    <a:lstStyle/>
+                    <a:p>
+                      <a:r>
+                        <a:rPr lang="en-GB" dirty="0"/>
+                        <a:t>0.00</a:t>
+                      </a:r>
+                    </a:p>
+                  </a:txBody>
+                  <a:tcPr/>
+                </a:tc>
+                <a:tc>
+                  <a:txBody>
+                    <a:bodyPr/>
+                    <a:lstStyle/>
+                    <a:p>
+                      <a:r>
+                        <a:rPr lang="en-GB" dirty="0"/>
+                        <a:t>0.00</a:t>
+                      </a:r>
+                    </a:p>
+                  </a:txBody>
+                  <a:tcPr/>
+                </a:tc>
+                <a:tc>
+                  <a:txBody>
+                    <a:bodyPr/>
+                    <a:lstStyle/>
+                    <a:p>
+                      <a:r>
+                        <a:rPr lang="en-GB" dirty="0"/>
+                        <a:t>0.00</a:t>
+                      </a:r>
+                    </a:p>
+                  </a:txBody>
+                  <a:tcPr/>
+                </a:tc>
+                <a:tc>
+                  <a:txBody>
+                    <a:bodyPr/>
+                    <a:lstStyle/>
+                    <a:p>
+                      <a:r>
+                        <a:rPr lang="en-GB" dirty="0"/>
+                        <a:t>0.00</a:t>
+                      </a:r>
+                    </a:p>
+                  </a:txBody>
+                  <a:tcPr/>
+                </a:tc>
+                <a:tc>
+                  <a:txBody>
+                    <a:bodyPr/>
+                    <a:lstStyle/>
+                    <a:p>
+                      <a:r>
+                        <a:rPr lang="en-GB" dirty="0"/>
+                        <a:t>0.00</a:t>
+                      </a:r>
+                    </a:p>
+                  </a:txBody>
+                  <a:tcPr/>
+                </a:tc>
+                <a:tc>
+                  <a:txBody>
+                    <a:bodyPr/>
+                    <a:lstStyle/>
+                    <a:p>
+                      <a:r>
+                        <a:rPr lang="en-GB" dirty="0"/>
+                        <a:t>0.00</a:t>
+                      </a:r>
+                    </a:p>
+                  </a:txBody>
+                  <a:tcPr/>
+                </a:tc>
+                <a:extLst>
+                  <a:ext uri="{0D108BD9-81ED-4DB2-BD59-A6C34878D82A}">
+                    <a16:rowId xmlns:a16="http://schemas.microsoft.com/office/drawing/2014/main" val="3496583969"/>
+                  </a:ext>
+                </a:extLst>
+              </a:tr>
+              <a:tr h="370840">
+                <a:tc>
+                  <a:txBody>
+                    <a:bodyPr/>
+                    <a:lstStyle/>
+                    <a:p>
+                      <a:r>
+                        <a:rPr lang="en-GB" dirty="0"/>
+                        <a:t>NA (n=5)</a:t>
+                      </a:r>
+                    </a:p>
+                  </a:txBody>
+                  <a:tcPr/>
+                </a:tc>
+                <a:tc>
+                  <a:txBody>
+                    <a:bodyPr/>
+                    <a:lstStyle/>
+                    <a:p>
+                      <a:r>
+                        <a:rPr lang="en-GB" dirty="0"/>
+                        <a:t>100.00</a:t>
+                      </a:r>
+                    </a:p>
+                  </a:txBody>
+                  <a:tcPr/>
+                </a:tc>
+                <a:tc>
+                  <a:txBody>
+                    <a:bodyPr/>
+                    <a:lstStyle/>
+                    <a:p>
+                      <a:r>
+                        <a:rPr lang="en-GB" dirty="0"/>
+                        <a:t>0.00</a:t>
+                      </a:r>
+                    </a:p>
+                  </a:txBody>
+                  <a:tcPr/>
+                </a:tc>
+                <a:tc>
+                  <a:txBody>
+                    <a:bodyPr/>
+                    <a:lstStyle/>
+                    <a:p>
+                      <a:r>
+                        <a:rPr lang="en-GB" dirty="0"/>
+                        <a:t>0.00</a:t>
+                      </a:r>
+                    </a:p>
+                  </a:txBody>
+                  <a:tcPr/>
+                </a:tc>
+                <a:tc>
+                  <a:txBody>
+                    <a:bodyPr/>
+                    <a:lstStyle/>
+                    <a:p>
+                      <a:r>
+                        <a:rPr lang="en-GB" dirty="0"/>
+                        <a:t>0.00</a:t>
+                      </a:r>
+                    </a:p>
+                  </a:txBody>
+                  <a:tcPr/>
+                </a:tc>
+                <a:tc>
+                  <a:txBody>
+                    <a:bodyPr/>
+                    <a:lstStyle/>
+                    <a:p>
+                      <a:r>
+                        <a:rPr lang="en-GB" dirty="0"/>
+                        <a:t>0.00</a:t>
+                      </a:r>
+                    </a:p>
+                  </a:txBody>
+                  <a:tcPr/>
+                </a:tc>
+                <a:tc>
+                  <a:txBody>
+                    <a:bodyPr/>
+                    <a:lstStyle/>
+                    <a:p>
+                      <a:r>
+                        <a:rPr lang="en-GB" dirty="0"/>
+                        <a:t>0.00</a:t>
+                      </a:r>
+                    </a:p>
+                  </a:txBody>
+                  <a:tcPr/>
+                </a:tc>
+                <a:tc>
+                  <a:txBody>
+                    <a:bodyPr/>
+                    <a:lstStyle/>
+                    <a:p>
+                      <a:r>
+                        <a:rPr lang="en-GB" dirty="0"/>
+                        <a:t>0.00</a:t>
+                      </a:r>
+                    </a:p>
+                  </a:txBody>
+                  <a:tcPr/>
+                </a:tc>
+                <a:tc>
+                  <a:txBody>
+                    <a:bodyPr/>
+                    <a:lstStyle/>
+                    <a:p>
+                      <a:r>
+                        <a:rPr lang="en-GB" dirty="0"/>
+                        <a:t>0.00</a:t>
+                      </a:r>
+                    </a:p>
+                  </a:txBody>
+                  <a:tcPr/>
+                </a:tc>
+                <a:extLst>
+                  <a:ext uri="{0D108BD9-81ED-4DB2-BD59-A6C34878D82A}">
+                    <a16:rowId xmlns:a16="http://schemas.microsoft.com/office/drawing/2014/main" val="3970979412"/>
+                  </a:ext>
+                </a:extLst>
+              </a:tr>
+            </a:tbl>
+          </a:graphicData>
+        </a:graphic>
+      </p:graphicFrame>
+      <p:sp>
+        <p:nvSpPr>
+          <p:cNvPr id="5" name="TextBox 4">
+            <a:extLst>
+              <a:ext uri="{FF2B5EF4-FFF2-40B4-BE49-F238E27FC236}">
+                <a16:creationId xmlns:a16="http://schemas.microsoft.com/office/drawing/2014/main" id="{B7E67A8E-C4EE-2E68-D094-CEDFD1BFD3E7}"/>
+              </a:ext>
+            </a:extLst>
+          </p:cNvPr>
+          <p:cNvSpPr txBox="1"/>
+          <p:nvPr/>
+        </p:nvSpPr>
+        <p:spPr>
+          <a:xfrm>
+            <a:off x="234950" y="336550"/>
+            <a:ext cx="7226300" cy="369332"/>
+          </a:xfrm>
+          <a:prstGeom prst="rect">
+            <a:avLst/>
+          </a:prstGeom>
+          <a:noFill/>
+        </p:spPr>
+        <p:txBody>
+          <a:bodyPr wrap="square" rtlCol="0">
+            <a:spAutoFit/>
+          </a:bodyPr>
+          <a:lstStyle/>
+          <a:p>
+            <a:r>
+              <a:rPr lang="en-GB" dirty="0"/>
+              <a:t>Metformin</a:t>
+            </a:r>
+          </a:p>
+        </p:txBody>
+      </p:sp>
+      <p:sp>
+        <p:nvSpPr>
+          <p:cNvPr id="6" name="TextBox 5">
+            <a:extLst>
+              <a:ext uri="{FF2B5EF4-FFF2-40B4-BE49-F238E27FC236}">
+                <a16:creationId xmlns:a16="http://schemas.microsoft.com/office/drawing/2014/main" id="{2655FA58-0658-DE30-EE58-A759F7EEF13D}"/>
+              </a:ext>
+            </a:extLst>
+          </p:cNvPr>
+          <p:cNvSpPr txBox="1"/>
+          <p:nvPr/>
+        </p:nvSpPr>
+        <p:spPr>
+          <a:xfrm>
+            <a:off x="3234871" y="4683210"/>
+            <a:ext cx="7826829" cy="2031325"/>
+          </a:xfrm>
+          <a:prstGeom prst="rect">
+            <a:avLst/>
+          </a:prstGeom>
+          <a:noFill/>
+        </p:spPr>
+        <p:txBody>
+          <a:bodyPr wrap="square" rtlCol="0">
+            <a:spAutoFit/>
+          </a:bodyPr>
+          <a:lstStyle/>
+          <a:p>
+            <a:r>
+              <a:rPr lang="en-GB" dirty="0"/>
+              <a:t>Rules:</a:t>
+            </a:r>
+          </a:p>
+          <a:p>
+            <a:r>
+              <a:rPr lang="en-GB" dirty="0"/>
+              <a:t>0. </a:t>
+            </a:r>
+            <a:r>
+              <a:rPr lang="en-GB" i="1" dirty="0" err="1"/>
+              <a:t>timeondrug</a:t>
+            </a:r>
+            <a:r>
+              <a:rPr lang="en-GB" dirty="0"/>
+              <a:t> bigger than 91 / 183 / 365 (not represented here)</a:t>
+            </a:r>
+          </a:p>
+          <a:p>
+            <a:r>
+              <a:rPr lang="en-GB" dirty="0"/>
+              <a:t>1. </a:t>
+            </a:r>
+            <a:r>
+              <a:rPr lang="en-GB" i="1" dirty="0" err="1"/>
+              <a:t>timeondrug</a:t>
+            </a:r>
+            <a:r>
+              <a:rPr lang="en-GB" dirty="0"/>
+              <a:t> less than 91 / 183 / 365</a:t>
+            </a:r>
+          </a:p>
+          <a:p>
+            <a:r>
+              <a:rPr lang="en-GB" dirty="0"/>
+              <a:t>2. </a:t>
+            </a:r>
+            <a:r>
+              <a:rPr lang="en-GB" i="1" dirty="0" err="1"/>
+              <a:t>nextremdrug</a:t>
+            </a:r>
+            <a:r>
+              <a:rPr lang="en-GB" dirty="0"/>
+              <a:t> = NA (represents a break in the current drug before restarting)</a:t>
+            </a:r>
+          </a:p>
+          <a:p>
+            <a:r>
+              <a:rPr lang="en-GB" dirty="0"/>
+              <a:t>3. </a:t>
+            </a:r>
+            <a:r>
+              <a:rPr lang="en-GB" i="1" dirty="0" err="1"/>
+              <a:t>nextremdrug</a:t>
+            </a:r>
+            <a:r>
+              <a:rPr lang="en-GB" dirty="0"/>
+              <a:t> = different drug removed from row drug class</a:t>
+            </a:r>
+          </a:p>
+          <a:p>
+            <a:r>
+              <a:rPr lang="en-GB" dirty="0"/>
+              <a:t>4. </a:t>
+            </a:r>
+            <a:r>
+              <a:rPr lang="en-GB" i="1" dirty="0" err="1"/>
+              <a:t>timetolastpx</a:t>
+            </a:r>
+            <a:r>
+              <a:rPr lang="en-GB" i="1" dirty="0"/>
+              <a:t> – </a:t>
+            </a:r>
+            <a:r>
+              <a:rPr lang="en-GB" i="1" dirty="0" err="1"/>
+              <a:t>timeondrug</a:t>
+            </a:r>
+            <a:r>
+              <a:rPr lang="en-GB" dirty="0"/>
+              <a:t> &lt; 91 / 183</a:t>
+            </a:r>
+          </a:p>
+          <a:p>
+            <a:r>
+              <a:rPr lang="en-GB" dirty="0"/>
+              <a:t>NA. anything else (</a:t>
+            </a:r>
+            <a:r>
+              <a:rPr lang="en-GB" b="1" dirty="0"/>
+              <a:t>what thought??</a:t>
+            </a:r>
+            <a:r>
+              <a:rPr lang="en-GB" dirty="0"/>
+              <a:t>)</a:t>
+            </a:r>
+          </a:p>
+        </p:txBody>
+      </p:sp>
+      <p:sp>
+        <p:nvSpPr>
+          <p:cNvPr id="7" name="Left Brace 6">
+            <a:extLst>
+              <a:ext uri="{FF2B5EF4-FFF2-40B4-BE49-F238E27FC236}">
+                <a16:creationId xmlns:a16="http://schemas.microsoft.com/office/drawing/2014/main" id="{355321E9-8D4A-6A3F-6A58-38C2A4A23D81}"/>
+              </a:ext>
+            </a:extLst>
+          </p:cNvPr>
+          <p:cNvSpPr/>
+          <p:nvPr/>
+        </p:nvSpPr>
+        <p:spPr>
+          <a:xfrm>
+            <a:off x="2901950" y="5594350"/>
+            <a:ext cx="196850" cy="1048289"/>
+          </a:xfrm>
+          <a:prstGeom prst="leftBrace">
+            <a:avLst/>
+          </a:prstGeom>
+        </p:spPr>
+        <p:style>
+          <a:lnRef idx="2">
+            <a:schemeClr val="accent1"/>
+          </a:lnRef>
+          <a:fillRef idx="0">
+            <a:schemeClr val="accent1"/>
+          </a:fillRef>
+          <a:effectRef idx="1">
+            <a:schemeClr val="accent1"/>
+          </a:effectRef>
+          <a:fontRef idx="minor">
+            <a:schemeClr val="tx1"/>
+          </a:fontRef>
+        </p:style>
+        <p:txBody>
+          <a:bodyPr rtlCol="0" anchor="ctr"/>
+          <a:lstStyle/>
+          <a:p>
+            <a:pPr algn="ctr"/>
+            <a:endParaRPr lang="en-GB"/>
+          </a:p>
+        </p:txBody>
+      </p:sp>
+      <p:sp>
+        <p:nvSpPr>
+          <p:cNvPr id="8" name="TextBox 7">
+            <a:extLst>
+              <a:ext uri="{FF2B5EF4-FFF2-40B4-BE49-F238E27FC236}">
+                <a16:creationId xmlns:a16="http://schemas.microsoft.com/office/drawing/2014/main" id="{D79C47EC-D2B4-47D3-2616-F4351202F5EF}"/>
+              </a:ext>
+            </a:extLst>
+          </p:cNvPr>
+          <p:cNvSpPr txBox="1"/>
+          <p:nvPr/>
+        </p:nvSpPr>
+        <p:spPr>
+          <a:xfrm>
+            <a:off x="651702" y="5867400"/>
+            <a:ext cx="2114177" cy="646331"/>
+          </a:xfrm>
+          <a:prstGeom prst="rect">
+            <a:avLst/>
+          </a:prstGeom>
+          <a:noFill/>
+        </p:spPr>
+        <p:txBody>
+          <a:bodyPr wrap="square" rtlCol="0">
+            <a:spAutoFit/>
+          </a:bodyPr>
+          <a:lstStyle/>
+          <a:p>
+            <a:r>
+              <a:rPr lang="en-GB" dirty="0"/>
+              <a:t>Old Rules:</a:t>
+            </a:r>
+          </a:p>
+          <a:p>
+            <a:r>
+              <a:rPr lang="en-GB" dirty="0"/>
+              <a:t>These would be NA</a:t>
+            </a:r>
+          </a:p>
+        </p:txBody>
+      </p:sp>
+    </p:spTree>
+    <p:extLst>
+      <p:ext uri="{BB962C8B-B14F-4D97-AF65-F5344CB8AC3E}">
+        <p14:creationId xmlns:p14="http://schemas.microsoft.com/office/powerpoint/2010/main" val="4020432183"/>
+      </p:ext>
+    </p:extLst>
+  </p:cSld>
+  <p:clrMapOvr>
+    <a:masterClrMapping/>
+  </p:clrMapOvr>
+</p:sld>
+</file>
+
+<file path=ppt/slides/slide3.xml><?xml version="1.0" encoding="utf-8"?>
+<p:sld xmlns:a="http://schemas.openxmlformats.org/drawingml/2006/main" xmlns:r="http://schemas.openxmlformats.org/officeDocument/2006/relationships" xmlns:p="http://schemas.openxmlformats.org/presentationml/2006/main">
+  <p:cSld>
+    <p:spTree>
+      <p:nvGrpSpPr>
+        <p:cNvPr id="1" name=""/>
+        <p:cNvGrpSpPr/>
+        <p:nvPr/>
+      </p:nvGrpSpPr>
+      <p:grpSpPr>
+        <a:xfrm>
+          <a:off x="0" y="0"/>
+          <a:ext cx="0" cy="0"/>
+          <a:chOff x="0" y="0"/>
+          <a:chExt cx="0" cy="0"/>
+        </a:xfrm>
+      </p:grpSpPr>
+      <p:graphicFrame>
+        <p:nvGraphicFramePr>
+          <p:cNvPr id="4" name="Table 3">
+            <a:extLst>
+              <a:ext uri="{FF2B5EF4-FFF2-40B4-BE49-F238E27FC236}">
+                <a16:creationId xmlns:a16="http://schemas.microsoft.com/office/drawing/2014/main" id="{66C6E2E5-8FCC-4CA6-092E-05ABC3F9C97F}"/>
+              </a:ext>
+            </a:extLst>
+          </p:cNvPr>
+          <p:cNvGraphicFramePr>
+            <a:graphicFrameLocks noGrp="1"/>
+          </p:cNvGraphicFramePr>
+          <p:nvPr>
+            <p:extLst>
+              <p:ext uri="{D42A27DB-BD31-4B8C-83A1-F6EECF244321}">
+                <p14:modId xmlns:p14="http://schemas.microsoft.com/office/powerpoint/2010/main" val="2430318232"/>
+              </p:ext>
+            </p:extLst>
+          </p:nvPr>
+        </p:nvGraphicFramePr>
+        <p:xfrm>
+          <a:off x="717550" y="1310216"/>
+          <a:ext cx="9473369" cy="2966720"/>
+        </p:xfrm>
+        <a:graphic>
+          <a:graphicData uri="http://schemas.openxmlformats.org/drawingml/2006/table">
+            <a:tbl>
+              <a:tblPr firstRow="1" bandRow="1">
+                <a:tableStyleId>{5C22544A-7EE6-4342-B048-85BDC9FD1C3A}</a:tableStyleId>
+              </a:tblPr>
+              <a:tblGrid>
+                <a:gridCol w="1803273">
+                  <a:extLst>
+                    <a:ext uri="{9D8B030D-6E8A-4147-A177-3AD203B41FA5}">
+                      <a16:colId xmlns:a16="http://schemas.microsoft.com/office/drawing/2014/main" val="2591732828"/>
+                    </a:ext>
+                  </a:extLst>
+                </a:gridCol>
+                <a:gridCol w="1095728">
+                  <a:extLst>
+                    <a:ext uri="{9D8B030D-6E8A-4147-A177-3AD203B41FA5}">
+                      <a16:colId xmlns:a16="http://schemas.microsoft.com/office/drawing/2014/main" val="115166983"/>
+                    </a:ext>
+                  </a:extLst>
+                </a:gridCol>
+                <a:gridCol w="1095728">
+                  <a:extLst>
+                    <a:ext uri="{9D8B030D-6E8A-4147-A177-3AD203B41FA5}">
+                      <a16:colId xmlns:a16="http://schemas.microsoft.com/office/drawing/2014/main" val="2575733845"/>
+                    </a:ext>
+                  </a:extLst>
+                </a:gridCol>
+                <a:gridCol w="1095728">
+                  <a:extLst>
+                    <a:ext uri="{9D8B030D-6E8A-4147-A177-3AD203B41FA5}">
+                      <a16:colId xmlns:a16="http://schemas.microsoft.com/office/drawing/2014/main" val="3485148647"/>
+                    </a:ext>
+                  </a:extLst>
+                </a:gridCol>
+                <a:gridCol w="1095728">
+                  <a:extLst>
+                    <a:ext uri="{9D8B030D-6E8A-4147-A177-3AD203B41FA5}">
+                      <a16:colId xmlns:a16="http://schemas.microsoft.com/office/drawing/2014/main" val="1824331962"/>
+                    </a:ext>
+                  </a:extLst>
+                </a:gridCol>
+                <a:gridCol w="1095728">
+                  <a:extLst>
+                    <a:ext uri="{9D8B030D-6E8A-4147-A177-3AD203B41FA5}">
+                      <a16:colId xmlns:a16="http://schemas.microsoft.com/office/drawing/2014/main" val="3080864844"/>
+                    </a:ext>
+                  </a:extLst>
+                </a:gridCol>
+                <a:gridCol w="1095728">
+                  <a:extLst>
+                    <a:ext uri="{9D8B030D-6E8A-4147-A177-3AD203B41FA5}">
+                      <a16:colId xmlns:a16="http://schemas.microsoft.com/office/drawing/2014/main" val="449442134"/>
+                    </a:ext>
+                  </a:extLst>
+                </a:gridCol>
+                <a:gridCol w="1095728">
+                  <a:extLst>
+                    <a:ext uri="{9D8B030D-6E8A-4147-A177-3AD203B41FA5}">
+                      <a16:colId xmlns:a16="http://schemas.microsoft.com/office/drawing/2014/main" val="3152022562"/>
+                    </a:ext>
+                  </a:extLst>
+                </a:gridCol>
+              </a:tblGrid>
+              <a:tr h="370840">
+                <a:tc>
+                  <a:txBody>
+                    <a:bodyPr/>
+                    <a:lstStyle/>
+                    <a:p>
+                      <a:endParaRPr lang="en-GB" dirty="0"/>
+                    </a:p>
+                  </a:txBody>
+                  <a:tcPr/>
+                </a:tc>
+                <a:tc gridSpan="7">
+                  <a:txBody>
+                    <a:bodyPr/>
+                    <a:lstStyle/>
+                    <a:p>
+                      <a:r>
+                        <a:rPr lang="en-GB" dirty="0"/>
+                        <a:t>Drug periods recorded</a:t>
+                      </a:r>
+                    </a:p>
+                  </a:txBody>
+                  <a:tcPr/>
+                </a:tc>
+                <a:tc hMerge="1">
+                  <a:txBody>
+                    <a:bodyPr/>
+                    <a:lstStyle/>
+                    <a:p>
+                      <a:endParaRPr lang="en-GB" dirty="0"/>
+                    </a:p>
+                  </a:txBody>
+                  <a:tcPr/>
+                </a:tc>
+                <a:tc hMerge="1">
+                  <a:txBody>
+                    <a:bodyPr/>
+                    <a:lstStyle/>
+                    <a:p>
+                      <a:endParaRPr lang="en-GB" dirty="0"/>
+                    </a:p>
+                  </a:txBody>
+                  <a:tcPr/>
+                </a:tc>
+                <a:tc hMerge="1">
+                  <a:txBody>
+                    <a:bodyPr/>
+                    <a:lstStyle/>
+                    <a:p>
+                      <a:endParaRPr lang="en-GB" dirty="0"/>
+                    </a:p>
+                  </a:txBody>
+                  <a:tcPr/>
+                </a:tc>
+                <a:tc hMerge="1">
+                  <a:txBody>
+                    <a:bodyPr/>
+                    <a:lstStyle/>
+                    <a:p>
+                      <a:endParaRPr lang="en-GB" dirty="0"/>
+                    </a:p>
+                  </a:txBody>
+                  <a:tcPr/>
+                </a:tc>
+                <a:tc hMerge="1">
+                  <a:txBody>
+                    <a:bodyPr/>
+                    <a:lstStyle/>
+                    <a:p>
+                      <a:endParaRPr lang="en-GB" dirty="0"/>
+                    </a:p>
+                  </a:txBody>
+                  <a:tcPr/>
+                </a:tc>
+                <a:tc hMerge="1">
+                  <a:txBody>
+                    <a:bodyPr/>
+                    <a:lstStyle/>
+                    <a:p>
+                      <a:endParaRPr lang="en-GB" dirty="0"/>
+                    </a:p>
+                  </a:txBody>
+                  <a:tcPr/>
+                </a:tc>
+                <a:extLst>
+                  <a:ext uri="{0D108BD9-81ED-4DB2-BD59-A6C34878D82A}">
+                    <a16:rowId xmlns:a16="http://schemas.microsoft.com/office/drawing/2014/main" val="3449528469"/>
+                  </a:ext>
+                </a:extLst>
+              </a:tr>
+              <a:tr h="370840">
+                <a:tc>
+                  <a:txBody>
+                    <a:bodyPr/>
+                    <a:lstStyle/>
+                    <a:p>
+                      <a:r>
+                        <a:rPr lang="en-GB" dirty="0"/>
+                        <a:t>Discontinuation</a:t>
+                      </a:r>
+                    </a:p>
+                  </a:txBody>
+                  <a:tcPr/>
+                </a:tc>
+                <a:tc>
+                  <a:txBody>
+                    <a:bodyPr/>
+                    <a:lstStyle/>
+                    <a:p>
+                      <a:r>
+                        <a:rPr lang="en-GB" dirty="0"/>
+                        <a:t>1</a:t>
+                      </a:r>
+                    </a:p>
+                  </a:txBody>
+                  <a:tcPr/>
+                </a:tc>
+                <a:tc>
+                  <a:txBody>
+                    <a:bodyPr/>
+                    <a:lstStyle/>
+                    <a:p>
+                      <a:r>
+                        <a:rPr lang="en-GB" dirty="0"/>
+                        <a:t>2</a:t>
+                      </a:r>
+                    </a:p>
+                  </a:txBody>
+                  <a:tcPr/>
+                </a:tc>
+                <a:tc>
+                  <a:txBody>
+                    <a:bodyPr/>
+                    <a:lstStyle/>
+                    <a:p>
+                      <a:r>
+                        <a:rPr lang="en-GB" dirty="0"/>
+                        <a:t>3</a:t>
+                      </a:r>
+                    </a:p>
+                  </a:txBody>
+                  <a:tcPr/>
+                </a:tc>
+                <a:tc>
+                  <a:txBody>
+                    <a:bodyPr/>
+                    <a:lstStyle/>
+                    <a:p>
+                      <a:r>
+                        <a:rPr lang="en-GB" dirty="0"/>
+                        <a:t>4</a:t>
+                      </a:r>
+                    </a:p>
+                  </a:txBody>
+                  <a:tcPr/>
+                </a:tc>
+                <a:tc>
+                  <a:txBody>
+                    <a:bodyPr/>
+                    <a:lstStyle/>
+                    <a:p>
+                      <a:r>
+                        <a:rPr lang="en-GB" dirty="0"/>
+                        <a:t>5</a:t>
+                      </a:r>
+                    </a:p>
+                  </a:txBody>
+                  <a:tcPr/>
+                </a:tc>
+                <a:tc>
+                  <a:txBody>
+                    <a:bodyPr/>
+                    <a:lstStyle/>
+                    <a:p>
+                      <a:r>
+                        <a:rPr lang="en-GB" dirty="0"/>
+                        <a:t>6</a:t>
+                      </a:r>
+                    </a:p>
+                  </a:txBody>
+                  <a:tcPr/>
+                </a:tc>
+                <a:tc>
+                  <a:txBody>
+                    <a:bodyPr/>
+                    <a:lstStyle/>
+                    <a:p>
+                      <a:r>
+                        <a:rPr lang="en-GB" dirty="0"/>
+                        <a:t>7</a:t>
+                      </a:r>
+                    </a:p>
+                  </a:txBody>
+                  <a:tcPr/>
+                </a:tc>
+                <a:extLst>
+                  <a:ext uri="{0D108BD9-81ED-4DB2-BD59-A6C34878D82A}">
+                    <a16:rowId xmlns:a16="http://schemas.microsoft.com/office/drawing/2014/main" val="1496173031"/>
+                  </a:ext>
+                </a:extLst>
+              </a:tr>
+              <a:tr h="370840">
+                <a:tc>
+                  <a:txBody>
+                    <a:bodyPr/>
+                    <a:lstStyle/>
+                    <a:p>
+                      <a:r>
+                        <a:rPr lang="en-GB" dirty="0"/>
+                        <a:t>0 (n=79,761)</a:t>
+                      </a:r>
+                    </a:p>
+                  </a:txBody>
+                  <a:tcPr/>
+                </a:tc>
+                <a:tc>
+                  <a:txBody>
+                    <a:bodyPr/>
+                    <a:lstStyle/>
+                    <a:p>
+                      <a:r>
+                        <a:rPr lang="en-GB" dirty="0"/>
+                        <a:t>92.75</a:t>
+                      </a:r>
+                    </a:p>
+                  </a:txBody>
+                  <a:tcPr/>
+                </a:tc>
+                <a:tc>
+                  <a:txBody>
+                    <a:bodyPr/>
+                    <a:lstStyle/>
+                    <a:p>
+                      <a:r>
+                        <a:rPr lang="en-GB" dirty="0"/>
+                        <a:t>6.38</a:t>
+                      </a:r>
+                    </a:p>
+                  </a:txBody>
+                  <a:tcPr/>
+                </a:tc>
+                <a:tc>
+                  <a:txBody>
+                    <a:bodyPr/>
+                    <a:lstStyle/>
+                    <a:p>
+                      <a:r>
+                        <a:rPr lang="en-GB" dirty="0"/>
+                        <a:t>0.71</a:t>
+                      </a:r>
+                    </a:p>
+                  </a:txBody>
+                  <a:tcPr/>
+                </a:tc>
+                <a:tc>
+                  <a:txBody>
+                    <a:bodyPr/>
+                    <a:lstStyle/>
+                    <a:p>
+                      <a:r>
+                        <a:rPr lang="en-GB" dirty="0"/>
+                        <a:t>0.13</a:t>
+                      </a:r>
+                    </a:p>
+                  </a:txBody>
+                  <a:tcPr/>
+                </a:tc>
+                <a:tc>
+                  <a:txBody>
+                    <a:bodyPr/>
+                    <a:lstStyle/>
+                    <a:p>
+                      <a:r>
+                        <a:rPr lang="en-GB" dirty="0"/>
+                        <a:t>0.02</a:t>
+                      </a:r>
+                    </a:p>
+                  </a:txBody>
+                  <a:tcPr/>
+                </a:tc>
+                <a:tc>
+                  <a:txBody>
+                    <a:bodyPr/>
+                    <a:lstStyle/>
+                    <a:p>
+                      <a:r>
+                        <a:rPr lang="en-GB" dirty="0"/>
+                        <a:t>0.01</a:t>
+                      </a:r>
+                    </a:p>
+                  </a:txBody>
+                  <a:tcPr/>
+                </a:tc>
+                <a:tc>
+                  <a:txBody>
+                    <a:bodyPr/>
+                    <a:lstStyle/>
+                    <a:p>
+                      <a:r>
+                        <a:rPr lang="en-GB" dirty="0"/>
+                        <a:t>0.00</a:t>
+                      </a:r>
+                    </a:p>
+                  </a:txBody>
+                  <a:tcPr/>
+                </a:tc>
+                <a:extLst>
+                  <a:ext uri="{0D108BD9-81ED-4DB2-BD59-A6C34878D82A}">
+                    <a16:rowId xmlns:a16="http://schemas.microsoft.com/office/drawing/2014/main" val="926079196"/>
+                  </a:ext>
+                </a:extLst>
+              </a:tr>
+              <a:tr h="370840">
+                <a:tc>
+                  <a:txBody>
+                    <a:bodyPr/>
+                    <a:lstStyle/>
+                    <a:p>
+                      <a:r>
+                        <a:rPr lang="en-GB" dirty="0"/>
+                        <a:t>1 (n=10,875)</a:t>
+                      </a:r>
+                    </a:p>
+                  </a:txBody>
+                  <a:tcPr/>
+                </a:tc>
+                <a:tc>
+                  <a:txBody>
+                    <a:bodyPr/>
+                    <a:lstStyle/>
+                    <a:p>
+                      <a:r>
+                        <a:rPr lang="en-GB" dirty="0"/>
+                        <a:t>67.34</a:t>
+                      </a:r>
+                    </a:p>
+                  </a:txBody>
+                  <a:tcPr/>
+                </a:tc>
+                <a:tc>
+                  <a:txBody>
+                    <a:bodyPr/>
+                    <a:lstStyle/>
+                    <a:p>
+                      <a:r>
+                        <a:rPr lang="en-GB" dirty="0"/>
+                        <a:t>28.30</a:t>
+                      </a:r>
+                    </a:p>
+                  </a:txBody>
+                  <a:tcPr/>
+                </a:tc>
+                <a:tc>
+                  <a:txBody>
+                    <a:bodyPr/>
+                    <a:lstStyle/>
+                    <a:p>
+                      <a:r>
+                        <a:rPr lang="en-GB" dirty="0"/>
+                        <a:t>3.62</a:t>
+                      </a:r>
+                    </a:p>
+                  </a:txBody>
+                  <a:tcPr/>
+                </a:tc>
+                <a:tc>
+                  <a:txBody>
+                    <a:bodyPr/>
+                    <a:lstStyle/>
+                    <a:p>
+                      <a:r>
+                        <a:rPr lang="en-GB" dirty="0"/>
+                        <a:t>0.62</a:t>
+                      </a:r>
+                    </a:p>
+                  </a:txBody>
+                  <a:tcPr/>
+                </a:tc>
+                <a:tc>
+                  <a:txBody>
+                    <a:bodyPr/>
+                    <a:lstStyle/>
+                    <a:p>
+                      <a:r>
+                        <a:rPr lang="en-GB" dirty="0"/>
+                        <a:t>0.06</a:t>
+                      </a:r>
+                    </a:p>
+                  </a:txBody>
+                  <a:tcPr/>
+                </a:tc>
+                <a:tc>
+                  <a:txBody>
+                    <a:bodyPr/>
+                    <a:lstStyle/>
+                    <a:p>
+                      <a:r>
+                        <a:rPr lang="en-GB" dirty="0"/>
+                        <a:t>0.05</a:t>
+                      </a:r>
+                    </a:p>
+                  </a:txBody>
+                  <a:tcPr/>
+                </a:tc>
+                <a:tc>
+                  <a:txBody>
+                    <a:bodyPr/>
+                    <a:lstStyle/>
+                    <a:p>
+                      <a:r>
+                        <a:rPr lang="en-GB" dirty="0"/>
+                        <a:t>0.02</a:t>
+                      </a:r>
+                    </a:p>
+                  </a:txBody>
+                  <a:tcPr/>
+                </a:tc>
+                <a:extLst>
+                  <a:ext uri="{0D108BD9-81ED-4DB2-BD59-A6C34878D82A}">
+                    <a16:rowId xmlns:a16="http://schemas.microsoft.com/office/drawing/2014/main" val="1232296111"/>
+                  </a:ext>
+                </a:extLst>
+              </a:tr>
+              <a:tr h="370840">
+                <a:tc>
+                  <a:txBody>
+                    <a:bodyPr/>
+                    <a:lstStyle/>
+                    <a:p>
+                      <a:r>
+                        <a:rPr lang="en-GB" dirty="0"/>
+                        <a:t>2 (n=4,830)</a:t>
+                      </a:r>
+                    </a:p>
+                  </a:txBody>
+                  <a:tcPr/>
+                </a:tc>
+                <a:tc>
+                  <a:txBody>
+                    <a:bodyPr/>
+                    <a:lstStyle/>
+                    <a:p>
+                      <a:r>
+                        <a:rPr lang="en-GB" dirty="0"/>
+                        <a:t>86.96</a:t>
+                      </a:r>
+                    </a:p>
+                  </a:txBody>
+                  <a:tcPr/>
+                </a:tc>
+                <a:tc>
+                  <a:txBody>
+                    <a:bodyPr/>
+                    <a:lstStyle/>
+                    <a:p>
+                      <a:r>
+                        <a:rPr lang="en-GB" dirty="0"/>
+                        <a:t>9.92</a:t>
+                      </a:r>
+                    </a:p>
+                  </a:txBody>
+                  <a:tcPr/>
+                </a:tc>
+                <a:tc>
+                  <a:txBody>
+                    <a:bodyPr/>
+                    <a:lstStyle/>
+                    <a:p>
+                      <a:r>
+                        <a:rPr lang="en-GB" dirty="0"/>
+                        <a:t>2.13</a:t>
+                      </a:r>
+                    </a:p>
+                  </a:txBody>
+                  <a:tcPr/>
+                </a:tc>
+                <a:tc>
+                  <a:txBody>
+                    <a:bodyPr/>
+                    <a:lstStyle/>
+                    <a:p>
+                      <a:r>
+                        <a:rPr lang="en-GB" dirty="0"/>
+                        <a:t>0.77</a:t>
+                      </a:r>
+                    </a:p>
+                  </a:txBody>
+                  <a:tcPr/>
+                </a:tc>
+                <a:tc>
+                  <a:txBody>
+                    <a:bodyPr/>
+                    <a:lstStyle/>
+                    <a:p>
+                      <a:r>
+                        <a:rPr lang="en-GB" dirty="0"/>
+                        <a:t>0.19</a:t>
+                      </a:r>
+                    </a:p>
+                  </a:txBody>
+                  <a:tcPr/>
+                </a:tc>
+                <a:tc>
+                  <a:txBody>
+                    <a:bodyPr/>
+                    <a:lstStyle/>
+                    <a:p>
+                      <a:r>
+                        <a:rPr lang="en-GB" dirty="0"/>
+                        <a:t>0.04</a:t>
+                      </a:r>
+                    </a:p>
+                  </a:txBody>
+                  <a:tcPr/>
+                </a:tc>
+                <a:tc>
+                  <a:txBody>
+                    <a:bodyPr/>
+                    <a:lstStyle/>
+                    <a:p>
+                      <a:r>
+                        <a:rPr lang="en-GB" dirty="0"/>
+                        <a:t>0.00</a:t>
+                      </a:r>
+                    </a:p>
+                  </a:txBody>
+                  <a:tcPr/>
+                </a:tc>
+                <a:extLst>
+                  <a:ext uri="{0D108BD9-81ED-4DB2-BD59-A6C34878D82A}">
+                    <a16:rowId xmlns:a16="http://schemas.microsoft.com/office/drawing/2014/main" val="3569907657"/>
+                  </a:ext>
+                </a:extLst>
+              </a:tr>
+              <a:tr h="370840">
+                <a:tc>
+                  <a:txBody>
+                    <a:bodyPr/>
+                    <a:lstStyle/>
+                    <a:p>
+                      <a:r>
+                        <a:rPr lang="en-GB" dirty="0"/>
+                        <a:t>3 (n=1,147)</a:t>
+                      </a:r>
+                    </a:p>
+                  </a:txBody>
+                  <a:tcPr/>
+                </a:tc>
+                <a:tc>
+                  <a:txBody>
+                    <a:bodyPr/>
+                    <a:lstStyle/>
+                    <a:p>
+                      <a:r>
+                        <a:rPr lang="en-GB" dirty="0"/>
+                        <a:t>83.87</a:t>
+                      </a:r>
+                    </a:p>
+                  </a:txBody>
+                  <a:tcPr/>
+                </a:tc>
+                <a:tc>
+                  <a:txBody>
+                    <a:bodyPr/>
+                    <a:lstStyle/>
+                    <a:p>
+                      <a:r>
+                        <a:rPr lang="en-GB" dirty="0"/>
+                        <a:t>13.25</a:t>
+                      </a:r>
+                    </a:p>
+                  </a:txBody>
+                  <a:tcPr/>
+                </a:tc>
+                <a:tc>
+                  <a:txBody>
+                    <a:bodyPr/>
+                    <a:lstStyle/>
+                    <a:p>
+                      <a:r>
+                        <a:rPr lang="en-GB" dirty="0"/>
+                        <a:t>1.83</a:t>
+                      </a:r>
+                    </a:p>
+                  </a:txBody>
+                  <a:tcPr/>
+                </a:tc>
+                <a:tc>
+                  <a:txBody>
+                    <a:bodyPr/>
+                    <a:lstStyle/>
+                    <a:p>
+                      <a:r>
+                        <a:rPr lang="en-GB" dirty="0"/>
+                        <a:t>0.70</a:t>
+                      </a:r>
+                    </a:p>
+                  </a:txBody>
+                  <a:tcPr/>
+                </a:tc>
+                <a:tc>
+                  <a:txBody>
+                    <a:bodyPr/>
+                    <a:lstStyle/>
+                    <a:p>
+                      <a:r>
+                        <a:rPr lang="en-GB" dirty="0"/>
+                        <a:t>0.35</a:t>
+                      </a:r>
+                    </a:p>
+                  </a:txBody>
+                  <a:tcPr/>
+                </a:tc>
+                <a:tc>
+                  <a:txBody>
+                    <a:bodyPr/>
+                    <a:lstStyle/>
+                    <a:p>
+                      <a:r>
+                        <a:rPr lang="en-GB" dirty="0"/>
+                        <a:t>0.00</a:t>
+                      </a:r>
+                    </a:p>
+                  </a:txBody>
+                  <a:tcPr/>
+                </a:tc>
+                <a:tc>
+                  <a:txBody>
+                    <a:bodyPr/>
+                    <a:lstStyle/>
+                    <a:p>
+                      <a:r>
+                        <a:rPr lang="en-GB" dirty="0"/>
+                        <a:t>0.00</a:t>
+                      </a:r>
+                    </a:p>
+                  </a:txBody>
+                  <a:tcPr/>
+                </a:tc>
+                <a:extLst>
+                  <a:ext uri="{0D108BD9-81ED-4DB2-BD59-A6C34878D82A}">
+                    <a16:rowId xmlns:a16="http://schemas.microsoft.com/office/drawing/2014/main" val="2193292983"/>
+                  </a:ext>
+                </a:extLst>
+              </a:tr>
+              <a:tr h="370840">
+                <a:tc>
+                  <a:txBody>
+                    <a:bodyPr/>
+                    <a:lstStyle/>
+                    <a:p>
+                      <a:r>
+                        <a:rPr lang="en-GB" dirty="0"/>
+                        <a:t>4 (n=1,009)</a:t>
+                      </a:r>
+                    </a:p>
+                  </a:txBody>
+                  <a:tcPr/>
+                </a:tc>
+                <a:tc>
+                  <a:txBody>
+                    <a:bodyPr/>
+                    <a:lstStyle/>
+                    <a:p>
+                      <a:r>
+                        <a:rPr lang="en-GB" dirty="0"/>
+                        <a:t>100.00</a:t>
+                      </a:r>
+                    </a:p>
+                  </a:txBody>
+                  <a:tcPr/>
+                </a:tc>
+                <a:tc>
+                  <a:txBody>
+                    <a:bodyPr/>
+                    <a:lstStyle/>
+                    <a:p>
+                      <a:r>
+                        <a:rPr lang="en-GB" dirty="0"/>
+                        <a:t>0.00</a:t>
+                      </a:r>
+                    </a:p>
+                  </a:txBody>
+                  <a:tcPr/>
+                </a:tc>
+                <a:tc>
+                  <a:txBody>
+                    <a:bodyPr/>
+                    <a:lstStyle/>
+                    <a:p>
+                      <a:r>
+                        <a:rPr lang="en-GB" dirty="0"/>
+                        <a:t>0.00</a:t>
+                      </a:r>
+                    </a:p>
+                  </a:txBody>
+                  <a:tcPr/>
+                </a:tc>
+                <a:tc>
+                  <a:txBody>
+                    <a:bodyPr/>
+                    <a:lstStyle/>
+                    <a:p>
+                      <a:r>
+                        <a:rPr lang="en-GB" dirty="0"/>
+                        <a:t>0.00</a:t>
+                      </a:r>
+                    </a:p>
+                  </a:txBody>
+                  <a:tcPr/>
+                </a:tc>
+                <a:tc>
+                  <a:txBody>
+                    <a:bodyPr/>
+                    <a:lstStyle/>
+                    <a:p>
+                      <a:r>
+                        <a:rPr lang="en-GB" dirty="0"/>
+                        <a:t>0.00</a:t>
+                      </a:r>
+                    </a:p>
+                  </a:txBody>
+                  <a:tcPr/>
+                </a:tc>
+                <a:tc>
+                  <a:txBody>
+                    <a:bodyPr/>
+                    <a:lstStyle/>
+                    <a:p>
+                      <a:r>
+                        <a:rPr lang="en-GB" dirty="0"/>
+                        <a:t>0.00</a:t>
+                      </a:r>
+                    </a:p>
+                  </a:txBody>
+                  <a:tcPr/>
+                </a:tc>
+                <a:tc>
+                  <a:txBody>
+                    <a:bodyPr/>
+                    <a:lstStyle/>
+                    <a:p>
+                      <a:r>
+                        <a:rPr lang="en-GB" dirty="0"/>
+                        <a:t>0.00</a:t>
+                      </a:r>
+                    </a:p>
+                  </a:txBody>
+                  <a:tcPr/>
+                </a:tc>
+                <a:extLst>
+                  <a:ext uri="{0D108BD9-81ED-4DB2-BD59-A6C34878D82A}">
+                    <a16:rowId xmlns:a16="http://schemas.microsoft.com/office/drawing/2014/main" val="3496583969"/>
+                  </a:ext>
+                </a:extLst>
+              </a:tr>
+              <a:tr h="370840">
+                <a:tc>
+                  <a:txBody>
+                    <a:bodyPr/>
+                    <a:lstStyle/>
+                    <a:p>
+                      <a:r>
+                        <a:rPr lang="en-GB" dirty="0"/>
+                        <a:t>NA (n=6)</a:t>
+                      </a:r>
+                    </a:p>
+                  </a:txBody>
+                  <a:tcPr/>
+                </a:tc>
+                <a:tc>
+                  <a:txBody>
+                    <a:bodyPr/>
+                    <a:lstStyle/>
+                    <a:p>
+                      <a:r>
+                        <a:rPr lang="en-GB" dirty="0"/>
+                        <a:t>100.00</a:t>
+                      </a:r>
+                    </a:p>
+                  </a:txBody>
+                  <a:tcPr/>
+                </a:tc>
+                <a:tc>
+                  <a:txBody>
+                    <a:bodyPr/>
+                    <a:lstStyle/>
+                    <a:p>
+                      <a:r>
+                        <a:rPr lang="en-GB" dirty="0"/>
+                        <a:t>0.00</a:t>
+                      </a:r>
+                    </a:p>
+                  </a:txBody>
+                  <a:tcPr/>
+                </a:tc>
+                <a:tc>
+                  <a:txBody>
+                    <a:bodyPr/>
+                    <a:lstStyle/>
+                    <a:p>
+                      <a:r>
+                        <a:rPr lang="en-GB" dirty="0"/>
+                        <a:t>0.00</a:t>
+                      </a:r>
+                    </a:p>
+                  </a:txBody>
+                  <a:tcPr/>
+                </a:tc>
+                <a:tc>
+                  <a:txBody>
+                    <a:bodyPr/>
+                    <a:lstStyle/>
+                    <a:p>
+                      <a:r>
+                        <a:rPr lang="en-GB" dirty="0"/>
+                        <a:t>0.00</a:t>
+                      </a:r>
+                    </a:p>
+                  </a:txBody>
+                  <a:tcPr/>
+                </a:tc>
+                <a:tc>
+                  <a:txBody>
+                    <a:bodyPr/>
+                    <a:lstStyle/>
+                    <a:p>
+                      <a:r>
+                        <a:rPr lang="en-GB" dirty="0"/>
+                        <a:t>0.00</a:t>
+                      </a:r>
+                    </a:p>
+                  </a:txBody>
+                  <a:tcPr/>
+                </a:tc>
+                <a:tc>
+                  <a:txBody>
+                    <a:bodyPr/>
+                    <a:lstStyle/>
+                    <a:p>
+                      <a:r>
+                        <a:rPr lang="en-GB" dirty="0"/>
+                        <a:t>0.00</a:t>
+                      </a:r>
+                    </a:p>
+                  </a:txBody>
+                  <a:tcPr/>
+                </a:tc>
+                <a:tc>
+                  <a:txBody>
+                    <a:bodyPr/>
+                    <a:lstStyle/>
+                    <a:p>
+                      <a:r>
+                        <a:rPr lang="en-GB" dirty="0"/>
+                        <a:t>0.00</a:t>
+                      </a:r>
+                    </a:p>
+                  </a:txBody>
+                  <a:tcPr/>
+                </a:tc>
+                <a:extLst>
+                  <a:ext uri="{0D108BD9-81ED-4DB2-BD59-A6C34878D82A}">
+                    <a16:rowId xmlns:a16="http://schemas.microsoft.com/office/drawing/2014/main" val="3970979412"/>
+                  </a:ext>
+                </a:extLst>
+              </a:tr>
+            </a:tbl>
+          </a:graphicData>
+        </a:graphic>
+      </p:graphicFrame>
+      <p:sp>
+        <p:nvSpPr>
+          <p:cNvPr id="5" name="TextBox 4">
+            <a:extLst>
+              <a:ext uri="{FF2B5EF4-FFF2-40B4-BE49-F238E27FC236}">
+                <a16:creationId xmlns:a16="http://schemas.microsoft.com/office/drawing/2014/main" id="{B7E67A8E-C4EE-2E68-D094-CEDFD1BFD3E7}"/>
+              </a:ext>
+            </a:extLst>
+          </p:cNvPr>
+          <p:cNvSpPr txBox="1"/>
+          <p:nvPr/>
+        </p:nvSpPr>
+        <p:spPr>
+          <a:xfrm>
+            <a:off x="234950" y="336550"/>
+            <a:ext cx="7226300" cy="369332"/>
+          </a:xfrm>
+          <a:prstGeom prst="rect">
+            <a:avLst/>
+          </a:prstGeom>
+          <a:noFill/>
+        </p:spPr>
+        <p:txBody>
+          <a:bodyPr wrap="square" rtlCol="0">
+            <a:spAutoFit/>
+          </a:bodyPr>
+          <a:lstStyle/>
+          <a:p>
+            <a:r>
+              <a:rPr lang="en-GB" dirty="0"/>
+              <a:t>DPP4</a:t>
+            </a:r>
+          </a:p>
+        </p:txBody>
+      </p:sp>
+      <p:sp>
+        <p:nvSpPr>
+          <p:cNvPr id="2" name="TextBox 1">
+            <a:extLst>
+              <a:ext uri="{FF2B5EF4-FFF2-40B4-BE49-F238E27FC236}">
+                <a16:creationId xmlns:a16="http://schemas.microsoft.com/office/drawing/2014/main" id="{9C25414E-08EF-96DA-2C41-F2FB41322122}"/>
+              </a:ext>
+            </a:extLst>
+          </p:cNvPr>
+          <p:cNvSpPr txBox="1"/>
+          <p:nvPr/>
+        </p:nvSpPr>
+        <p:spPr>
+          <a:xfrm>
+            <a:off x="3234871" y="4683210"/>
+            <a:ext cx="7826829" cy="2031325"/>
+          </a:xfrm>
+          <a:prstGeom prst="rect">
+            <a:avLst/>
+          </a:prstGeom>
+          <a:noFill/>
+        </p:spPr>
+        <p:txBody>
+          <a:bodyPr wrap="square" rtlCol="0">
+            <a:spAutoFit/>
+          </a:bodyPr>
+          <a:lstStyle/>
+          <a:p>
+            <a:r>
+              <a:rPr lang="en-GB" dirty="0"/>
+              <a:t>Rules:</a:t>
+            </a:r>
+          </a:p>
+          <a:p>
+            <a:r>
+              <a:rPr lang="en-GB" dirty="0"/>
+              <a:t>0. </a:t>
+            </a:r>
+            <a:r>
+              <a:rPr lang="en-GB" i="1" dirty="0" err="1"/>
+              <a:t>timeondrug</a:t>
+            </a:r>
+            <a:r>
+              <a:rPr lang="en-GB" dirty="0"/>
+              <a:t> bigger than 91 / 183 / 365 (not represented here)</a:t>
+            </a:r>
+          </a:p>
+          <a:p>
+            <a:r>
+              <a:rPr lang="en-GB" dirty="0"/>
+              <a:t>1. </a:t>
+            </a:r>
+            <a:r>
+              <a:rPr lang="en-GB" i="1" dirty="0" err="1"/>
+              <a:t>timeondrug</a:t>
+            </a:r>
+            <a:r>
+              <a:rPr lang="en-GB" dirty="0"/>
+              <a:t> less than 91 / 183 / 365</a:t>
+            </a:r>
+          </a:p>
+          <a:p>
+            <a:r>
+              <a:rPr lang="en-GB" dirty="0"/>
+              <a:t>2. </a:t>
+            </a:r>
+            <a:r>
+              <a:rPr lang="en-GB" i="1" dirty="0" err="1"/>
+              <a:t>nextremdrug</a:t>
+            </a:r>
+            <a:r>
+              <a:rPr lang="en-GB" dirty="0"/>
+              <a:t> = NA (represents a break in the current drug before restarting)</a:t>
+            </a:r>
+          </a:p>
+          <a:p>
+            <a:r>
+              <a:rPr lang="en-GB" dirty="0"/>
+              <a:t>3. </a:t>
+            </a:r>
+            <a:r>
+              <a:rPr lang="en-GB" i="1" dirty="0" err="1"/>
+              <a:t>nextremdrug</a:t>
+            </a:r>
+            <a:r>
+              <a:rPr lang="en-GB" dirty="0"/>
+              <a:t> = different drug removed from row drug class</a:t>
+            </a:r>
+          </a:p>
+          <a:p>
+            <a:r>
+              <a:rPr lang="en-GB" dirty="0"/>
+              <a:t>4. </a:t>
+            </a:r>
+            <a:r>
+              <a:rPr lang="en-GB" i="1" dirty="0" err="1"/>
+              <a:t>timetolastpx</a:t>
+            </a:r>
+            <a:r>
+              <a:rPr lang="en-GB" i="1" dirty="0"/>
+              <a:t> – </a:t>
+            </a:r>
+            <a:r>
+              <a:rPr lang="en-GB" i="1" dirty="0" err="1"/>
+              <a:t>timeondrug</a:t>
+            </a:r>
+            <a:r>
+              <a:rPr lang="en-GB" dirty="0"/>
+              <a:t> &lt; 91 / 183</a:t>
+            </a:r>
+          </a:p>
+          <a:p>
+            <a:r>
+              <a:rPr lang="en-GB" dirty="0"/>
+              <a:t>NA. anything else (</a:t>
+            </a:r>
+            <a:r>
+              <a:rPr lang="en-GB" b="1" dirty="0"/>
+              <a:t>what thought??</a:t>
+            </a:r>
+            <a:r>
+              <a:rPr lang="en-GB" dirty="0"/>
+              <a:t>)</a:t>
+            </a:r>
+          </a:p>
+        </p:txBody>
+      </p:sp>
+      <p:sp>
+        <p:nvSpPr>
+          <p:cNvPr id="3" name="Left Brace 2">
+            <a:extLst>
+              <a:ext uri="{FF2B5EF4-FFF2-40B4-BE49-F238E27FC236}">
+                <a16:creationId xmlns:a16="http://schemas.microsoft.com/office/drawing/2014/main" id="{BE903BD1-7492-8ADA-C1DE-AB44FAE47E97}"/>
+              </a:ext>
+            </a:extLst>
+          </p:cNvPr>
+          <p:cNvSpPr/>
+          <p:nvPr/>
+        </p:nvSpPr>
+        <p:spPr>
+          <a:xfrm>
+            <a:off x="2901950" y="5594350"/>
+            <a:ext cx="196850" cy="1048289"/>
+          </a:xfrm>
+          <a:prstGeom prst="leftBrace">
+            <a:avLst/>
+          </a:prstGeom>
+        </p:spPr>
+        <p:style>
+          <a:lnRef idx="2">
+            <a:schemeClr val="accent1"/>
+          </a:lnRef>
+          <a:fillRef idx="0">
+            <a:schemeClr val="accent1"/>
+          </a:fillRef>
+          <a:effectRef idx="1">
+            <a:schemeClr val="accent1"/>
+          </a:effectRef>
+          <a:fontRef idx="minor">
+            <a:schemeClr val="tx1"/>
+          </a:fontRef>
+        </p:style>
+        <p:txBody>
+          <a:bodyPr rtlCol="0" anchor="ctr"/>
+          <a:lstStyle/>
+          <a:p>
+            <a:pPr algn="ctr"/>
+            <a:endParaRPr lang="en-GB"/>
+          </a:p>
+        </p:txBody>
+      </p:sp>
+      <p:sp>
+        <p:nvSpPr>
+          <p:cNvPr id="6" name="TextBox 5">
+            <a:extLst>
+              <a:ext uri="{FF2B5EF4-FFF2-40B4-BE49-F238E27FC236}">
+                <a16:creationId xmlns:a16="http://schemas.microsoft.com/office/drawing/2014/main" id="{4A6D3B11-6E04-67DD-2E5E-E5EF9882F09C}"/>
+              </a:ext>
+            </a:extLst>
+          </p:cNvPr>
+          <p:cNvSpPr txBox="1"/>
+          <p:nvPr/>
+        </p:nvSpPr>
+        <p:spPr>
+          <a:xfrm>
+            <a:off x="651702" y="5867400"/>
+            <a:ext cx="2114177" cy="646331"/>
+          </a:xfrm>
+          <a:prstGeom prst="rect">
+            <a:avLst/>
+          </a:prstGeom>
+          <a:noFill/>
+        </p:spPr>
+        <p:txBody>
+          <a:bodyPr wrap="square" rtlCol="0">
+            <a:spAutoFit/>
+          </a:bodyPr>
+          <a:lstStyle/>
+          <a:p>
+            <a:r>
+              <a:rPr lang="en-GB" dirty="0"/>
+              <a:t>Old Rules:</a:t>
+            </a:r>
+          </a:p>
+          <a:p>
+            <a:r>
+              <a:rPr lang="en-GB" dirty="0"/>
+              <a:t>These would be NA</a:t>
+            </a:r>
+          </a:p>
+        </p:txBody>
+      </p:sp>
+    </p:spTree>
+    <p:extLst>
+      <p:ext uri="{BB962C8B-B14F-4D97-AF65-F5344CB8AC3E}">
+        <p14:creationId xmlns:p14="http://schemas.microsoft.com/office/powerpoint/2010/main" val="2823083646"/>
+      </p:ext>
+    </p:extLst>
+  </p:cSld>
+  <p:clrMapOvr>
+    <a:masterClrMapping/>
+  </p:clrMapOvr>
+</p:sld>
+</file>
+
+<file path=ppt/slides/slide4.xml><?xml version="1.0" encoding="utf-8"?>
+<p:sld xmlns:a="http://schemas.openxmlformats.org/drawingml/2006/main" xmlns:r="http://schemas.openxmlformats.org/officeDocument/2006/relationships" xmlns:p="http://schemas.openxmlformats.org/presentationml/2006/main">
+  <p:cSld>
+    <p:spTree>
+      <p:nvGrpSpPr>
+        <p:cNvPr id="1" name=""/>
+        <p:cNvGrpSpPr/>
+        <p:nvPr/>
+      </p:nvGrpSpPr>
+      <p:grpSpPr>
+        <a:xfrm>
+          <a:off x="0" y="0"/>
+          <a:ext cx="0" cy="0"/>
+          <a:chOff x="0" y="0"/>
+          <a:chExt cx="0" cy="0"/>
+        </a:xfrm>
+      </p:grpSpPr>
+      <p:graphicFrame>
+        <p:nvGraphicFramePr>
+          <p:cNvPr id="4" name="Table 3">
+            <a:extLst>
+              <a:ext uri="{FF2B5EF4-FFF2-40B4-BE49-F238E27FC236}">
+                <a16:creationId xmlns:a16="http://schemas.microsoft.com/office/drawing/2014/main" id="{66C6E2E5-8FCC-4CA6-092E-05ABC3F9C97F}"/>
+              </a:ext>
+            </a:extLst>
+          </p:cNvPr>
+          <p:cNvGraphicFramePr>
+            <a:graphicFrameLocks noGrp="1"/>
+          </p:cNvGraphicFramePr>
+          <p:nvPr>
+            <p:extLst>
+              <p:ext uri="{D42A27DB-BD31-4B8C-83A1-F6EECF244321}">
+                <p14:modId xmlns:p14="http://schemas.microsoft.com/office/powerpoint/2010/main" val="1028259627"/>
+              </p:ext>
+            </p:extLst>
+          </p:nvPr>
+        </p:nvGraphicFramePr>
+        <p:xfrm>
+          <a:off x="717550" y="1310216"/>
+          <a:ext cx="8377641" cy="2966720"/>
+        </p:xfrm>
+        <a:graphic>
+          <a:graphicData uri="http://schemas.openxmlformats.org/drawingml/2006/table">
+            <a:tbl>
+              <a:tblPr firstRow="1" bandRow="1">
+                <a:tableStyleId>{5C22544A-7EE6-4342-B048-85BDC9FD1C3A}</a:tableStyleId>
+              </a:tblPr>
+              <a:tblGrid>
+                <a:gridCol w="1803273">
+                  <a:extLst>
+                    <a:ext uri="{9D8B030D-6E8A-4147-A177-3AD203B41FA5}">
+                      <a16:colId xmlns:a16="http://schemas.microsoft.com/office/drawing/2014/main" val="2591732828"/>
+                    </a:ext>
+                  </a:extLst>
+                </a:gridCol>
+                <a:gridCol w="1095728">
+                  <a:extLst>
+                    <a:ext uri="{9D8B030D-6E8A-4147-A177-3AD203B41FA5}">
+                      <a16:colId xmlns:a16="http://schemas.microsoft.com/office/drawing/2014/main" val="115166983"/>
+                    </a:ext>
+                  </a:extLst>
+                </a:gridCol>
+                <a:gridCol w="1095728">
+                  <a:extLst>
+                    <a:ext uri="{9D8B030D-6E8A-4147-A177-3AD203B41FA5}">
+                      <a16:colId xmlns:a16="http://schemas.microsoft.com/office/drawing/2014/main" val="2575733845"/>
+                    </a:ext>
+                  </a:extLst>
+                </a:gridCol>
+                <a:gridCol w="1095728">
+                  <a:extLst>
+                    <a:ext uri="{9D8B030D-6E8A-4147-A177-3AD203B41FA5}">
+                      <a16:colId xmlns:a16="http://schemas.microsoft.com/office/drawing/2014/main" val="3485148647"/>
+                    </a:ext>
+                  </a:extLst>
+                </a:gridCol>
+                <a:gridCol w="1095728">
+                  <a:extLst>
+                    <a:ext uri="{9D8B030D-6E8A-4147-A177-3AD203B41FA5}">
+                      <a16:colId xmlns:a16="http://schemas.microsoft.com/office/drawing/2014/main" val="1824331962"/>
+                    </a:ext>
+                  </a:extLst>
+                </a:gridCol>
+                <a:gridCol w="1095728">
+                  <a:extLst>
+                    <a:ext uri="{9D8B030D-6E8A-4147-A177-3AD203B41FA5}">
+                      <a16:colId xmlns:a16="http://schemas.microsoft.com/office/drawing/2014/main" val="3080864844"/>
+                    </a:ext>
+                  </a:extLst>
+                </a:gridCol>
+                <a:gridCol w="1095728">
+                  <a:extLst>
+                    <a:ext uri="{9D8B030D-6E8A-4147-A177-3AD203B41FA5}">
+                      <a16:colId xmlns:a16="http://schemas.microsoft.com/office/drawing/2014/main" val="449442134"/>
+                    </a:ext>
+                  </a:extLst>
+                </a:gridCol>
+              </a:tblGrid>
+              <a:tr h="370840">
+                <a:tc>
+                  <a:txBody>
+                    <a:bodyPr/>
+                    <a:lstStyle/>
+                    <a:p>
+                      <a:endParaRPr lang="en-GB" dirty="0"/>
+                    </a:p>
+                  </a:txBody>
+                  <a:tcPr/>
+                </a:tc>
+                <a:tc gridSpan="6">
+                  <a:txBody>
+                    <a:bodyPr/>
+                    <a:lstStyle/>
+                    <a:p>
+                      <a:r>
+                        <a:rPr lang="en-GB" dirty="0"/>
+                        <a:t>Drug periods recorded</a:t>
+                      </a:r>
+                    </a:p>
+                  </a:txBody>
+                  <a:tcPr/>
+                </a:tc>
+                <a:tc hMerge="1">
+                  <a:txBody>
+                    <a:bodyPr/>
+                    <a:lstStyle/>
+                    <a:p>
+                      <a:endParaRPr lang="en-GB" dirty="0"/>
+                    </a:p>
+                  </a:txBody>
+                  <a:tcPr/>
+                </a:tc>
+                <a:tc hMerge="1">
+                  <a:txBody>
+                    <a:bodyPr/>
+                    <a:lstStyle/>
+                    <a:p>
+                      <a:endParaRPr lang="en-GB" dirty="0"/>
+                    </a:p>
+                  </a:txBody>
+                  <a:tcPr/>
+                </a:tc>
+                <a:tc hMerge="1">
+                  <a:txBody>
+                    <a:bodyPr/>
+                    <a:lstStyle/>
+                    <a:p>
+                      <a:endParaRPr lang="en-GB" dirty="0"/>
+                    </a:p>
+                  </a:txBody>
+                  <a:tcPr/>
+                </a:tc>
+                <a:tc hMerge="1">
+                  <a:txBody>
+                    <a:bodyPr/>
+                    <a:lstStyle/>
+                    <a:p>
+                      <a:endParaRPr lang="en-GB" dirty="0"/>
+                    </a:p>
+                  </a:txBody>
+                  <a:tcPr/>
+                </a:tc>
+                <a:tc hMerge="1">
+                  <a:txBody>
+                    <a:bodyPr/>
+                    <a:lstStyle/>
+                    <a:p>
+                      <a:endParaRPr lang="en-GB" dirty="0"/>
+                    </a:p>
+                  </a:txBody>
+                  <a:tcPr/>
+                </a:tc>
+                <a:extLst>
+                  <a:ext uri="{0D108BD9-81ED-4DB2-BD59-A6C34878D82A}">
+                    <a16:rowId xmlns:a16="http://schemas.microsoft.com/office/drawing/2014/main" val="3449528469"/>
+                  </a:ext>
+                </a:extLst>
+              </a:tr>
+              <a:tr h="370840">
+                <a:tc>
+                  <a:txBody>
+                    <a:bodyPr/>
+                    <a:lstStyle/>
+                    <a:p>
+                      <a:r>
+                        <a:rPr lang="en-GB" dirty="0"/>
+                        <a:t>Discontinuation</a:t>
+                      </a:r>
+                    </a:p>
+                  </a:txBody>
+                  <a:tcPr/>
+                </a:tc>
+                <a:tc>
+                  <a:txBody>
+                    <a:bodyPr/>
+                    <a:lstStyle/>
+                    <a:p>
+                      <a:r>
+                        <a:rPr lang="en-GB" dirty="0"/>
+                        <a:t>1</a:t>
+                      </a:r>
+                    </a:p>
+                  </a:txBody>
+                  <a:tcPr/>
+                </a:tc>
+                <a:tc>
+                  <a:txBody>
+                    <a:bodyPr/>
+                    <a:lstStyle/>
+                    <a:p>
+                      <a:r>
+                        <a:rPr lang="en-GB" dirty="0"/>
+                        <a:t>2</a:t>
+                      </a:r>
+                    </a:p>
+                  </a:txBody>
+                  <a:tcPr/>
+                </a:tc>
+                <a:tc>
+                  <a:txBody>
+                    <a:bodyPr/>
+                    <a:lstStyle/>
+                    <a:p>
+                      <a:r>
+                        <a:rPr lang="en-GB" dirty="0"/>
+                        <a:t>3</a:t>
+                      </a:r>
+                    </a:p>
+                  </a:txBody>
+                  <a:tcPr/>
+                </a:tc>
+                <a:tc>
+                  <a:txBody>
+                    <a:bodyPr/>
+                    <a:lstStyle/>
+                    <a:p>
+                      <a:r>
+                        <a:rPr lang="en-GB" dirty="0"/>
+                        <a:t>4</a:t>
+                      </a:r>
+                    </a:p>
+                  </a:txBody>
+                  <a:tcPr/>
+                </a:tc>
+                <a:tc>
+                  <a:txBody>
+                    <a:bodyPr/>
+                    <a:lstStyle/>
+                    <a:p>
+                      <a:r>
+                        <a:rPr lang="en-GB" dirty="0"/>
+                        <a:t>5</a:t>
+                      </a:r>
+                    </a:p>
+                  </a:txBody>
+                  <a:tcPr/>
+                </a:tc>
+                <a:tc>
+                  <a:txBody>
+                    <a:bodyPr/>
+                    <a:lstStyle/>
+                    <a:p>
+                      <a:r>
+                        <a:rPr lang="en-GB" dirty="0"/>
+                        <a:t>6</a:t>
+                      </a:r>
+                    </a:p>
+                  </a:txBody>
+                  <a:tcPr/>
+                </a:tc>
+                <a:extLst>
+                  <a:ext uri="{0D108BD9-81ED-4DB2-BD59-A6C34878D82A}">
+                    <a16:rowId xmlns:a16="http://schemas.microsoft.com/office/drawing/2014/main" val="1496173031"/>
+                  </a:ext>
+                </a:extLst>
+              </a:tr>
+              <a:tr h="370840">
+                <a:tc>
+                  <a:txBody>
+                    <a:bodyPr/>
+                    <a:lstStyle/>
+                    <a:p>
+                      <a:r>
+                        <a:rPr lang="en-GB" dirty="0"/>
+                        <a:t>0 (n=52,263)</a:t>
+                      </a:r>
+                    </a:p>
+                  </a:txBody>
+                  <a:tcPr/>
+                </a:tc>
+                <a:tc>
+                  <a:txBody>
+                    <a:bodyPr/>
+                    <a:lstStyle/>
+                    <a:p>
+                      <a:r>
+                        <a:rPr lang="en-GB" dirty="0"/>
+                        <a:t>92.02</a:t>
+                      </a:r>
+                    </a:p>
+                  </a:txBody>
+                  <a:tcPr/>
+                </a:tc>
+                <a:tc>
+                  <a:txBody>
+                    <a:bodyPr/>
+                    <a:lstStyle/>
+                    <a:p>
+                      <a:r>
+                        <a:rPr lang="en-GB" dirty="0"/>
+                        <a:t>7.05</a:t>
+                      </a:r>
+                    </a:p>
+                  </a:txBody>
+                  <a:tcPr/>
+                </a:tc>
+                <a:tc>
+                  <a:txBody>
+                    <a:bodyPr/>
+                    <a:lstStyle/>
+                    <a:p>
+                      <a:r>
+                        <a:rPr lang="en-GB" dirty="0"/>
+                        <a:t>0.80</a:t>
+                      </a:r>
+                    </a:p>
+                  </a:txBody>
+                  <a:tcPr/>
+                </a:tc>
+                <a:tc>
+                  <a:txBody>
+                    <a:bodyPr/>
+                    <a:lstStyle/>
+                    <a:p>
+                      <a:r>
+                        <a:rPr lang="en-GB" dirty="0"/>
+                        <a:t>0.09</a:t>
+                      </a:r>
+                    </a:p>
+                  </a:txBody>
+                  <a:tcPr/>
+                </a:tc>
+                <a:tc>
+                  <a:txBody>
+                    <a:bodyPr/>
+                    <a:lstStyle/>
+                    <a:p>
+                      <a:r>
+                        <a:rPr lang="en-GB" dirty="0"/>
+                        <a:t>0.03</a:t>
+                      </a:r>
+                    </a:p>
+                  </a:txBody>
+                  <a:tcPr/>
+                </a:tc>
+                <a:tc>
+                  <a:txBody>
+                    <a:bodyPr/>
+                    <a:lstStyle/>
+                    <a:p>
+                      <a:r>
+                        <a:rPr lang="en-GB" dirty="0"/>
+                        <a:t>0.00</a:t>
+                      </a:r>
+                    </a:p>
+                  </a:txBody>
+                  <a:tcPr/>
+                </a:tc>
+                <a:extLst>
+                  <a:ext uri="{0D108BD9-81ED-4DB2-BD59-A6C34878D82A}">
+                    <a16:rowId xmlns:a16="http://schemas.microsoft.com/office/drawing/2014/main" val="926079196"/>
+                  </a:ext>
+                </a:extLst>
+              </a:tr>
+              <a:tr h="370840">
+                <a:tc>
+                  <a:txBody>
+                    <a:bodyPr/>
+                    <a:lstStyle/>
+                    <a:p>
+                      <a:r>
+                        <a:rPr lang="en-GB" dirty="0"/>
+                        <a:t>1 (n=8,980)</a:t>
+                      </a:r>
+                    </a:p>
+                  </a:txBody>
+                  <a:tcPr/>
+                </a:tc>
+                <a:tc>
+                  <a:txBody>
+                    <a:bodyPr/>
+                    <a:lstStyle/>
+                    <a:p>
+                      <a:r>
+                        <a:rPr lang="en-GB" dirty="0"/>
+                        <a:t>72.03</a:t>
+                      </a:r>
+                    </a:p>
+                  </a:txBody>
+                  <a:tcPr/>
+                </a:tc>
+                <a:tc>
+                  <a:txBody>
+                    <a:bodyPr/>
+                    <a:lstStyle/>
+                    <a:p>
+                      <a:r>
+                        <a:rPr lang="en-GB" dirty="0"/>
+                        <a:t>24.52</a:t>
+                      </a:r>
+                    </a:p>
+                  </a:txBody>
+                  <a:tcPr/>
+                </a:tc>
+                <a:tc>
+                  <a:txBody>
+                    <a:bodyPr/>
+                    <a:lstStyle/>
+                    <a:p>
+                      <a:r>
+                        <a:rPr lang="en-GB" dirty="0"/>
+                        <a:t>2.91</a:t>
+                      </a:r>
+                    </a:p>
+                  </a:txBody>
+                  <a:tcPr/>
+                </a:tc>
+                <a:tc>
+                  <a:txBody>
+                    <a:bodyPr/>
+                    <a:lstStyle/>
+                    <a:p>
+                      <a:r>
+                        <a:rPr lang="en-GB" dirty="0"/>
+                        <a:t>0.49</a:t>
+                      </a:r>
+                    </a:p>
+                  </a:txBody>
+                  <a:tcPr/>
+                </a:tc>
+                <a:tc>
+                  <a:txBody>
+                    <a:bodyPr/>
+                    <a:lstStyle/>
+                    <a:p>
+                      <a:r>
+                        <a:rPr lang="en-GB" dirty="0"/>
+                        <a:t>0.04</a:t>
+                      </a:r>
+                    </a:p>
+                  </a:txBody>
+                  <a:tcPr/>
+                </a:tc>
+                <a:tc>
+                  <a:txBody>
+                    <a:bodyPr/>
+                    <a:lstStyle/>
+                    <a:p>
+                      <a:r>
+                        <a:rPr lang="en-GB" dirty="0"/>
+                        <a:t>0.01</a:t>
+                      </a:r>
+                    </a:p>
+                  </a:txBody>
+                  <a:tcPr/>
+                </a:tc>
+                <a:extLst>
+                  <a:ext uri="{0D108BD9-81ED-4DB2-BD59-A6C34878D82A}">
+                    <a16:rowId xmlns:a16="http://schemas.microsoft.com/office/drawing/2014/main" val="1232296111"/>
+                  </a:ext>
+                </a:extLst>
+              </a:tr>
+              <a:tr h="370840">
+                <a:tc>
+                  <a:txBody>
+                    <a:bodyPr/>
+                    <a:lstStyle/>
+                    <a:p>
+                      <a:r>
+                        <a:rPr lang="en-GB" dirty="0"/>
+                        <a:t>2 (n=2,914)</a:t>
+                      </a:r>
+                    </a:p>
+                  </a:txBody>
+                  <a:tcPr/>
+                </a:tc>
+                <a:tc>
+                  <a:txBody>
+                    <a:bodyPr/>
+                    <a:lstStyle/>
+                    <a:p>
+                      <a:r>
+                        <a:rPr lang="en-GB" dirty="0"/>
+                        <a:t>91.28</a:t>
+                      </a:r>
+                    </a:p>
+                  </a:txBody>
+                  <a:tcPr/>
+                </a:tc>
+                <a:tc>
+                  <a:txBody>
+                    <a:bodyPr/>
+                    <a:lstStyle/>
+                    <a:p>
+                      <a:r>
+                        <a:rPr lang="en-GB" dirty="0"/>
+                        <a:t>6.35</a:t>
+                      </a:r>
+                    </a:p>
+                  </a:txBody>
+                  <a:tcPr/>
+                </a:tc>
+                <a:tc>
+                  <a:txBody>
+                    <a:bodyPr/>
+                    <a:lstStyle/>
+                    <a:p>
+                      <a:r>
+                        <a:rPr lang="en-GB" dirty="0"/>
+                        <a:t>1.58</a:t>
+                      </a:r>
+                    </a:p>
+                  </a:txBody>
+                  <a:tcPr/>
+                </a:tc>
+                <a:tc>
+                  <a:txBody>
+                    <a:bodyPr/>
+                    <a:lstStyle/>
+                    <a:p>
+                      <a:r>
+                        <a:rPr lang="en-GB" dirty="0"/>
+                        <a:t>0.58</a:t>
+                      </a:r>
+                    </a:p>
+                  </a:txBody>
+                  <a:tcPr/>
+                </a:tc>
+                <a:tc>
+                  <a:txBody>
+                    <a:bodyPr/>
+                    <a:lstStyle/>
+                    <a:p>
+                      <a:r>
+                        <a:rPr lang="en-GB" dirty="0"/>
+                        <a:t>0.10</a:t>
+                      </a:r>
+                    </a:p>
+                  </a:txBody>
+                  <a:tcPr/>
+                </a:tc>
+                <a:tc>
+                  <a:txBody>
+                    <a:bodyPr/>
+                    <a:lstStyle/>
+                    <a:p>
+                      <a:r>
+                        <a:rPr lang="en-GB" dirty="0"/>
+                        <a:t>0.10</a:t>
+                      </a:r>
+                    </a:p>
+                  </a:txBody>
+                  <a:tcPr/>
+                </a:tc>
+                <a:extLst>
+                  <a:ext uri="{0D108BD9-81ED-4DB2-BD59-A6C34878D82A}">
+                    <a16:rowId xmlns:a16="http://schemas.microsoft.com/office/drawing/2014/main" val="3569907657"/>
+                  </a:ext>
+                </a:extLst>
+              </a:tr>
+              <a:tr h="370840">
+                <a:tc>
+                  <a:txBody>
+                    <a:bodyPr/>
+                    <a:lstStyle/>
+                    <a:p>
+                      <a:r>
+                        <a:rPr lang="en-GB" dirty="0"/>
+                        <a:t>3 (n=1,104)</a:t>
+                      </a:r>
+                    </a:p>
+                  </a:txBody>
+                  <a:tcPr/>
+                </a:tc>
+                <a:tc>
+                  <a:txBody>
+                    <a:bodyPr/>
+                    <a:lstStyle/>
+                    <a:p>
+                      <a:r>
+                        <a:rPr lang="en-GB" dirty="0"/>
+                        <a:t>87.32</a:t>
+                      </a:r>
+                    </a:p>
+                  </a:txBody>
+                  <a:tcPr/>
+                </a:tc>
+                <a:tc>
+                  <a:txBody>
+                    <a:bodyPr/>
+                    <a:lstStyle/>
+                    <a:p>
+                      <a:r>
+                        <a:rPr lang="en-GB" dirty="0"/>
+                        <a:t>10.14</a:t>
+                      </a:r>
+                    </a:p>
+                  </a:txBody>
+                  <a:tcPr/>
+                </a:tc>
+                <a:tc>
+                  <a:txBody>
+                    <a:bodyPr/>
+                    <a:lstStyle/>
+                    <a:p>
+                      <a:r>
+                        <a:rPr lang="en-GB" dirty="0"/>
+                        <a:t>1.63</a:t>
+                      </a:r>
+                    </a:p>
+                  </a:txBody>
+                  <a:tcPr/>
+                </a:tc>
+                <a:tc>
+                  <a:txBody>
+                    <a:bodyPr/>
+                    <a:lstStyle/>
+                    <a:p>
+                      <a:r>
+                        <a:rPr lang="en-GB" dirty="0"/>
+                        <a:t>0.72</a:t>
+                      </a:r>
+                    </a:p>
+                  </a:txBody>
+                  <a:tcPr/>
+                </a:tc>
+                <a:tc>
+                  <a:txBody>
+                    <a:bodyPr/>
+                    <a:lstStyle/>
+                    <a:p>
+                      <a:r>
+                        <a:rPr lang="en-GB" dirty="0"/>
+                        <a:t>0.09</a:t>
+                      </a:r>
+                    </a:p>
+                  </a:txBody>
+                  <a:tcPr/>
+                </a:tc>
+                <a:tc>
+                  <a:txBody>
+                    <a:bodyPr/>
+                    <a:lstStyle/>
+                    <a:p>
+                      <a:r>
+                        <a:rPr lang="en-GB" dirty="0"/>
+                        <a:t>0.09</a:t>
+                      </a:r>
+                    </a:p>
+                  </a:txBody>
+                  <a:tcPr/>
+                </a:tc>
+                <a:extLst>
+                  <a:ext uri="{0D108BD9-81ED-4DB2-BD59-A6C34878D82A}">
+                    <a16:rowId xmlns:a16="http://schemas.microsoft.com/office/drawing/2014/main" val="2193292983"/>
+                  </a:ext>
+                </a:extLst>
+              </a:tr>
+              <a:tr h="370840">
+                <a:tc>
+                  <a:txBody>
+                    <a:bodyPr/>
+                    <a:lstStyle/>
+                    <a:p>
+                      <a:r>
+                        <a:rPr lang="en-GB" dirty="0"/>
+                        <a:t>4 (n=1,016)</a:t>
+                      </a:r>
+                    </a:p>
+                  </a:txBody>
+                  <a:tcPr/>
+                </a:tc>
+                <a:tc>
+                  <a:txBody>
+                    <a:bodyPr/>
+                    <a:lstStyle/>
+                    <a:p>
+                      <a:r>
+                        <a:rPr lang="en-GB" dirty="0"/>
+                        <a:t>100.00</a:t>
+                      </a:r>
+                    </a:p>
+                  </a:txBody>
+                  <a:tcPr/>
+                </a:tc>
+                <a:tc>
+                  <a:txBody>
+                    <a:bodyPr/>
+                    <a:lstStyle/>
+                    <a:p>
+                      <a:r>
+                        <a:rPr lang="en-GB" dirty="0"/>
+                        <a:t>0.00</a:t>
+                      </a:r>
+                    </a:p>
+                  </a:txBody>
+                  <a:tcPr/>
+                </a:tc>
+                <a:tc>
+                  <a:txBody>
+                    <a:bodyPr/>
+                    <a:lstStyle/>
+                    <a:p>
+                      <a:r>
+                        <a:rPr lang="en-GB" dirty="0"/>
+                        <a:t>0.00</a:t>
+                      </a:r>
+                    </a:p>
+                  </a:txBody>
+                  <a:tcPr/>
+                </a:tc>
+                <a:tc>
+                  <a:txBody>
+                    <a:bodyPr/>
+                    <a:lstStyle/>
+                    <a:p>
+                      <a:r>
+                        <a:rPr lang="en-GB" dirty="0"/>
+                        <a:t>0.00</a:t>
+                      </a:r>
+                    </a:p>
+                  </a:txBody>
+                  <a:tcPr/>
+                </a:tc>
+                <a:tc>
+                  <a:txBody>
+                    <a:bodyPr/>
+                    <a:lstStyle/>
+                    <a:p>
+                      <a:r>
+                        <a:rPr lang="en-GB" dirty="0"/>
+                        <a:t>0.00</a:t>
+                      </a:r>
+                    </a:p>
+                  </a:txBody>
+                  <a:tcPr/>
+                </a:tc>
+                <a:tc>
+                  <a:txBody>
+                    <a:bodyPr/>
+                    <a:lstStyle/>
+                    <a:p>
+                      <a:r>
+                        <a:rPr lang="en-GB" dirty="0"/>
+                        <a:t>0.00</a:t>
+                      </a:r>
+                    </a:p>
+                  </a:txBody>
+                  <a:tcPr/>
+                </a:tc>
+                <a:extLst>
+                  <a:ext uri="{0D108BD9-81ED-4DB2-BD59-A6C34878D82A}">
+                    <a16:rowId xmlns:a16="http://schemas.microsoft.com/office/drawing/2014/main" val="3496583969"/>
+                  </a:ext>
+                </a:extLst>
+              </a:tr>
+              <a:tr h="370840">
+                <a:tc>
+                  <a:txBody>
+                    <a:bodyPr/>
+                    <a:lstStyle/>
+                    <a:p>
+                      <a:r>
+                        <a:rPr lang="en-GB" dirty="0"/>
+                        <a:t>NA (n=3)</a:t>
+                      </a:r>
+                    </a:p>
+                  </a:txBody>
+                  <a:tcPr/>
+                </a:tc>
+                <a:tc>
+                  <a:txBody>
+                    <a:bodyPr/>
+                    <a:lstStyle/>
+                    <a:p>
+                      <a:r>
+                        <a:rPr lang="en-GB" dirty="0"/>
+                        <a:t>100.00</a:t>
+                      </a:r>
+                    </a:p>
+                  </a:txBody>
+                  <a:tcPr/>
+                </a:tc>
+                <a:tc>
+                  <a:txBody>
+                    <a:bodyPr/>
+                    <a:lstStyle/>
+                    <a:p>
+                      <a:r>
+                        <a:rPr lang="en-GB" dirty="0"/>
+                        <a:t>0.00</a:t>
+                      </a:r>
+                    </a:p>
+                  </a:txBody>
+                  <a:tcPr/>
+                </a:tc>
+                <a:tc>
+                  <a:txBody>
+                    <a:bodyPr/>
+                    <a:lstStyle/>
+                    <a:p>
+                      <a:r>
+                        <a:rPr lang="en-GB" dirty="0"/>
+                        <a:t>0.00</a:t>
+                      </a:r>
+                    </a:p>
+                  </a:txBody>
+                  <a:tcPr/>
+                </a:tc>
+                <a:tc>
+                  <a:txBody>
+                    <a:bodyPr/>
+                    <a:lstStyle/>
+                    <a:p>
+                      <a:r>
+                        <a:rPr lang="en-GB" dirty="0"/>
+                        <a:t>0.00</a:t>
+                      </a:r>
+                    </a:p>
+                  </a:txBody>
+                  <a:tcPr/>
+                </a:tc>
+                <a:tc>
+                  <a:txBody>
+                    <a:bodyPr/>
+                    <a:lstStyle/>
+                    <a:p>
+                      <a:r>
+                        <a:rPr lang="en-GB" dirty="0"/>
+                        <a:t>0.00</a:t>
+                      </a:r>
+                    </a:p>
+                  </a:txBody>
+                  <a:tcPr/>
+                </a:tc>
+                <a:tc>
+                  <a:txBody>
+                    <a:bodyPr/>
+                    <a:lstStyle/>
+                    <a:p>
+                      <a:r>
+                        <a:rPr lang="en-GB" dirty="0"/>
+                        <a:t>0.00</a:t>
+                      </a:r>
+                    </a:p>
+                  </a:txBody>
+                  <a:tcPr/>
+                </a:tc>
+                <a:extLst>
+                  <a:ext uri="{0D108BD9-81ED-4DB2-BD59-A6C34878D82A}">
+                    <a16:rowId xmlns:a16="http://schemas.microsoft.com/office/drawing/2014/main" val="3970979412"/>
+                  </a:ext>
+                </a:extLst>
+              </a:tr>
+            </a:tbl>
+          </a:graphicData>
+        </a:graphic>
+      </p:graphicFrame>
+      <p:sp>
+        <p:nvSpPr>
+          <p:cNvPr id="5" name="TextBox 4">
+            <a:extLst>
+              <a:ext uri="{FF2B5EF4-FFF2-40B4-BE49-F238E27FC236}">
+                <a16:creationId xmlns:a16="http://schemas.microsoft.com/office/drawing/2014/main" id="{B7E67A8E-C4EE-2E68-D094-CEDFD1BFD3E7}"/>
+              </a:ext>
+            </a:extLst>
+          </p:cNvPr>
+          <p:cNvSpPr txBox="1"/>
+          <p:nvPr/>
+        </p:nvSpPr>
+        <p:spPr>
+          <a:xfrm>
+            <a:off x="234950" y="336550"/>
+            <a:ext cx="7226300" cy="369332"/>
+          </a:xfrm>
+          <a:prstGeom prst="rect">
+            <a:avLst/>
+          </a:prstGeom>
+          <a:noFill/>
+        </p:spPr>
+        <p:txBody>
+          <a:bodyPr wrap="square" rtlCol="0">
+            <a:spAutoFit/>
+          </a:bodyPr>
+          <a:lstStyle/>
+          <a:p>
+            <a:r>
+              <a:rPr lang="en-GB" dirty="0"/>
+              <a:t>SGLT2</a:t>
+            </a:r>
+          </a:p>
+        </p:txBody>
+      </p:sp>
+      <p:sp>
+        <p:nvSpPr>
+          <p:cNvPr id="2" name="TextBox 1">
+            <a:extLst>
+              <a:ext uri="{FF2B5EF4-FFF2-40B4-BE49-F238E27FC236}">
+                <a16:creationId xmlns:a16="http://schemas.microsoft.com/office/drawing/2014/main" id="{FDA9F1ED-D0AE-448D-E9A0-E936CDE0642C}"/>
+              </a:ext>
+            </a:extLst>
+          </p:cNvPr>
+          <p:cNvSpPr txBox="1"/>
+          <p:nvPr/>
+        </p:nvSpPr>
+        <p:spPr>
+          <a:xfrm>
+            <a:off x="3234871" y="4683210"/>
+            <a:ext cx="7826829" cy="2031325"/>
+          </a:xfrm>
+          <a:prstGeom prst="rect">
+            <a:avLst/>
+          </a:prstGeom>
+          <a:noFill/>
+        </p:spPr>
+        <p:txBody>
+          <a:bodyPr wrap="square" rtlCol="0">
+            <a:spAutoFit/>
+          </a:bodyPr>
+          <a:lstStyle/>
+          <a:p>
+            <a:r>
+              <a:rPr lang="en-GB" dirty="0"/>
+              <a:t>Rules:</a:t>
+            </a:r>
+          </a:p>
+          <a:p>
+            <a:r>
+              <a:rPr lang="en-GB" dirty="0"/>
+              <a:t>0. </a:t>
+            </a:r>
+            <a:r>
+              <a:rPr lang="en-GB" i="1" dirty="0" err="1"/>
+              <a:t>timeondrug</a:t>
+            </a:r>
+            <a:r>
+              <a:rPr lang="en-GB" dirty="0"/>
+              <a:t> bigger than 91 / 183 / 365 (not represented here)</a:t>
+            </a:r>
+          </a:p>
+          <a:p>
+            <a:r>
+              <a:rPr lang="en-GB" dirty="0"/>
+              <a:t>1. </a:t>
+            </a:r>
+            <a:r>
+              <a:rPr lang="en-GB" i="1" dirty="0" err="1"/>
+              <a:t>timeondrug</a:t>
+            </a:r>
+            <a:r>
+              <a:rPr lang="en-GB" dirty="0"/>
+              <a:t> less than 91 / 183 / 365</a:t>
+            </a:r>
+          </a:p>
+          <a:p>
+            <a:r>
+              <a:rPr lang="en-GB" dirty="0"/>
+              <a:t>2. </a:t>
+            </a:r>
+            <a:r>
+              <a:rPr lang="en-GB" i="1" dirty="0" err="1"/>
+              <a:t>nextremdrug</a:t>
+            </a:r>
+            <a:r>
+              <a:rPr lang="en-GB" dirty="0"/>
+              <a:t> = NA (represents a break in the current drug before restarting)</a:t>
+            </a:r>
+          </a:p>
+          <a:p>
+            <a:r>
+              <a:rPr lang="en-GB" dirty="0"/>
+              <a:t>3. </a:t>
+            </a:r>
+            <a:r>
+              <a:rPr lang="en-GB" i="1" dirty="0" err="1"/>
+              <a:t>nextremdrug</a:t>
+            </a:r>
+            <a:r>
+              <a:rPr lang="en-GB" dirty="0"/>
+              <a:t> = different drug removed from row drug class</a:t>
+            </a:r>
+          </a:p>
+          <a:p>
+            <a:r>
+              <a:rPr lang="en-GB" dirty="0"/>
+              <a:t>4. </a:t>
+            </a:r>
+            <a:r>
+              <a:rPr lang="en-GB" i="1" dirty="0" err="1"/>
+              <a:t>timetolastpx</a:t>
+            </a:r>
+            <a:r>
+              <a:rPr lang="en-GB" i="1" dirty="0"/>
+              <a:t> – </a:t>
+            </a:r>
+            <a:r>
+              <a:rPr lang="en-GB" i="1" dirty="0" err="1"/>
+              <a:t>timeondrug</a:t>
+            </a:r>
+            <a:r>
+              <a:rPr lang="en-GB" dirty="0"/>
+              <a:t> &lt; 91 / 183</a:t>
+            </a:r>
+          </a:p>
+          <a:p>
+            <a:r>
+              <a:rPr lang="en-GB" dirty="0"/>
+              <a:t>NA. anything else (</a:t>
+            </a:r>
+            <a:r>
+              <a:rPr lang="en-GB" b="1" dirty="0"/>
+              <a:t>what thought??</a:t>
+            </a:r>
+            <a:r>
+              <a:rPr lang="en-GB" dirty="0"/>
+              <a:t>)</a:t>
+            </a:r>
+          </a:p>
+        </p:txBody>
+      </p:sp>
+      <p:sp>
+        <p:nvSpPr>
+          <p:cNvPr id="3" name="Left Brace 2">
+            <a:extLst>
+              <a:ext uri="{FF2B5EF4-FFF2-40B4-BE49-F238E27FC236}">
+                <a16:creationId xmlns:a16="http://schemas.microsoft.com/office/drawing/2014/main" id="{D9DEA1FD-127B-49C8-E2E9-3D899125209C}"/>
+              </a:ext>
+            </a:extLst>
+          </p:cNvPr>
+          <p:cNvSpPr/>
+          <p:nvPr/>
+        </p:nvSpPr>
+        <p:spPr>
+          <a:xfrm>
+            <a:off x="2901950" y="5594350"/>
+            <a:ext cx="196850" cy="1048289"/>
+          </a:xfrm>
+          <a:prstGeom prst="leftBrace">
+            <a:avLst/>
+          </a:prstGeom>
+        </p:spPr>
+        <p:style>
+          <a:lnRef idx="2">
+            <a:schemeClr val="accent1"/>
+          </a:lnRef>
+          <a:fillRef idx="0">
+            <a:schemeClr val="accent1"/>
+          </a:fillRef>
+          <a:effectRef idx="1">
+            <a:schemeClr val="accent1"/>
+          </a:effectRef>
+          <a:fontRef idx="minor">
+            <a:schemeClr val="tx1"/>
+          </a:fontRef>
+        </p:style>
+        <p:txBody>
+          <a:bodyPr rtlCol="0" anchor="ctr"/>
+          <a:lstStyle/>
+          <a:p>
+            <a:pPr algn="ctr"/>
+            <a:endParaRPr lang="en-GB"/>
+          </a:p>
+        </p:txBody>
+      </p:sp>
+      <p:sp>
+        <p:nvSpPr>
+          <p:cNvPr id="6" name="TextBox 5">
+            <a:extLst>
+              <a:ext uri="{FF2B5EF4-FFF2-40B4-BE49-F238E27FC236}">
+                <a16:creationId xmlns:a16="http://schemas.microsoft.com/office/drawing/2014/main" id="{40E3BF6B-80F0-EF10-B546-137551973A0B}"/>
+              </a:ext>
+            </a:extLst>
+          </p:cNvPr>
+          <p:cNvSpPr txBox="1"/>
+          <p:nvPr/>
+        </p:nvSpPr>
+        <p:spPr>
+          <a:xfrm>
+            <a:off x="651702" y="5867400"/>
+            <a:ext cx="2114177" cy="646331"/>
+          </a:xfrm>
+          <a:prstGeom prst="rect">
+            <a:avLst/>
+          </a:prstGeom>
+          <a:noFill/>
+        </p:spPr>
+        <p:txBody>
+          <a:bodyPr wrap="square" rtlCol="0">
+            <a:spAutoFit/>
+          </a:bodyPr>
+          <a:lstStyle/>
+          <a:p>
+            <a:r>
+              <a:rPr lang="en-GB" dirty="0"/>
+              <a:t>Old Rules:</a:t>
+            </a:r>
+          </a:p>
+          <a:p>
+            <a:r>
+              <a:rPr lang="en-GB" dirty="0"/>
+              <a:t>These would be NA</a:t>
+            </a:r>
+          </a:p>
+        </p:txBody>
+      </p:sp>
+    </p:spTree>
+    <p:extLst>
+      <p:ext uri="{BB962C8B-B14F-4D97-AF65-F5344CB8AC3E}">
+        <p14:creationId xmlns:p14="http://schemas.microsoft.com/office/powerpoint/2010/main" val="3869274370"/>
+      </p:ext>
+    </p:extLst>
+  </p:cSld>
+  <p:clrMapOvr>
+    <a:masterClrMapping/>
+  </p:clrMapOvr>
+</p:sld>
+</file>
+
+<file path=ppt/slides/slide5.xml><?xml version="1.0" encoding="utf-8"?>
+<p:sld xmlns:a="http://schemas.openxmlformats.org/drawingml/2006/main" xmlns:r="http://schemas.openxmlformats.org/officeDocument/2006/relationships" xmlns:p="http://schemas.openxmlformats.org/presentationml/2006/main">
+  <p:cSld>
+    <p:spTree>
+      <p:nvGrpSpPr>
+        <p:cNvPr id="1" name=""/>
+        <p:cNvGrpSpPr/>
+        <p:nvPr/>
+      </p:nvGrpSpPr>
+      <p:grpSpPr>
+        <a:xfrm>
+          <a:off x="0" y="0"/>
+          <a:ext cx="0" cy="0"/>
+          <a:chOff x="0" y="0"/>
+          <a:chExt cx="0" cy="0"/>
+        </a:xfrm>
+      </p:grpSpPr>
+      <p:graphicFrame>
+        <p:nvGraphicFramePr>
+          <p:cNvPr id="4" name="Table 3">
+            <a:extLst>
+              <a:ext uri="{FF2B5EF4-FFF2-40B4-BE49-F238E27FC236}">
+                <a16:creationId xmlns:a16="http://schemas.microsoft.com/office/drawing/2014/main" id="{66C6E2E5-8FCC-4CA6-092E-05ABC3F9C97F}"/>
+              </a:ext>
+            </a:extLst>
+          </p:cNvPr>
+          <p:cNvGraphicFramePr>
+            <a:graphicFrameLocks noGrp="1"/>
+          </p:cNvGraphicFramePr>
+          <p:nvPr>
+            <p:extLst>
+              <p:ext uri="{D42A27DB-BD31-4B8C-83A1-F6EECF244321}">
+                <p14:modId xmlns:p14="http://schemas.microsoft.com/office/powerpoint/2010/main" val="2833075457"/>
+              </p:ext>
+            </p:extLst>
+          </p:nvPr>
+        </p:nvGraphicFramePr>
+        <p:xfrm>
+          <a:off x="717550" y="1310216"/>
+          <a:ext cx="9473369" cy="2966720"/>
+        </p:xfrm>
+        <a:graphic>
+          <a:graphicData uri="http://schemas.openxmlformats.org/drawingml/2006/table">
+            <a:tbl>
+              <a:tblPr firstRow="1" bandRow="1">
+                <a:tableStyleId>{5C22544A-7EE6-4342-B048-85BDC9FD1C3A}</a:tableStyleId>
+              </a:tblPr>
+              <a:tblGrid>
+                <a:gridCol w="1803273">
+                  <a:extLst>
+                    <a:ext uri="{9D8B030D-6E8A-4147-A177-3AD203B41FA5}">
+                      <a16:colId xmlns:a16="http://schemas.microsoft.com/office/drawing/2014/main" val="2591732828"/>
+                    </a:ext>
+                  </a:extLst>
+                </a:gridCol>
+                <a:gridCol w="1095728">
+                  <a:extLst>
+                    <a:ext uri="{9D8B030D-6E8A-4147-A177-3AD203B41FA5}">
+                      <a16:colId xmlns:a16="http://schemas.microsoft.com/office/drawing/2014/main" val="115166983"/>
+                    </a:ext>
+                  </a:extLst>
+                </a:gridCol>
+                <a:gridCol w="1095728">
+                  <a:extLst>
+                    <a:ext uri="{9D8B030D-6E8A-4147-A177-3AD203B41FA5}">
+                      <a16:colId xmlns:a16="http://schemas.microsoft.com/office/drawing/2014/main" val="2575733845"/>
+                    </a:ext>
+                  </a:extLst>
+                </a:gridCol>
+                <a:gridCol w="1095728">
+                  <a:extLst>
+                    <a:ext uri="{9D8B030D-6E8A-4147-A177-3AD203B41FA5}">
+                      <a16:colId xmlns:a16="http://schemas.microsoft.com/office/drawing/2014/main" val="3485148647"/>
+                    </a:ext>
+                  </a:extLst>
+                </a:gridCol>
+                <a:gridCol w="1095728">
+                  <a:extLst>
+                    <a:ext uri="{9D8B030D-6E8A-4147-A177-3AD203B41FA5}">
+                      <a16:colId xmlns:a16="http://schemas.microsoft.com/office/drawing/2014/main" val="1824331962"/>
+                    </a:ext>
+                  </a:extLst>
+                </a:gridCol>
+                <a:gridCol w="1095728">
+                  <a:extLst>
+                    <a:ext uri="{9D8B030D-6E8A-4147-A177-3AD203B41FA5}">
+                      <a16:colId xmlns:a16="http://schemas.microsoft.com/office/drawing/2014/main" val="3080864844"/>
+                    </a:ext>
+                  </a:extLst>
+                </a:gridCol>
+                <a:gridCol w="1095728">
+                  <a:extLst>
+                    <a:ext uri="{9D8B030D-6E8A-4147-A177-3AD203B41FA5}">
+                      <a16:colId xmlns:a16="http://schemas.microsoft.com/office/drawing/2014/main" val="449442134"/>
+                    </a:ext>
+                  </a:extLst>
+                </a:gridCol>
+                <a:gridCol w="1095728">
+                  <a:extLst>
+                    <a:ext uri="{9D8B030D-6E8A-4147-A177-3AD203B41FA5}">
+                      <a16:colId xmlns:a16="http://schemas.microsoft.com/office/drawing/2014/main" val="3152022562"/>
+                    </a:ext>
+                  </a:extLst>
+                </a:gridCol>
+              </a:tblGrid>
+              <a:tr h="370840">
+                <a:tc>
+                  <a:txBody>
+                    <a:bodyPr/>
+                    <a:lstStyle/>
+                    <a:p>
+                      <a:endParaRPr lang="en-GB" dirty="0"/>
+                    </a:p>
+                  </a:txBody>
+                  <a:tcPr/>
+                </a:tc>
+                <a:tc gridSpan="7">
+                  <a:txBody>
+                    <a:bodyPr/>
+                    <a:lstStyle/>
+                    <a:p>
+                      <a:r>
+                        <a:rPr lang="en-GB" dirty="0"/>
+                        <a:t>Drug periods recorded</a:t>
+                      </a:r>
+                    </a:p>
+                  </a:txBody>
+                  <a:tcPr/>
+                </a:tc>
+                <a:tc hMerge="1">
+                  <a:txBody>
+                    <a:bodyPr/>
+                    <a:lstStyle/>
+                    <a:p>
+                      <a:endParaRPr lang="en-GB" dirty="0"/>
+                    </a:p>
+                  </a:txBody>
+                  <a:tcPr/>
+                </a:tc>
+                <a:tc hMerge="1">
+                  <a:txBody>
+                    <a:bodyPr/>
+                    <a:lstStyle/>
+                    <a:p>
+                      <a:endParaRPr lang="en-GB" dirty="0"/>
+                    </a:p>
+                  </a:txBody>
+                  <a:tcPr/>
+                </a:tc>
+                <a:tc hMerge="1">
+                  <a:txBody>
+                    <a:bodyPr/>
+                    <a:lstStyle/>
+                    <a:p>
+                      <a:endParaRPr lang="en-GB" dirty="0"/>
+                    </a:p>
+                  </a:txBody>
+                  <a:tcPr/>
+                </a:tc>
+                <a:tc hMerge="1">
+                  <a:txBody>
+                    <a:bodyPr/>
+                    <a:lstStyle/>
+                    <a:p>
+                      <a:endParaRPr lang="en-GB" dirty="0"/>
+                    </a:p>
+                  </a:txBody>
+                  <a:tcPr/>
+                </a:tc>
+                <a:tc hMerge="1">
+                  <a:txBody>
+                    <a:bodyPr/>
+                    <a:lstStyle/>
+                    <a:p>
+                      <a:endParaRPr lang="en-GB" dirty="0"/>
+                    </a:p>
+                  </a:txBody>
+                  <a:tcPr/>
+                </a:tc>
+                <a:tc hMerge="1">
+                  <a:txBody>
+                    <a:bodyPr/>
+                    <a:lstStyle/>
+                    <a:p>
+                      <a:endParaRPr lang="en-GB" dirty="0"/>
+                    </a:p>
+                  </a:txBody>
+                  <a:tcPr/>
+                </a:tc>
+                <a:extLst>
+                  <a:ext uri="{0D108BD9-81ED-4DB2-BD59-A6C34878D82A}">
+                    <a16:rowId xmlns:a16="http://schemas.microsoft.com/office/drawing/2014/main" val="3449528469"/>
+                  </a:ext>
+                </a:extLst>
+              </a:tr>
+              <a:tr h="370840">
+                <a:tc>
+                  <a:txBody>
+                    <a:bodyPr/>
+                    <a:lstStyle/>
+                    <a:p>
+                      <a:r>
+                        <a:rPr lang="en-GB" dirty="0"/>
+                        <a:t>Discontinuation</a:t>
+                      </a:r>
+                    </a:p>
+                  </a:txBody>
+                  <a:tcPr/>
+                </a:tc>
+                <a:tc>
+                  <a:txBody>
+                    <a:bodyPr/>
+                    <a:lstStyle/>
+                    <a:p>
+                      <a:r>
+                        <a:rPr lang="en-GB" dirty="0"/>
+                        <a:t>1</a:t>
+                      </a:r>
+                    </a:p>
+                  </a:txBody>
+                  <a:tcPr/>
+                </a:tc>
+                <a:tc>
+                  <a:txBody>
+                    <a:bodyPr/>
+                    <a:lstStyle/>
+                    <a:p>
+                      <a:r>
+                        <a:rPr lang="en-GB" dirty="0"/>
+                        <a:t>2</a:t>
+                      </a:r>
+                    </a:p>
+                  </a:txBody>
+                  <a:tcPr/>
+                </a:tc>
+                <a:tc>
+                  <a:txBody>
+                    <a:bodyPr/>
+                    <a:lstStyle/>
+                    <a:p>
+                      <a:r>
+                        <a:rPr lang="en-GB" dirty="0"/>
+                        <a:t>3</a:t>
+                      </a:r>
+                    </a:p>
+                  </a:txBody>
+                  <a:tcPr/>
+                </a:tc>
+                <a:tc>
+                  <a:txBody>
+                    <a:bodyPr/>
+                    <a:lstStyle/>
+                    <a:p>
+                      <a:r>
+                        <a:rPr lang="en-GB" dirty="0"/>
+                        <a:t>4</a:t>
+                      </a:r>
+                    </a:p>
+                  </a:txBody>
+                  <a:tcPr/>
+                </a:tc>
+                <a:tc>
+                  <a:txBody>
+                    <a:bodyPr/>
+                    <a:lstStyle/>
+                    <a:p>
+                      <a:r>
+                        <a:rPr lang="en-GB" dirty="0"/>
+                        <a:t>5</a:t>
+                      </a:r>
+                    </a:p>
+                  </a:txBody>
+                  <a:tcPr/>
+                </a:tc>
+                <a:tc>
+                  <a:txBody>
+                    <a:bodyPr/>
+                    <a:lstStyle/>
+                    <a:p>
+                      <a:r>
+                        <a:rPr lang="en-GB" dirty="0"/>
+                        <a:t>6</a:t>
+                      </a:r>
+                    </a:p>
+                  </a:txBody>
+                  <a:tcPr/>
+                </a:tc>
+                <a:tc>
+                  <a:txBody>
+                    <a:bodyPr/>
+                    <a:lstStyle/>
+                    <a:p>
+                      <a:r>
+                        <a:rPr lang="en-GB" dirty="0"/>
+                        <a:t>7</a:t>
+                      </a:r>
+                    </a:p>
+                  </a:txBody>
+                  <a:tcPr/>
+                </a:tc>
+                <a:extLst>
+                  <a:ext uri="{0D108BD9-81ED-4DB2-BD59-A6C34878D82A}">
+                    <a16:rowId xmlns:a16="http://schemas.microsoft.com/office/drawing/2014/main" val="1496173031"/>
+                  </a:ext>
+                </a:extLst>
+              </a:tr>
+              <a:tr h="370840">
+                <a:tc>
+                  <a:txBody>
+                    <a:bodyPr/>
+                    <a:lstStyle/>
+                    <a:p>
+                      <a:r>
+                        <a:rPr lang="en-GB" dirty="0"/>
+                        <a:t>0 (n=19,018)</a:t>
+                      </a:r>
+                    </a:p>
+                  </a:txBody>
+                  <a:tcPr/>
+                </a:tc>
+                <a:tc>
+                  <a:txBody>
+                    <a:bodyPr/>
+                    <a:lstStyle/>
+                    <a:p>
+                      <a:r>
+                        <a:rPr lang="en-GB" dirty="0"/>
+                        <a:t>89.62</a:t>
+                      </a:r>
+                    </a:p>
+                  </a:txBody>
+                  <a:tcPr/>
+                </a:tc>
+                <a:tc>
+                  <a:txBody>
+                    <a:bodyPr/>
+                    <a:lstStyle/>
+                    <a:p>
+                      <a:r>
+                        <a:rPr lang="en-GB" dirty="0"/>
+                        <a:t>8.94</a:t>
+                      </a:r>
+                    </a:p>
+                  </a:txBody>
+                  <a:tcPr/>
+                </a:tc>
+                <a:tc>
+                  <a:txBody>
+                    <a:bodyPr/>
+                    <a:lstStyle/>
+                    <a:p>
+                      <a:r>
+                        <a:rPr lang="en-GB" dirty="0"/>
+                        <a:t>1.19</a:t>
+                      </a:r>
+                    </a:p>
+                  </a:txBody>
+                  <a:tcPr/>
+                </a:tc>
+                <a:tc>
+                  <a:txBody>
+                    <a:bodyPr/>
+                    <a:lstStyle/>
+                    <a:p>
+                      <a:r>
+                        <a:rPr lang="en-GB" dirty="0"/>
+                        <a:t>0.23</a:t>
+                      </a:r>
+                    </a:p>
+                  </a:txBody>
+                  <a:tcPr/>
+                </a:tc>
+                <a:tc>
+                  <a:txBody>
+                    <a:bodyPr/>
+                    <a:lstStyle/>
+                    <a:p>
+                      <a:r>
+                        <a:rPr lang="en-GB" dirty="0"/>
+                        <a:t>0.01</a:t>
+                      </a:r>
+                    </a:p>
+                  </a:txBody>
+                  <a:tcPr/>
+                </a:tc>
+                <a:tc>
+                  <a:txBody>
+                    <a:bodyPr/>
+                    <a:lstStyle/>
+                    <a:p>
+                      <a:r>
+                        <a:rPr lang="en-GB" dirty="0"/>
+                        <a:t>0.01</a:t>
+                      </a:r>
+                    </a:p>
+                  </a:txBody>
+                  <a:tcPr/>
+                </a:tc>
+                <a:tc>
+                  <a:txBody>
+                    <a:bodyPr/>
+                    <a:lstStyle/>
+                    <a:p>
+                      <a:r>
+                        <a:rPr lang="en-GB" dirty="0"/>
+                        <a:t>0.01</a:t>
+                      </a:r>
+                    </a:p>
+                  </a:txBody>
+                  <a:tcPr/>
+                </a:tc>
+                <a:extLst>
+                  <a:ext uri="{0D108BD9-81ED-4DB2-BD59-A6C34878D82A}">
+                    <a16:rowId xmlns:a16="http://schemas.microsoft.com/office/drawing/2014/main" val="926079196"/>
+                  </a:ext>
+                </a:extLst>
+              </a:tr>
+              <a:tr h="370840">
+                <a:tc>
+                  <a:txBody>
+                    <a:bodyPr/>
+                    <a:lstStyle/>
+                    <a:p>
+                      <a:r>
+                        <a:rPr lang="en-GB" dirty="0"/>
+                        <a:t>1 (n=3,099)</a:t>
+                      </a:r>
+                    </a:p>
+                  </a:txBody>
+                  <a:tcPr/>
+                </a:tc>
+                <a:tc>
+                  <a:txBody>
+                    <a:bodyPr/>
+                    <a:lstStyle/>
+                    <a:p>
+                      <a:r>
+                        <a:rPr lang="en-GB" dirty="0"/>
+                        <a:t> 74.64</a:t>
+                      </a:r>
+                    </a:p>
+                  </a:txBody>
+                  <a:tcPr/>
+                </a:tc>
+                <a:tc>
+                  <a:txBody>
+                    <a:bodyPr/>
+                    <a:lstStyle/>
+                    <a:p>
+                      <a:r>
+                        <a:rPr lang="en-GB" dirty="0"/>
+                        <a:t>22.04</a:t>
+                      </a:r>
+                    </a:p>
+                  </a:txBody>
+                  <a:tcPr/>
+                </a:tc>
+                <a:tc>
+                  <a:txBody>
+                    <a:bodyPr/>
+                    <a:lstStyle/>
+                    <a:p>
+                      <a:r>
+                        <a:rPr lang="en-GB" dirty="0"/>
+                        <a:t>2.90</a:t>
+                      </a:r>
+                    </a:p>
+                  </a:txBody>
+                  <a:tcPr/>
+                </a:tc>
+                <a:tc>
+                  <a:txBody>
+                    <a:bodyPr/>
+                    <a:lstStyle/>
+                    <a:p>
+                      <a:r>
+                        <a:rPr lang="en-GB" dirty="0"/>
+                        <a:t>0.29</a:t>
+                      </a:r>
+                    </a:p>
+                  </a:txBody>
+                  <a:tcPr/>
+                </a:tc>
+                <a:tc>
+                  <a:txBody>
+                    <a:bodyPr/>
+                    <a:lstStyle/>
+                    <a:p>
+                      <a:r>
+                        <a:rPr lang="en-GB" dirty="0"/>
+                        <a:t>0.13</a:t>
+                      </a:r>
+                    </a:p>
+                  </a:txBody>
+                  <a:tcPr/>
+                </a:tc>
+                <a:tc>
+                  <a:txBody>
+                    <a:bodyPr/>
+                    <a:lstStyle/>
+                    <a:p>
+                      <a:r>
+                        <a:rPr lang="en-GB" dirty="0"/>
+                        <a:t>0.00</a:t>
+                      </a:r>
+                    </a:p>
+                  </a:txBody>
+                  <a:tcPr/>
+                </a:tc>
+                <a:tc>
+                  <a:txBody>
+                    <a:bodyPr/>
+                    <a:lstStyle/>
+                    <a:p>
+                      <a:r>
+                        <a:rPr lang="en-GB" dirty="0"/>
+                        <a:t>0.00</a:t>
+                      </a:r>
+                    </a:p>
+                  </a:txBody>
+                  <a:tcPr/>
+                </a:tc>
+                <a:extLst>
+                  <a:ext uri="{0D108BD9-81ED-4DB2-BD59-A6C34878D82A}">
+                    <a16:rowId xmlns:a16="http://schemas.microsoft.com/office/drawing/2014/main" val="1232296111"/>
+                  </a:ext>
+                </a:extLst>
+              </a:tr>
+              <a:tr h="370840">
+                <a:tc>
+                  <a:txBody>
+                    <a:bodyPr/>
+                    <a:lstStyle/>
+                    <a:p>
+                      <a:r>
+                        <a:rPr lang="en-GB" dirty="0"/>
+                        <a:t>2 (n=808)</a:t>
+                      </a:r>
+                    </a:p>
+                  </a:txBody>
+                  <a:tcPr/>
+                </a:tc>
+                <a:tc>
+                  <a:txBody>
+                    <a:bodyPr/>
+                    <a:lstStyle/>
+                    <a:p>
+                      <a:r>
+                        <a:rPr lang="en-GB" dirty="0"/>
+                        <a:t>95.05</a:t>
+                      </a:r>
+                    </a:p>
+                  </a:txBody>
+                  <a:tcPr/>
+                </a:tc>
+                <a:tc>
+                  <a:txBody>
+                    <a:bodyPr/>
+                    <a:lstStyle/>
+                    <a:p>
+                      <a:r>
+                        <a:rPr lang="en-GB" dirty="0"/>
+                        <a:t>3.84</a:t>
+                      </a:r>
+                    </a:p>
+                  </a:txBody>
+                  <a:tcPr/>
+                </a:tc>
+                <a:tc>
+                  <a:txBody>
+                    <a:bodyPr/>
+                    <a:lstStyle/>
+                    <a:p>
+                      <a:r>
+                        <a:rPr lang="en-GB" dirty="0"/>
+                        <a:t>0.62</a:t>
+                      </a:r>
+                    </a:p>
+                  </a:txBody>
+                  <a:tcPr/>
+                </a:tc>
+                <a:tc>
+                  <a:txBody>
+                    <a:bodyPr/>
+                    <a:lstStyle/>
+                    <a:p>
+                      <a:r>
+                        <a:rPr lang="en-GB" dirty="0"/>
+                        <a:t>0.25</a:t>
+                      </a:r>
+                    </a:p>
+                  </a:txBody>
+                  <a:tcPr/>
+                </a:tc>
+                <a:tc>
+                  <a:txBody>
+                    <a:bodyPr/>
+                    <a:lstStyle/>
+                    <a:p>
+                      <a:r>
+                        <a:rPr lang="en-GB" dirty="0"/>
+                        <a:t>0.25</a:t>
+                      </a:r>
+                    </a:p>
+                  </a:txBody>
+                  <a:tcPr/>
+                </a:tc>
+                <a:tc>
+                  <a:txBody>
+                    <a:bodyPr/>
+                    <a:lstStyle/>
+                    <a:p>
+                      <a:r>
+                        <a:rPr lang="en-GB" dirty="0"/>
+                        <a:t>0.00</a:t>
+                      </a:r>
+                    </a:p>
+                  </a:txBody>
+                  <a:tcPr/>
+                </a:tc>
+                <a:tc>
+                  <a:txBody>
+                    <a:bodyPr/>
+                    <a:lstStyle/>
+                    <a:p>
+                      <a:r>
+                        <a:rPr lang="en-GB" dirty="0"/>
+                        <a:t>0.00</a:t>
+                      </a:r>
+                    </a:p>
+                  </a:txBody>
+                  <a:tcPr/>
+                </a:tc>
+                <a:extLst>
+                  <a:ext uri="{0D108BD9-81ED-4DB2-BD59-A6C34878D82A}">
+                    <a16:rowId xmlns:a16="http://schemas.microsoft.com/office/drawing/2014/main" val="3569907657"/>
+                  </a:ext>
+                </a:extLst>
+              </a:tr>
+              <a:tr h="370840">
+                <a:tc>
+                  <a:txBody>
+                    <a:bodyPr/>
+                    <a:lstStyle/>
+                    <a:p>
+                      <a:r>
+                        <a:rPr lang="en-GB" dirty="0"/>
+                        <a:t>3 (n=613)</a:t>
+                      </a:r>
+                    </a:p>
+                  </a:txBody>
+                  <a:tcPr/>
+                </a:tc>
+                <a:tc>
+                  <a:txBody>
+                    <a:bodyPr/>
+                    <a:lstStyle/>
+                    <a:p>
+                      <a:r>
+                        <a:rPr lang="en-GB" dirty="0"/>
+                        <a:t>91.52</a:t>
+                      </a:r>
+                    </a:p>
+                  </a:txBody>
+                  <a:tcPr/>
+                </a:tc>
+                <a:tc>
+                  <a:txBody>
+                    <a:bodyPr/>
+                    <a:lstStyle/>
+                    <a:p>
+                      <a:r>
+                        <a:rPr lang="en-GB" dirty="0"/>
+                        <a:t>7.01</a:t>
+                      </a:r>
+                    </a:p>
+                  </a:txBody>
+                  <a:tcPr/>
+                </a:tc>
+                <a:tc>
+                  <a:txBody>
+                    <a:bodyPr/>
+                    <a:lstStyle/>
+                    <a:p>
+                      <a:r>
+                        <a:rPr lang="en-GB" dirty="0"/>
+                        <a:t>1.31</a:t>
+                      </a:r>
+                    </a:p>
+                  </a:txBody>
+                  <a:tcPr/>
+                </a:tc>
+                <a:tc>
+                  <a:txBody>
+                    <a:bodyPr/>
+                    <a:lstStyle/>
+                    <a:p>
+                      <a:r>
+                        <a:rPr lang="en-GB" dirty="0"/>
+                        <a:t>0.00</a:t>
+                      </a:r>
+                    </a:p>
+                  </a:txBody>
+                  <a:tcPr/>
+                </a:tc>
+                <a:tc>
+                  <a:txBody>
+                    <a:bodyPr/>
+                    <a:lstStyle/>
+                    <a:p>
+                      <a:r>
+                        <a:rPr lang="en-GB" dirty="0"/>
+                        <a:t>0.16</a:t>
+                      </a:r>
+                    </a:p>
+                  </a:txBody>
+                  <a:tcPr/>
+                </a:tc>
+                <a:tc>
+                  <a:txBody>
+                    <a:bodyPr/>
+                    <a:lstStyle/>
+                    <a:p>
+                      <a:r>
+                        <a:rPr lang="en-GB" dirty="0"/>
+                        <a:t>0.00</a:t>
+                      </a:r>
+                    </a:p>
+                  </a:txBody>
+                  <a:tcPr/>
+                </a:tc>
+                <a:tc>
+                  <a:txBody>
+                    <a:bodyPr/>
+                    <a:lstStyle/>
+                    <a:p>
+                      <a:r>
+                        <a:rPr lang="en-GB" dirty="0"/>
+                        <a:t>0.00</a:t>
+                      </a:r>
+                    </a:p>
+                  </a:txBody>
+                  <a:tcPr/>
+                </a:tc>
+                <a:extLst>
+                  <a:ext uri="{0D108BD9-81ED-4DB2-BD59-A6C34878D82A}">
+                    <a16:rowId xmlns:a16="http://schemas.microsoft.com/office/drawing/2014/main" val="2193292983"/>
+                  </a:ext>
+                </a:extLst>
+              </a:tr>
+              <a:tr h="370840">
+                <a:tc>
+                  <a:txBody>
+                    <a:bodyPr/>
+                    <a:lstStyle/>
+                    <a:p>
+                      <a:r>
+                        <a:rPr lang="en-GB" dirty="0"/>
+                        <a:t>4 (n=530)</a:t>
+                      </a:r>
+                    </a:p>
+                  </a:txBody>
+                  <a:tcPr/>
+                </a:tc>
+                <a:tc>
+                  <a:txBody>
+                    <a:bodyPr/>
+                    <a:lstStyle/>
+                    <a:p>
+                      <a:r>
+                        <a:rPr lang="en-GB" dirty="0"/>
+                        <a:t>100.00</a:t>
+                      </a:r>
+                    </a:p>
+                  </a:txBody>
+                  <a:tcPr/>
+                </a:tc>
+                <a:tc>
+                  <a:txBody>
+                    <a:bodyPr/>
+                    <a:lstStyle/>
+                    <a:p>
+                      <a:r>
+                        <a:rPr lang="en-GB" dirty="0"/>
+                        <a:t>0.00</a:t>
+                      </a:r>
+                    </a:p>
+                  </a:txBody>
+                  <a:tcPr/>
+                </a:tc>
+                <a:tc>
+                  <a:txBody>
+                    <a:bodyPr/>
+                    <a:lstStyle/>
+                    <a:p>
+                      <a:r>
+                        <a:rPr lang="en-GB" dirty="0"/>
+                        <a:t>0.00</a:t>
+                      </a:r>
+                    </a:p>
+                  </a:txBody>
+                  <a:tcPr/>
+                </a:tc>
+                <a:tc>
+                  <a:txBody>
+                    <a:bodyPr/>
+                    <a:lstStyle/>
+                    <a:p>
+                      <a:r>
+                        <a:rPr lang="en-GB" dirty="0"/>
+                        <a:t>0.00</a:t>
+                      </a:r>
+                    </a:p>
+                  </a:txBody>
+                  <a:tcPr/>
+                </a:tc>
+                <a:tc>
+                  <a:txBody>
+                    <a:bodyPr/>
+                    <a:lstStyle/>
+                    <a:p>
+                      <a:r>
+                        <a:rPr lang="en-GB" dirty="0"/>
+                        <a:t>0.00</a:t>
+                      </a:r>
+                    </a:p>
+                  </a:txBody>
+                  <a:tcPr/>
+                </a:tc>
+                <a:tc>
+                  <a:txBody>
+                    <a:bodyPr/>
+                    <a:lstStyle/>
+                    <a:p>
+                      <a:r>
+                        <a:rPr lang="en-GB" dirty="0"/>
+                        <a:t>0.00</a:t>
+                      </a:r>
+                    </a:p>
+                  </a:txBody>
+                  <a:tcPr/>
+                </a:tc>
+                <a:tc>
+                  <a:txBody>
+                    <a:bodyPr/>
+                    <a:lstStyle/>
+                    <a:p>
+                      <a:r>
+                        <a:rPr lang="en-GB" dirty="0"/>
+                        <a:t>0.00</a:t>
+                      </a:r>
+                    </a:p>
+                  </a:txBody>
+                  <a:tcPr/>
+                </a:tc>
+                <a:extLst>
+                  <a:ext uri="{0D108BD9-81ED-4DB2-BD59-A6C34878D82A}">
+                    <a16:rowId xmlns:a16="http://schemas.microsoft.com/office/drawing/2014/main" val="3496583969"/>
+                  </a:ext>
+                </a:extLst>
+              </a:tr>
+              <a:tr h="370840">
+                <a:tc>
+                  <a:txBody>
+                    <a:bodyPr/>
+                    <a:lstStyle/>
+                    <a:p>
+                      <a:r>
+                        <a:rPr lang="en-GB" dirty="0"/>
+                        <a:t>NA (n=4)</a:t>
+                      </a:r>
+                    </a:p>
+                  </a:txBody>
+                  <a:tcPr/>
+                </a:tc>
+                <a:tc>
+                  <a:txBody>
+                    <a:bodyPr/>
+                    <a:lstStyle/>
+                    <a:p>
+                      <a:r>
+                        <a:rPr lang="en-GB" dirty="0"/>
+                        <a:t>100.00</a:t>
+                      </a:r>
+                    </a:p>
+                  </a:txBody>
+                  <a:tcPr/>
+                </a:tc>
+                <a:tc>
+                  <a:txBody>
+                    <a:bodyPr/>
+                    <a:lstStyle/>
+                    <a:p>
+                      <a:r>
+                        <a:rPr lang="en-GB" dirty="0"/>
+                        <a:t>0.00</a:t>
+                      </a:r>
+                    </a:p>
+                  </a:txBody>
+                  <a:tcPr/>
+                </a:tc>
+                <a:tc>
+                  <a:txBody>
+                    <a:bodyPr/>
+                    <a:lstStyle/>
+                    <a:p>
+                      <a:r>
+                        <a:rPr lang="en-GB" dirty="0"/>
+                        <a:t>0.00</a:t>
+                      </a:r>
+                    </a:p>
+                  </a:txBody>
+                  <a:tcPr/>
+                </a:tc>
+                <a:tc>
+                  <a:txBody>
+                    <a:bodyPr/>
+                    <a:lstStyle/>
+                    <a:p>
+                      <a:r>
+                        <a:rPr lang="en-GB" dirty="0"/>
+                        <a:t>0.00</a:t>
+                      </a:r>
+                    </a:p>
+                  </a:txBody>
+                  <a:tcPr/>
+                </a:tc>
+                <a:tc>
+                  <a:txBody>
+                    <a:bodyPr/>
+                    <a:lstStyle/>
+                    <a:p>
+                      <a:r>
+                        <a:rPr lang="en-GB" dirty="0"/>
+                        <a:t>0.00</a:t>
+                      </a:r>
+                    </a:p>
+                  </a:txBody>
+                  <a:tcPr/>
+                </a:tc>
+                <a:tc>
+                  <a:txBody>
+                    <a:bodyPr/>
+                    <a:lstStyle/>
+                    <a:p>
+                      <a:r>
+                        <a:rPr lang="en-GB" dirty="0"/>
+                        <a:t>0.00</a:t>
+                      </a:r>
+                    </a:p>
+                  </a:txBody>
+                  <a:tcPr/>
+                </a:tc>
+                <a:tc>
+                  <a:txBody>
+                    <a:bodyPr/>
+                    <a:lstStyle/>
+                    <a:p>
+                      <a:r>
+                        <a:rPr lang="en-GB" dirty="0"/>
+                        <a:t>0.00</a:t>
+                      </a:r>
+                    </a:p>
+                  </a:txBody>
+                  <a:tcPr/>
+                </a:tc>
+                <a:extLst>
+                  <a:ext uri="{0D108BD9-81ED-4DB2-BD59-A6C34878D82A}">
+                    <a16:rowId xmlns:a16="http://schemas.microsoft.com/office/drawing/2014/main" val="3970979412"/>
+                  </a:ext>
+                </a:extLst>
+              </a:tr>
+            </a:tbl>
+          </a:graphicData>
+        </a:graphic>
+      </p:graphicFrame>
+      <p:sp>
+        <p:nvSpPr>
+          <p:cNvPr id="5" name="TextBox 4">
+            <a:extLst>
+              <a:ext uri="{FF2B5EF4-FFF2-40B4-BE49-F238E27FC236}">
+                <a16:creationId xmlns:a16="http://schemas.microsoft.com/office/drawing/2014/main" id="{B7E67A8E-C4EE-2E68-D094-CEDFD1BFD3E7}"/>
+              </a:ext>
+            </a:extLst>
+          </p:cNvPr>
+          <p:cNvSpPr txBox="1"/>
+          <p:nvPr/>
+        </p:nvSpPr>
+        <p:spPr>
+          <a:xfrm>
+            <a:off x="234950" y="336550"/>
+            <a:ext cx="7226300" cy="369332"/>
+          </a:xfrm>
+          <a:prstGeom prst="rect">
+            <a:avLst/>
+          </a:prstGeom>
+          <a:noFill/>
+        </p:spPr>
+        <p:txBody>
+          <a:bodyPr wrap="square" rtlCol="0">
+            <a:spAutoFit/>
+          </a:bodyPr>
+          <a:lstStyle/>
+          <a:p>
+            <a:r>
+              <a:rPr lang="en-GB" dirty="0"/>
+              <a:t>GLP1</a:t>
+            </a:r>
+          </a:p>
+        </p:txBody>
+      </p:sp>
+      <p:sp>
+        <p:nvSpPr>
+          <p:cNvPr id="2" name="TextBox 1">
+            <a:extLst>
+              <a:ext uri="{FF2B5EF4-FFF2-40B4-BE49-F238E27FC236}">
+                <a16:creationId xmlns:a16="http://schemas.microsoft.com/office/drawing/2014/main" id="{ADD6DA72-BF0C-B873-A9DF-A2D849EC5698}"/>
+              </a:ext>
+            </a:extLst>
+          </p:cNvPr>
+          <p:cNvSpPr txBox="1"/>
+          <p:nvPr/>
+        </p:nvSpPr>
+        <p:spPr>
+          <a:xfrm>
+            <a:off x="3234871" y="4683210"/>
+            <a:ext cx="7826829" cy="2031325"/>
+          </a:xfrm>
+          <a:prstGeom prst="rect">
+            <a:avLst/>
+          </a:prstGeom>
+          <a:noFill/>
+        </p:spPr>
+        <p:txBody>
+          <a:bodyPr wrap="square" rtlCol="0">
+            <a:spAutoFit/>
+          </a:bodyPr>
+          <a:lstStyle/>
+          <a:p>
+            <a:r>
+              <a:rPr lang="en-GB" dirty="0"/>
+              <a:t>Rules:</a:t>
+            </a:r>
+          </a:p>
+          <a:p>
+            <a:r>
+              <a:rPr lang="en-GB" dirty="0"/>
+              <a:t>0. </a:t>
+            </a:r>
+            <a:r>
+              <a:rPr lang="en-GB" i="1" dirty="0" err="1"/>
+              <a:t>timeondrug</a:t>
+            </a:r>
+            <a:r>
+              <a:rPr lang="en-GB" dirty="0"/>
+              <a:t> bigger than 91 / 183 / 365 (not represented here)</a:t>
+            </a:r>
+          </a:p>
+          <a:p>
+            <a:r>
+              <a:rPr lang="en-GB" dirty="0"/>
+              <a:t>1. </a:t>
+            </a:r>
+            <a:r>
+              <a:rPr lang="en-GB" i="1" dirty="0" err="1"/>
+              <a:t>timeondrug</a:t>
+            </a:r>
+            <a:r>
+              <a:rPr lang="en-GB" dirty="0"/>
+              <a:t> less than 91 / 183 / 365</a:t>
+            </a:r>
+          </a:p>
+          <a:p>
+            <a:r>
+              <a:rPr lang="en-GB" dirty="0"/>
+              <a:t>2. </a:t>
+            </a:r>
+            <a:r>
+              <a:rPr lang="en-GB" i="1" dirty="0" err="1"/>
+              <a:t>nextremdrug</a:t>
+            </a:r>
+            <a:r>
+              <a:rPr lang="en-GB" dirty="0"/>
+              <a:t> = NA (represents a break in the current drug before restarting)</a:t>
+            </a:r>
+          </a:p>
+          <a:p>
+            <a:r>
+              <a:rPr lang="en-GB" dirty="0"/>
+              <a:t>3. </a:t>
+            </a:r>
+            <a:r>
+              <a:rPr lang="en-GB" i="1" dirty="0" err="1"/>
+              <a:t>nextremdrug</a:t>
+            </a:r>
+            <a:r>
+              <a:rPr lang="en-GB" dirty="0"/>
+              <a:t> = different drug removed from row drug class</a:t>
+            </a:r>
+          </a:p>
+          <a:p>
+            <a:r>
+              <a:rPr lang="en-GB" dirty="0"/>
+              <a:t>4. </a:t>
+            </a:r>
+            <a:r>
+              <a:rPr lang="en-GB" i="1" dirty="0" err="1"/>
+              <a:t>timetolastpx</a:t>
+            </a:r>
+            <a:r>
+              <a:rPr lang="en-GB" i="1" dirty="0"/>
+              <a:t> – </a:t>
+            </a:r>
+            <a:r>
+              <a:rPr lang="en-GB" i="1" dirty="0" err="1"/>
+              <a:t>timeondrug</a:t>
+            </a:r>
+            <a:r>
+              <a:rPr lang="en-GB" dirty="0"/>
+              <a:t> &lt; 91 / 183</a:t>
+            </a:r>
+          </a:p>
+          <a:p>
+            <a:r>
+              <a:rPr lang="en-GB" dirty="0"/>
+              <a:t>NA. anything else (</a:t>
+            </a:r>
+            <a:r>
+              <a:rPr lang="en-GB" b="1" dirty="0"/>
+              <a:t>what thought??</a:t>
+            </a:r>
+            <a:r>
+              <a:rPr lang="en-GB" dirty="0"/>
+              <a:t>)</a:t>
+            </a:r>
+          </a:p>
+        </p:txBody>
+      </p:sp>
+      <p:sp>
+        <p:nvSpPr>
+          <p:cNvPr id="3" name="Left Brace 2">
+            <a:extLst>
+              <a:ext uri="{FF2B5EF4-FFF2-40B4-BE49-F238E27FC236}">
+                <a16:creationId xmlns:a16="http://schemas.microsoft.com/office/drawing/2014/main" id="{BA750573-D24D-5626-5CFB-2FF8FB5CBDED}"/>
+              </a:ext>
+            </a:extLst>
+          </p:cNvPr>
+          <p:cNvSpPr/>
+          <p:nvPr/>
+        </p:nvSpPr>
+        <p:spPr>
+          <a:xfrm>
+            <a:off x="2901950" y="5594350"/>
+            <a:ext cx="196850" cy="1048289"/>
+          </a:xfrm>
+          <a:prstGeom prst="leftBrace">
+            <a:avLst/>
+          </a:prstGeom>
+        </p:spPr>
+        <p:style>
+          <a:lnRef idx="2">
+            <a:schemeClr val="accent1"/>
+          </a:lnRef>
+          <a:fillRef idx="0">
+            <a:schemeClr val="accent1"/>
+          </a:fillRef>
+          <a:effectRef idx="1">
+            <a:schemeClr val="accent1"/>
+          </a:effectRef>
+          <a:fontRef idx="minor">
+            <a:schemeClr val="tx1"/>
+          </a:fontRef>
+        </p:style>
+        <p:txBody>
+          <a:bodyPr rtlCol="0" anchor="ctr"/>
+          <a:lstStyle/>
+          <a:p>
+            <a:pPr algn="ctr"/>
+            <a:endParaRPr lang="en-GB"/>
+          </a:p>
+        </p:txBody>
+      </p:sp>
+      <p:sp>
+        <p:nvSpPr>
+          <p:cNvPr id="6" name="TextBox 5">
+            <a:extLst>
+              <a:ext uri="{FF2B5EF4-FFF2-40B4-BE49-F238E27FC236}">
+                <a16:creationId xmlns:a16="http://schemas.microsoft.com/office/drawing/2014/main" id="{08B94C40-E918-F1C9-2504-21D29AC4C015}"/>
+              </a:ext>
+            </a:extLst>
+          </p:cNvPr>
+          <p:cNvSpPr txBox="1"/>
+          <p:nvPr/>
+        </p:nvSpPr>
+        <p:spPr>
+          <a:xfrm>
+            <a:off x="651702" y="5867400"/>
+            <a:ext cx="2114177" cy="646331"/>
+          </a:xfrm>
+          <a:prstGeom prst="rect">
+            <a:avLst/>
+          </a:prstGeom>
+          <a:noFill/>
+        </p:spPr>
+        <p:txBody>
+          <a:bodyPr wrap="square" rtlCol="0">
+            <a:spAutoFit/>
+          </a:bodyPr>
+          <a:lstStyle/>
+          <a:p>
+            <a:r>
+              <a:rPr lang="en-GB" dirty="0"/>
+              <a:t>Old Rules:</a:t>
+            </a:r>
+          </a:p>
+          <a:p>
+            <a:r>
+              <a:rPr lang="en-GB" dirty="0"/>
+              <a:t>These would be NA</a:t>
+            </a:r>
+          </a:p>
+        </p:txBody>
+      </p:sp>
+    </p:spTree>
+    <p:extLst>
+      <p:ext uri="{BB962C8B-B14F-4D97-AF65-F5344CB8AC3E}">
+        <p14:creationId xmlns:p14="http://schemas.microsoft.com/office/powerpoint/2010/main" val="3695857818"/>
+      </p:ext>
+    </p:extLst>
+  </p:cSld>
+  <p:clrMapOvr>
+    <a:masterClrMapping/>
+  </p:clrMapOvr>
+</p:sld>
+</file>
+
+<file path=ppt/slides/slide6.xml><?xml version="1.0" encoding="utf-8"?>
+<p:sld xmlns:a="http://schemas.openxmlformats.org/drawingml/2006/main" xmlns:r="http://schemas.openxmlformats.org/officeDocument/2006/relationships" xmlns:p="http://schemas.openxmlformats.org/presentationml/2006/main">
+  <p:cSld>
+    <p:spTree>
+      <p:nvGrpSpPr>
+        <p:cNvPr id="1" name=""/>
+        <p:cNvGrpSpPr/>
+        <p:nvPr/>
+      </p:nvGrpSpPr>
+      <p:grpSpPr>
+        <a:xfrm>
+          <a:off x="0" y="0"/>
+          <a:ext cx="0" cy="0"/>
+          <a:chOff x="0" y="0"/>
+          <a:chExt cx="0" cy="0"/>
+        </a:xfrm>
+      </p:grpSpPr>
+      <p:graphicFrame>
+        <p:nvGraphicFramePr>
+          <p:cNvPr id="4" name="Table 3">
+            <a:extLst>
+              <a:ext uri="{FF2B5EF4-FFF2-40B4-BE49-F238E27FC236}">
+                <a16:creationId xmlns:a16="http://schemas.microsoft.com/office/drawing/2014/main" id="{66C6E2E5-8FCC-4CA6-092E-05ABC3F9C97F}"/>
+              </a:ext>
+            </a:extLst>
+          </p:cNvPr>
+          <p:cNvGraphicFramePr>
+            <a:graphicFrameLocks noGrp="1"/>
+          </p:cNvGraphicFramePr>
+          <p:nvPr>
+            <p:extLst>
+              <p:ext uri="{D42A27DB-BD31-4B8C-83A1-F6EECF244321}">
+                <p14:modId xmlns:p14="http://schemas.microsoft.com/office/powerpoint/2010/main" val="4224158164"/>
+              </p:ext>
+            </p:extLst>
+          </p:nvPr>
+        </p:nvGraphicFramePr>
+        <p:xfrm>
+          <a:off x="717550" y="1310216"/>
+          <a:ext cx="10569097" cy="2966720"/>
+        </p:xfrm>
+        <a:graphic>
+          <a:graphicData uri="http://schemas.openxmlformats.org/drawingml/2006/table">
+            <a:tbl>
+              <a:tblPr firstRow="1" bandRow="1">
+                <a:tableStyleId>{5C22544A-7EE6-4342-B048-85BDC9FD1C3A}</a:tableStyleId>
+              </a:tblPr>
+              <a:tblGrid>
+                <a:gridCol w="1803273">
+                  <a:extLst>
+                    <a:ext uri="{9D8B030D-6E8A-4147-A177-3AD203B41FA5}">
+                      <a16:colId xmlns:a16="http://schemas.microsoft.com/office/drawing/2014/main" val="2591732828"/>
+                    </a:ext>
+                  </a:extLst>
+                </a:gridCol>
+                <a:gridCol w="1095728">
+                  <a:extLst>
+                    <a:ext uri="{9D8B030D-6E8A-4147-A177-3AD203B41FA5}">
+                      <a16:colId xmlns:a16="http://schemas.microsoft.com/office/drawing/2014/main" val="115166983"/>
+                    </a:ext>
+                  </a:extLst>
+                </a:gridCol>
+                <a:gridCol w="1095728">
+                  <a:extLst>
+                    <a:ext uri="{9D8B030D-6E8A-4147-A177-3AD203B41FA5}">
+                      <a16:colId xmlns:a16="http://schemas.microsoft.com/office/drawing/2014/main" val="2575733845"/>
+                    </a:ext>
+                  </a:extLst>
+                </a:gridCol>
+                <a:gridCol w="1095728">
+                  <a:extLst>
+                    <a:ext uri="{9D8B030D-6E8A-4147-A177-3AD203B41FA5}">
+                      <a16:colId xmlns:a16="http://schemas.microsoft.com/office/drawing/2014/main" val="3485148647"/>
+                    </a:ext>
+                  </a:extLst>
+                </a:gridCol>
+                <a:gridCol w="1095728">
+                  <a:extLst>
+                    <a:ext uri="{9D8B030D-6E8A-4147-A177-3AD203B41FA5}">
+                      <a16:colId xmlns:a16="http://schemas.microsoft.com/office/drawing/2014/main" val="1824331962"/>
+                    </a:ext>
+                  </a:extLst>
+                </a:gridCol>
+                <a:gridCol w="1095728">
+                  <a:extLst>
+                    <a:ext uri="{9D8B030D-6E8A-4147-A177-3AD203B41FA5}">
+                      <a16:colId xmlns:a16="http://schemas.microsoft.com/office/drawing/2014/main" val="3080864844"/>
+                    </a:ext>
+                  </a:extLst>
+                </a:gridCol>
+                <a:gridCol w="1095728">
+                  <a:extLst>
+                    <a:ext uri="{9D8B030D-6E8A-4147-A177-3AD203B41FA5}">
+                      <a16:colId xmlns:a16="http://schemas.microsoft.com/office/drawing/2014/main" val="449442134"/>
+                    </a:ext>
+                  </a:extLst>
+                </a:gridCol>
+                <a:gridCol w="1095728">
+                  <a:extLst>
+                    <a:ext uri="{9D8B030D-6E8A-4147-A177-3AD203B41FA5}">
+                      <a16:colId xmlns:a16="http://schemas.microsoft.com/office/drawing/2014/main" val="3152022562"/>
+                    </a:ext>
+                  </a:extLst>
+                </a:gridCol>
+                <a:gridCol w="1095728">
+                  <a:extLst>
+                    <a:ext uri="{9D8B030D-6E8A-4147-A177-3AD203B41FA5}">
+                      <a16:colId xmlns:a16="http://schemas.microsoft.com/office/drawing/2014/main" val="3621369029"/>
+                    </a:ext>
+                  </a:extLst>
+                </a:gridCol>
+              </a:tblGrid>
+              <a:tr h="370840">
+                <a:tc>
+                  <a:txBody>
+                    <a:bodyPr/>
+                    <a:lstStyle/>
+                    <a:p>
+                      <a:endParaRPr lang="en-GB" dirty="0"/>
+                    </a:p>
+                  </a:txBody>
+                  <a:tcPr/>
+                </a:tc>
+                <a:tc gridSpan="8">
+                  <a:txBody>
+                    <a:bodyPr/>
+                    <a:lstStyle/>
+                    <a:p>
+                      <a:r>
+                        <a:rPr lang="en-GB" dirty="0"/>
+                        <a:t>Drug periods recorded</a:t>
+                      </a:r>
+                    </a:p>
+                  </a:txBody>
+                  <a:tcPr/>
+                </a:tc>
+                <a:tc hMerge="1">
+                  <a:txBody>
+                    <a:bodyPr/>
+                    <a:lstStyle/>
+                    <a:p>
+                      <a:endParaRPr lang="en-GB" dirty="0"/>
+                    </a:p>
+                  </a:txBody>
+                  <a:tcPr/>
+                </a:tc>
+                <a:tc hMerge="1">
+                  <a:txBody>
+                    <a:bodyPr/>
+                    <a:lstStyle/>
+                    <a:p>
+                      <a:endParaRPr lang="en-GB" dirty="0"/>
+                    </a:p>
+                  </a:txBody>
+                  <a:tcPr/>
+                </a:tc>
+                <a:tc hMerge="1">
+                  <a:txBody>
+                    <a:bodyPr/>
+                    <a:lstStyle/>
+                    <a:p>
+                      <a:endParaRPr lang="en-GB" dirty="0"/>
+                    </a:p>
+                  </a:txBody>
+                  <a:tcPr/>
+                </a:tc>
+                <a:tc hMerge="1">
+                  <a:txBody>
+                    <a:bodyPr/>
+                    <a:lstStyle/>
+                    <a:p>
+                      <a:endParaRPr lang="en-GB" dirty="0"/>
+                    </a:p>
+                  </a:txBody>
+                  <a:tcPr/>
+                </a:tc>
+                <a:tc hMerge="1">
+                  <a:txBody>
+                    <a:bodyPr/>
+                    <a:lstStyle/>
+                    <a:p>
+                      <a:endParaRPr lang="en-GB" dirty="0"/>
+                    </a:p>
+                  </a:txBody>
+                  <a:tcPr/>
+                </a:tc>
+                <a:tc hMerge="1">
+                  <a:txBody>
+                    <a:bodyPr/>
+                    <a:lstStyle/>
+                    <a:p>
+                      <a:endParaRPr lang="en-GB" dirty="0"/>
+                    </a:p>
+                  </a:txBody>
+                  <a:tcPr/>
+                </a:tc>
+                <a:tc hMerge="1">
+                  <a:txBody>
+                    <a:bodyPr/>
+                    <a:lstStyle/>
+                    <a:p>
+                      <a:endParaRPr lang="en-GB" dirty="0"/>
+                    </a:p>
+                  </a:txBody>
+                  <a:tcPr/>
+                </a:tc>
+                <a:extLst>
+                  <a:ext uri="{0D108BD9-81ED-4DB2-BD59-A6C34878D82A}">
+                    <a16:rowId xmlns:a16="http://schemas.microsoft.com/office/drawing/2014/main" val="3449528469"/>
+                  </a:ext>
+                </a:extLst>
+              </a:tr>
+              <a:tr h="370840">
+                <a:tc>
+                  <a:txBody>
+                    <a:bodyPr/>
+                    <a:lstStyle/>
+                    <a:p>
+                      <a:r>
+                        <a:rPr lang="en-GB" dirty="0"/>
+                        <a:t>Discontinuation</a:t>
+                      </a:r>
+                    </a:p>
+                  </a:txBody>
+                  <a:tcPr/>
+                </a:tc>
+                <a:tc>
+                  <a:txBody>
+                    <a:bodyPr/>
+                    <a:lstStyle/>
+                    <a:p>
+                      <a:r>
+                        <a:rPr lang="en-GB" dirty="0"/>
+                        <a:t>1</a:t>
+                      </a:r>
+                    </a:p>
+                  </a:txBody>
+                  <a:tcPr/>
+                </a:tc>
+                <a:tc>
+                  <a:txBody>
+                    <a:bodyPr/>
+                    <a:lstStyle/>
+                    <a:p>
+                      <a:r>
+                        <a:rPr lang="en-GB" dirty="0"/>
+                        <a:t>2</a:t>
+                      </a:r>
+                    </a:p>
+                  </a:txBody>
+                  <a:tcPr/>
+                </a:tc>
+                <a:tc>
+                  <a:txBody>
+                    <a:bodyPr/>
+                    <a:lstStyle/>
+                    <a:p>
+                      <a:r>
+                        <a:rPr lang="en-GB" dirty="0"/>
+                        <a:t>3</a:t>
+                      </a:r>
+                    </a:p>
+                  </a:txBody>
+                  <a:tcPr/>
+                </a:tc>
+                <a:tc>
+                  <a:txBody>
+                    <a:bodyPr/>
+                    <a:lstStyle/>
+                    <a:p>
+                      <a:r>
+                        <a:rPr lang="en-GB" dirty="0"/>
+                        <a:t>4</a:t>
+                      </a:r>
+                    </a:p>
+                  </a:txBody>
+                  <a:tcPr/>
+                </a:tc>
+                <a:tc>
+                  <a:txBody>
+                    <a:bodyPr/>
+                    <a:lstStyle/>
+                    <a:p>
+                      <a:r>
+                        <a:rPr lang="en-GB" dirty="0"/>
+                        <a:t>5</a:t>
+                      </a:r>
+                    </a:p>
+                  </a:txBody>
+                  <a:tcPr/>
+                </a:tc>
+                <a:tc>
+                  <a:txBody>
+                    <a:bodyPr/>
+                    <a:lstStyle/>
+                    <a:p>
+                      <a:r>
+                        <a:rPr lang="en-GB" dirty="0"/>
+                        <a:t>6</a:t>
+                      </a:r>
+                    </a:p>
+                  </a:txBody>
+                  <a:tcPr/>
+                </a:tc>
+                <a:tc>
+                  <a:txBody>
+                    <a:bodyPr/>
+                    <a:lstStyle/>
+                    <a:p>
+                      <a:r>
+                        <a:rPr lang="en-GB" dirty="0"/>
+                        <a:t>7</a:t>
+                      </a:r>
+                    </a:p>
+                  </a:txBody>
+                  <a:tcPr/>
+                </a:tc>
+                <a:tc>
+                  <a:txBody>
+                    <a:bodyPr/>
+                    <a:lstStyle/>
+                    <a:p>
+                      <a:r>
+                        <a:rPr lang="en-GB" dirty="0"/>
+                        <a:t>8</a:t>
+                      </a:r>
+                    </a:p>
+                  </a:txBody>
+                  <a:tcPr/>
+                </a:tc>
+                <a:extLst>
+                  <a:ext uri="{0D108BD9-81ED-4DB2-BD59-A6C34878D82A}">
+                    <a16:rowId xmlns:a16="http://schemas.microsoft.com/office/drawing/2014/main" val="1496173031"/>
+                  </a:ext>
+                </a:extLst>
+              </a:tr>
+              <a:tr h="370840">
+                <a:tc>
+                  <a:txBody>
+                    <a:bodyPr/>
+                    <a:lstStyle/>
+                    <a:p>
+                      <a:r>
+                        <a:rPr lang="en-GB" dirty="0"/>
+                        <a:t>0 (n=47,893)</a:t>
+                      </a:r>
+                    </a:p>
+                  </a:txBody>
+                  <a:tcPr/>
+                </a:tc>
+                <a:tc>
+                  <a:txBody>
+                    <a:bodyPr/>
+                    <a:lstStyle/>
+                    <a:p>
+                      <a:r>
+                        <a:rPr lang="en-GB" dirty="0"/>
+                        <a:t> 88.41</a:t>
+                      </a:r>
+                    </a:p>
+                  </a:txBody>
+                  <a:tcPr/>
+                </a:tc>
+                <a:tc>
+                  <a:txBody>
+                    <a:bodyPr/>
+                    <a:lstStyle/>
+                    <a:p>
+                      <a:r>
+                        <a:rPr lang="en-GB" dirty="0"/>
+                        <a:t>9.70</a:t>
+                      </a:r>
+                    </a:p>
+                  </a:txBody>
+                  <a:tcPr/>
+                </a:tc>
+                <a:tc>
+                  <a:txBody>
+                    <a:bodyPr/>
+                    <a:lstStyle/>
+                    <a:p>
+                      <a:r>
+                        <a:rPr lang="en-GB" dirty="0"/>
+                        <a:t>1.53</a:t>
+                      </a:r>
+                    </a:p>
+                  </a:txBody>
+                  <a:tcPr/>
+                </a:tc>
+                <a:tc>
+                  <a:txBody>
+                    <a:bodyPr/>
+                    <a:lstStyle/>
+                    <a:p>
+                      <a:r>
+                        <a:rPr lang="en-GB" dirty="0"/>
+                        <a:t>0.29</a:t>
+                      </a:r>
+                    </a:p>
+                  </a:txBody>
+                  <a:tcPr/>
+                </a:tc>
+                <a:tc>
+                  <a:txBody>
+                    <a:bodyPr/>
+                    <a:lstStyle/>
+                    <a:p>
+                      <a:r>
+                        <a:rPr lang="en-GB" dirty="0"/>
+                        <a:t>0.05</a:t>
+                      </a:r>
+                    </a:p>
+                  </a:txBody>
+                  <a:tcPr/>
+                </a:tc>
+                <a:tc>
+                  <a:txBody>
+                    <a:bodyPr/>
+                    <a:lstStyle/>
+                    <a:p>
+                      <a:r>
+                        <a:rPr lang="en-GB" dirty="0"/>
+                        <a:t>0.01</a:t>
+                      </a:r>
+                    </a:p>
+                  </a:txBody>
+                  <a:tcPr/>
+                </a:tc>
+                <a:tc>
+                  <a:txBody>
+                    <a:bodyPr/>
+                    <a:lstStyle/>
+                    <a:p>
+                      <a:r>
+                        <a:rPr lang="en-GB" dirty="0"/>
+                        <a:t>0.00</a:t>
+                      </a:r>
+                    </a:p>
+                  </a:txBody>
+                  <a:tcPr/>
+                </a:tc>
+                <a:tc>
+                  <a:txBody>
+                    <a:bodyPr/>
+                    <a:lstStyle/>
+                    <a:p>
+                      <a:r>
+                        <a:rPr lang="en-GB" dirty="0"/>
+                        <a:t>0.00</a:t>
+                      </a:r>
+                    </a:p>
+                  </a:txBody>
+                  <a:tcPr/>
+                </a:tc>
+                <a:extLst>
+                  <a:ext uri="{0D108BD9-81ED-4DB2-BD59-A6C34878D82A}">
+                    <a16:rowId xmlns:a16="http://schemas.microsoft.com/office/drawing/2014/main" val="926079196"/>
+                  </a:ext>
+                </a:extLst>
+              </a:tr>
+              <a:tr h="370840">
+                <a:tc>
+                  <a:txBody>
+                    <a:bodyPr/>
+                    <a:lstStyle/>
+                    <a:p>
+                      <a:r>
+                        <a:rPr lang="en-GB" dirty="0"/>
+                        <a:t>1 (n=9,665)</a:t>
+                      </a:r>
+                    </a:p>
+                  </a:txBody>
+                  <a:tcPr/>
+                </a:tc>
+                <a:tc>
+                  <a:txBody>
+                    <a:bodyPr/>
+                    <a:lstStyle/>
+                    <a:p>
+                      <a:r>
+                        <a:rPr lang="en-GB" dirty="0"/>
+                        <a:t>72.74</a:t>
+                      </a:r>
+                    </a:p>
+                  </a:txBody>
+                  <a:tcPr/>
+                </a:tc>
+                <a:tc>
+                  <a:txBody>
+                    <a:bodyPr/>
+                    <a:lstStyle/>
+                    <a:p>
+                      <a:r>
+                        <a:rPr lang="en-GB" dirty="0"/>
+                        <a:t>22.58</a:t>
+                      </a:r>
+                    </a:p>
+                  </a:txBody>
+                  <a:tcPr/>
+                </a:tc>
+                <a:tc>
+                  <a:txBody>
+                    <a:bodyPr/>
+                    <a:lstStyle/>
+                    <a:p>
+                      <a:r>
+                        <a:rPr lang="en-GB" dirty="0"/>
+                        <a:t>3.87</a:t>
+                      </a:r>
+                    </a:p>
+                  </a:txBody>
+                  <a:tcPr/>
+                </a:tc>
+                <a:tc>
+                  <a:txBody>
+                    <a:bodyPr/>
+                    <a:lstStyle/>
+                    <a:p>
+                      <a:r>
+                        <a:rPr lang="en-GB" dirty="0"/>
+                        <a:t>0.62</a:t>
+                      </a:r>
+                    </a:p>
+                  </a:txBody>
+                  <a:tcPr/>
+                </a:tc>
+                <a:tc>
+                  <a:txBody>
+                    <a:bodyPr/>
+                    <a:lstStyle/>
+                    <a:p>
+                      <a:r>
+                        <a:rPr lang="en-GB" dirty="0"/>
+                        <a:t>0.12</a:t>
+                      </a:r>
+                    </a:p>
+                  </a:txBody>
+                  <a:tcPr/>
+                </a:tc>
+                <a:tc>
+                  <a:txBody>
+                    <a:bodyPr/>
+                    <a:lstStyle/>
+                    <a:p>
+                      <a:r>
+                        <a:rPr lang="en-GB" dirty="0"/>
+                        <a:t>0.05</a:t>
+                      </a:r>
+                    </a:p>
+                  </a:txBody>
+                  <a:tcPr/>
+                </a:tc>
+                <a:tc>
+                  <a:txBody>
+                    <a:bodyPr/>
+                    <a:lstStyle/>
+                    <a:p>
+                      <a:r>
+                        <a:rPr lang="en-GB" dirty="0"/>
+                        <a:t>0.02</a:t>
+                      </a:r>
+                    </a:p>
+                  </a:txBody>
+                  <a:tcPr/>
+                </a:tc>
+                <a:tc>
+                  <a:txBody>
+                    <a:bodyPr/>
+                    <a:lstStyle/>
+                    <a:p>
+                      <a:r>
+                        <a:rPr lang="en-GB" dirty="0"/>
+                        <a:t>0.00</a:t>
+                      </a:r>
+                    </a:p>
+                  </a:txBody>
+                  <a:tcPr/>
+                </a:tc>
+                <a:extLst>
+                  <a:ext uri="{0D108BD9-81ED-4DB2-BD59-A6C34878D82A}">
+                    <a16:rowId xmlns:a16="http://schemas.microsoft.com/office/drawing/2014/main" val="1232296111"/>
+                  </a:ext>
+                </a:extLst>
+              </a:tr>
+              <a:tr h="370840">
+                <a:tc>
+                  <a:txBody>
+                    <a:bodyPr/>
+                    <a:lstStyle/>
+                    <a:p>
+                      <a:r>
+                        <a:rPr lang="en-GB" dirty="0"/>
+                        <a:t>2 (n=3,906)</a:t>
+                      </a:r>
+                    </a:p>
+                  </a:txBody>
+                  <a:tcPr/>
+                </a:tc>
+                <a:tc>
+                  <a:txBody>
+                    <a:bodyPr/>
+                    <a:lstStyle/>
+                    <a:p>
+                      <a:r>
+                        <a:rPr lang="en-GB" dirty="0"/>
+                        <a:t>83.18</a:t>
+                      </a:r>
+                    </a:p>
+                  </a:txBody>
+                  <a:tcPr/>
+                </a:tc>
+                <a:tc>
+                  <a:txBody>
+                    <a:bodyPr/>
+                    <a:lstStyle/>
+                    <a:p>
+                      <a:r>
+                        <a:rPr lang="en-GB" dirty="0"/>
+                        <a:t>12.31</a:t>
+                      </a:r>
+                    </a:p>
+                  </a:txBody>
+                  <a:tcPr/>
+                </a:tc>
+                <a:tc>
+                  <a:txBody>
+                    <a:bodyPr/>
+                    <a:lstStyle/>
+                    <a:p>
+                      <a:r>
+                        <a:rPr lang="en-GB" dirty="0"/>
+                        <a:t>3.00</a:t>
+                      </a:r>
+                    </a:p>
+                  </a:txBody>
+                  <a:tcPr/>
+                </a:tc>
+                <a:tc>
+                  <a:txBody>
+                    <a:bodyPr/>
+                    <a:lstStyle/>
+                    <a:p>
+                      <a:r>
+                        <a:rPr lang="en-GB" dirty="0"/>
+                        <a:t>0.84</a:t>
+                      </a:r>
+                    </a:p>
+                  </a:txBody>
+                  <a:tcPr/>
+                </a:tc>
+                <a:tc>
+                  <a:txBody>
+                    <a:bodyPr/>
+                    <a:lstStyle/>
+                    <a:p>
+                      <a:r>
+                        <a:rPr lang="en-GB" dirty="0"/>
+                        <a:t>0.49</a:t>
+                      </a:r>
+                    </a:p>
+                  </a:txBody>
+                  <a:tcPr/>
+                </a:tc>
+                <a:tc>
+                  <a:txBody>
+                    <a:bodyPr/>
+                    <a:lstStyle/>
+                    <a:p>
+                      <a:r>
+                        <a:rPr lang="en-GB" dirty="0"/>
+                        <a:t>0.13</a:t>
+                      </a:r>
+                    </a:p>
+                  </a:txBody>
+                  <a:tcPr/>
+                </a:tc>
+                <a:tc>
+                  <a:txBody>
+                    <a:bodyPr/>
+                    <a:lstStyle/>
+                    <a:p>
+                      <a:r>
+                        <a:rPr lang="en-GB" dirty="0"/>
+                        <a:t>0.03</a:t>
+                      </a:r>
+                    </a:p>
+                  </a:txBody>
+                  <a:tcPr/>
+                </a:tc>
+                <a:tc>
+                  <a:txBody>
+                    <a:bodyPr/>
+                    <a:lstStyle/>
+                    <a:p>
+                      <a:r>
+                        <a:rPr lang="en-GB" dirty="0"/>
+                        <a:t>0.03</a:t>
+                      </a:r>
+                    </a:p>
+                  </a:txBody>
+                  <a:tcPr/>
+                </a:tc>
+                <a:extLst>
+                  <a:ext uri="{0D108BD9-81ED-4DB2-BD59-A6C34878D82A}">
+                    <a16:rowId xmlns:a16="http://schemas.microsoft.com/office/drawing/2014/main" val="3569907657"/>
+                  </a:ext>
+                </a:extLst>
+              </a:tr>
+              <a:tr h="370840">
+                <a:tc>
+                  <a:txBody>
+                    <a:bodyPr/>
+                    <a:lstStyle/>
+                    <a:p>
+                      <a:r>
+                        <a:rPr lang="en-GB" dirty="0"/>
+                        <a:t>3 (n=733)</a:t>
+                      </a:r>
+                    </a:p>
+                  </a:txBody>
+                  <a:tcPr/>
+                </a:tc>
+                <a:tc>
+                  <a:txBody>
+                    <a:bodyPr/>
+                    <a:lstStyle/>
+                    <a:p>
+                      <a:r>
+                        <a:rPr lang="en-GB" dirty="0"/>
+                        <a:t>83.08</a:t>
+                      </a:r>
+                    </a:p>
+                  </a:txBody>
+                  <a:tcPr/>
+                </a:tc>
+                <a:tc>
+                  <a:txBody>
+                    <a:bodyPr/>
+                    <a:lstStyle/>
+                    <a:p>
+                      <a:r>
+                        <a:rPr lang="en-GB" dirty="0"/>
+                        <a:t>12.41</a:t>
+                      </a:r>
+                    </a:p>
+                  </a:txBody>
+                  <a:tcPr/>
+                </a:tc>
+                <a:tc>
+                  <a:txBody>
+                    <a:bodyPr/>
+                    <a:lstStyle/>
+                    <a:p>
+                      <a:r>
+                        <a:rPr lang="en-GB" dirty="0"/>
+                        <a:t>3.41</a:t>
+                      </a:r>
+                    </a:p>
+                  </a:txBody>
+                  <a:tcPr/>
+                </a:tc>
+                <a:tc>
+                  <a:txBody>
+                    <a:bodyPr/>
+                    <a:lstStyle/>
+                    <a:p>
+                      <a:r>
+                        <a:rPr lang="en-GB" dirty="0"/>
+                        <a:t>0.68</a:t>
+                      </a:r>
+                    </a:p>
+                  </a:txBody>
+                  <a:tcPr/>
+                </a:tc>
+                <a:tc>
+                  <a:txBody>
+                    <a:bodyPr/>
+                    <a:lstStyle/>
+                    <a:p>
+                      <a:r>
+                        <a:rPr lang="en-GB" dirty="0"/>
+                        <a:t>0.27</a:t>
+                      </a:r>
+                    </a:p>
+                  </a:txBody>
+                  <a:tcPr/>
+                </a:tc>
+                <a:tc>
+                  <a:txBody>
+                    <a:bodyPr/>
+                    <a:lstStyle/>
+                    <a:p>
+                      <a:r>
+                        <a:rPr lang="en-GB" dirty="0"/>
+                        <a:t>0.00</a:t>
+                      </a:r>
+                    </a:p>
+                  </a:txBody>
+                  <a:tcPr/>
+                </a:tc>
+                <a:tc>
+                  <a:txBody>
+                    <a:bodyPr/>
+                    <a:lstStyle/>
+                    <a:p>
+                      <a:r>
+                        <a:rPr lang="en-GB" dirty="0"/>
+                        <a:t>0.14</a:t>
+                      </a:r>
+                    </a:p>
+                  </a:txBody>
+                  <a:tcPr/>
+                </a:tc>
+                <a:tc>
+                  <a:txBody>
+                    <a:bodyPr/>
+                    <a:lstStyle/>
+                    <a:p>
+                      <a:r>
+                        <a:rPr lang="en-GB" dirty="0"/>
+                        <a:t>0.00</a:t>
+                      </a:r>
+                    </a:p>
+                  </a:txBody>
+                  <a:tcPr/>
+                </a:tc>
+                <a:extLst>
+                  <a:ext uri="{0D108BD9-81ED-4DB2-BD59-A6C34878D82A}">
+                    <a16:rowId xmlns:a16="http://schemas.microsoft.com/office/drawing/2014/main" val="2193292983"/>
+                  </a:ext>
+                </a:extLst>
+              </a:tr>
+              <a:tr h="370840">
+                <a:tc>
+                  <a:txBody>
+                    <a:bodyPr/>
+                    <a:lstStyle/>
+                    <a:p>
+                      <a:r>
+                        <a:rPr lang="en-GB" dirty="0"/>
+                        <a:t>4 (n=803)</a:t>
+                      </a:r>
+                    </a:p>
+                  </a:txBody>
+                  <a:tcPr/>
+                </a:tc>
+                <a:tc>
+                  <a:txBody>
+                    <a:bodyPr/>
+                    <a:lstStyle/>
+                    <a:p>
+                      <a:r>
+                        <a:rPr lang="en-GB" dirty="0"/>
+                        <a:t>100.00</a:t>
+                      </a:r>
+                    </a:p>
+                  </a:txBody>
+                  <a:tcPr/>
+                </a:tc>
+                <a:tc>
+                  <a:txBody>
+                    <a:bodyPr/>
+                    <a:lstStyle/>
+                    <a:p>
+                      <a:r>
+                        <a:rPr lang="en-GB" dirty="0"/>
+                        <a:t>0.00</a:t>
+                      </a:r>
+                    </a:p>
+                  </a:txBody>
+                  <a:tcPr/>
+                </a:tc>
+                <a:tc>
+                  <a:txBody>
+                    <a:bodyPr/>
+                    <a:lstStyle/>
+                    <a:p>
+                      <a:r>
+                        <a:rPr lang="en-GB" dirty="0"/>
+                        <a:t>0.00</a:t>
+                      </a:r>
+                    </a:p>
+                  </a:txBody>
+                  <a:tcPr/>
+                </a:tc>
+                <a:tc>
+                  <a:txBody>
+                    <a:bodyPr/>
+                    <a:lstStyle/>
+                    <a:p>
+                      <a:r>
+                        <a:rPr lang="en-GB" dirty="0"/>
+                        <a:t>0.00</a:t>
+                      </a:r>
+                    </a:p>
+                  </a:txBody>
+                  <a:tcPr/>
+                </a:tc>
+                <a:tc>
+                  <a:txBody>
+                    <a:bodyPr/>
+                    <a:lstStyle/>
+                    <a:p>
+                      <a:r>
+                        <a:rPr lang="en-GB" dirty="0"/>
+                        <a:t>0.00</a:t>
+                      </a:r>
+                    </a:p>
+                  </a:txBody>
+                  <a:tcPr/>
+                </a:tc>
+                <a:tc>
+                  <a:txBody>
+                    <a:bodyPr/>
+                    <a:lstStyle/>
+                    <a:p>
+                      <a:r>
+                        <a:rPr lang="en-GB" dirty="0"/>
+                        <a:t>0.00</a:t>
+                      </a:r>
+                    </a:p>
+                  </a:txBody>
+                  <a:tcPr/>
+                </a:tc>
+                <a:tc>
+                  <a:txBody>
+                    <a:bodyPr/>
+                    <a:lstStyle/>
+                    <a:p>
+                      <a:r>
+                        <a:rPr lang="en-GB" dirty="0"/>
+                        <a:t>0.00</a:t>
+                      </a:r>
+                    </a:p>
+                  </a:txBody>
+                  <a:tcPr/>
+                </a:tc>
+                <a:tc>
+                  <a:txBody>
+                    <a:bodyPr/>
+                    <a:lstStyle/>
+                    <a:p>
+                      <a:r>
+                        <a:rPr lang="en-GB" dirty="0"/>
+                        <a:t>0.00</a:t>
+                      </a:r>
+                    </a:p>
+                  </a:txBody>
+                  <a:tcPr/>
+                </a:tc>
+                <a:extLst>
+                  <a:ext uri="{0D108BD9-81ED-4DB2-BD59-A6C34878D82A}">
+                    <a16:rowId xmlns:a16="http://schemas.microsoft.com/office/drawing/2014/main" val="3496583969"/>
+                  </a:ext>
+                </a:extLst>
+              </a:tr>
+              <a:tr h="370840">
+                <a:tc>
+                  <a:txBody>
+                    <a:bodyPr/>
+                    <a:lstStyle/>
+                    <a:p>
+                      <a:r>
+                        <a:rPr lang="en-GB" dirty="0"/>
+                        <a:t>NA (n=11)</a:t>
+                      </a:r>
+                    </a:p>
+                  </a:txBody>
+                  <a:tcPr/>
+                </a:tc>
+                <a:tc>
+                  <a:txBody>
+                    <a:bodyPr/>
+                    <a:lstStyle/>
+                    <a:p>
+                      <a:r>
+                        <a:rPr lang="en-GB" dirty="0"/>
+                        <a:t>100.00</a:t>
+                      </a:r>
+                    </a:p>
+                  </a:txBody>
+                  <a:tcPr/>
+                </a:tc>
+                <a:tc>
+                  <a:txBody>
+                    <a:bodyPr/>
+                    <a:lstStyle/>
+                    <a:p>
+                      <a:r>
+                        <a:rPr lang="en-GB" dirty="0"/>
+                        <a:t>0.00</a:t>
+                      </a:r>
+                    </a:p>
+                  </a:txBody>
+                  <a:tcPr/>
+                </a:tc>
+                <a:tc>
+                  <a:txBody>
+                    <a:bodyPr/>
+                    <a:lstStyle/>
+                    <a:p>
+                      <a:r>
+                        <a:rPr lang="en-GB" dirty="0"/>
+                        <a:t>0.00</a:t>
+                      </a:r>
+                    </a:p>
+                  </a:txBody>
+                  <a:tcPr/>
+                </a:tc>
+                <a:tc>
+                  <a:txBody>
+                    <a:bodyPr/>
+                    <a:lstStyle/>
+                    <a:p>
+                      <a:r>
+                        <a:rPr lang="en-GB" dirty="0"/>
+                        <a:t>0.00</a:t>
+                      </a:r>
+                    </a:p>
+                  </a:txBody>
+                  <a:tcPr/>
+                </a:tc>
+                <a:tc>
+                  <a:txBody>
+                    <a:bodyPr/>
+                    <a:lstStyle/>
+                    <a:p>
+                      <a:r>
+                        <a:rPr lang="en-GB" dirty="0"/>
+                        <a:t>0.00</a:t>
+                      </a:r>
+                    </a:p>
+                  </a:txBody>
+                  <a:tcPr/>
+                </a:tc>
+                <a:tc>
+                  <a:txBody>
+                    <a:bodyPr/>
+                    <a:lstStyle/>
+                    <a:p>
+                      <a:r>
+                        <a:rPr lang="en-GB" dirty="0"/>
+                        <a:t>0.00</a:t>
+                      </a:r>
+                    </a:p>
+                  </a:txBody>
+                  <a:tcPr/>
+                </a:tc>
+                <a:tc>
+                  <a:txBody>
+                    <a:bodyPr/>
+                    <a:lstStyle/>
+                    <a:p>
+                      <a:r>
+                        <a:rPr lang="en-GB" dirty="0"/>
+                        <a:t>0.00</a:t>
+                      </a:r>
+                    </a:p>
+                  </a:txBody>
+                  <a:tcPr/>
+                </a:tc>
+                <a:tc>
+                  <a:txBody>
+                    <a:bodyPr/>
+                    <a:lstStyle/>
+                    <a:p>
+                      <a:r>
+                        <a:rPr lang="en-GB" dirty="0"/>
+                        <a:t>0.00</a:t>
+                      </a:r>
+                    </a:p>
+                  </a:txBody>
+                  <a:tcPr/>
+                </a:tc>
+                <a:extLst>
+                  <a:ext uri="{0D108BD9-81ED-4DB2-BD59-A6C34878D82A}">
+                    <a16:rowId xmlns:a16="http://schemas.microsoft.com/office/drawing/2014/main" val="3970979412"/>
+                  </a:ext>
+                </a:extLst>
+              </a:tr>
+            </a:tbl>
+          </a:graphicData>
+        </a:graphic>
+      </p:graphicFrame>
+      <p:sp>
+        <p:nvSpPr>
+          <p:cNvPr id="5" name="TextBox 4">
+            <a:extLst>
+              <a:ext uri="{FF2B5EF4-FFF2-40B4-BE49-F238E27FC236}">
+                <a16:creationId xmlns:a16="http://schemas.microsoft.com/office/drawing/2014/main" id="{B7E67A8E-C4EE-2E68-D094-CEDFD1BFD3E7}"/>
+              </a:ext>
+            </a:extLst>
+          </p:cNvPr>
+          <p:cNvSpPr txBox="1"/>
+          <p:nvPr/>
+        </p:nvSpPr>
+        <p:spPr>
+          <a:xfrm>
+            <a:off x="234950" y="336550"/>
+            <a:ext cx="7226300" cy="369332"/>
+          </a:xfrm>
+          <a:prstGeom prst="rect">
+            <a:avLst/>
+          </a:prstGeom>
+          <a:noFill/>
+        </p:spPr>
+        <p:txBody>
+          <a:bodyPr wrap="square" rtlCol="0">
+            <a:spAutoFit/>
+          </a:bodyPr>
+          <a:lstStyle/>
+          <a:p>
+            <a:r>
+              <a:rPr lang="en-GB" dirty="0"/>
+              <a:t>SU</a:t>
+            </a:r>
+          </a:p>
+        </p:txBody>
+      </p:sp>
+      <p:sp>
+        <p:nvSpPr>
+          <p:cNvPr id="2" name="TextBox 1">
+            <a:extLst>
+              <a:ext uri="{FF2B5EF4-FFF2-40B4-BE49-F238E27FC236}">
+                <a16:creationId xmlns:a16="http://schemas.microsoft.com/office/drawing/2014/main" id="{4082D9A0-5F8F-67CF-B880-D0F898ADEB50}"/>
+              </a:ext>
+            </a:extLst>
+          </p:cNvPr>
+          <p:cNvSpPr txBox="1"/>
+          <p:nvPr/>
+        </p:nvSpPr>
+        <p:spPr>
+          <a:xfrm>
+            <a:off x="3234871" y="4683210"/>
+            <a:ext cx="7826829" cy="2031325"/>
+          </a:xfrm>
+          <a:prstGeom prst="rect">
+            <a:avLst/>
+          </a:prstGeom>
+          <a:noFill/>
+        </p:spPr>
+        <p:txBody>
+          <a:bodyPr wrap="square" rtlCol="0">
+            <a:spAutoFit/>
+          </a:bodyPr>
+          <a:lstStyle/>
+          <a:p>
+            <a:r>
+              <a:rPr lang="en-GB" dirty="0"/>
+              <a:t>Rules:</a:t>
+            </a:r>
+          </a:p>
+          <a:p>
+            <a:r>
+              <a:rPr lang="en-GB" dirty="0"/>
+              <a:t>0. </a:t>
+            </a:r>
+            <a:r>
+              <a:rPr lang="en-GB" i="1" dirty="0" err="1"/>
+              <a:t>timeondrug</a:t>
+            </a:r>
+            <a:r>
+              <a:rPr lang="en-GB" dirty="0"/>
+              <a:t> bigger than 91 / 183 / 365 (not represented here)</a:t>
+            </a:r>
+          </a:p>
+          <a:p>
+            <a:r>
+              <a:rPr lang="en-GB" dirty="0"/>
+              <a:t>1. </a:t>
+            </a:r>
+            <a:r>
+              <a:rPr lang="en-GB" i="1" dirty="0" err="1"/>
+              <a:t>timeondrug</a:t>
+            </a:r>
+            <a:r>
+              <a:rPr lang="en-GB" dirty="0"/>
+              <a:t> less than 91 / 183 / 365</a:t>
+            </a:r>
+          </a:p>
+          <a:p>
+            <a:r>
+              <a:rPr lang="en-GB" dirty="0"/>
+              <a:t>2. </a:t>
+            </a:r>
+            <a:r>
+              <a:rPr lang="en-GB" i="1" dirty="0" err="1"/>
+              <a:t>nextremdrug</a:t>
+            </a:r>
+            <a:r>
+              <a:rPr lang="en-GB" dirty="0"/>
+              <a:t> = NA (represents a break in the current drug before restarting)</a:t>
+            </a:r>
+          </a:p>
+          <a:p>
+            <a:r>
+              <a:rPr lang="en-GB" dirty="0"/>
+              <a:t>3. </a:t>
+            </a:r>
+            <a:r>
+              <a:rPr lang="en-GB" i="1" dirty="0" err="1"/>
+              <a:t>nextremdrug</a:t>
+            </a:r>
+            <a:r>
+              <a:rPr lang="en-GB" dirty="0"/>
+              <a:t> = different drug removed from row drug class</a:t>
+            </a:r>
+          </a:p>
+          <a:p>
+            <a:r>
+              <a:rPr lang="en-GB" dirty="0"/>
+              <a:t>4. </a:t>
+            </a:r>
+            <a:r>
+              <a:rPr lang="en-GB" i="1" dirty="0" err="1"/>
+              <a:t>timetolastpx</a:t>
+            </a:r>
+            <a:r>
+              <a:rPr lang="en-GB" i="1" dirty="0"/>
+              <a:t> – </a:t>
+            </a:r>
+            <a:r>
+              <a:rPr lang="en-GB" i="1" dirty="0" err="1"/>
+              <a:t>timeondrug</a:t>
+            </a:r>
+            <a:r>
+              <a:rPr lang="en-GB" dirty="0"/>
+              <a:t> &lt; 91 / 183</a:t>
+            </a:r>
+          </a:p>
+          <a:p>
+            <a:r>
+              <a:rPr lang="en-GB" dirty="0"/>
+              <a:t>NA. anything else (</a:t>
+            </a:r>
+            <a:r>
+              <a:rPr lang="en-GB" b="1" dirty="0"/>
+              <a:t>what thought??</a:t>
+            </a:r>
+            <a:r>
+              <a:rPr lang="en-GB" dirty="0"/>
+              <a:t>)</a:t>
+            </a:r>
+          </a:p>
+        </p:txBody>
+      </p:sp>
+      <p:sp>
+        <p:nvSpPr>
+          <p:cNvPr id="3" name="Left Brace 2">
+            <a:extLst>
+              <a:ext uri="{FF2B5EF4-FFF2-40B4-BE49-F238E27FC236}">
+                <a16:creationId xmlns:a16="http://schemas.microsoft.com/office/drawing/2014/main" id="{3860DE33-7E13-A8EC-BBE0-8D820E1C4D64}"/>
+              </a:ext>
+            </a:extLst>
+          </p:cNvPr>
+          <p:cNvSpPr/>
+          <p:nvPr/>
+        </p:nvSpPr>
+        <p:spPr>
+          <a:xfrm>
+            <a:off x="2901950" y="5594350"/>
+            <a:ext cx="196850" cy="1048289"/>
+          </a:xfrm>
+          <a:prstGeom prst="leftBrace">
+            <a:avLst/>
+          </a:prstGeom>
+        </p:spPr>
+        <p:style>
+          <a:lnRef idx="2">
+            <a:schemeClr val="accent1"/>
+          </a:lnRef>
+          <a:fillRef idx="0">
+            <a:schemeClr val="accent1"/>
+          </a:fillRef>
+          <a:effectRef idx="1">
+            <a:schemeClr val="accent1"/>
+          </a:effectRef>
+          <a:fontRef idx="minor">
+            <a:schemeClr val="tx1"/>
+          </a:fontRef>
+        </p:style>
+        <p:txBody>
+          <a:bodyPr rtlCol="0" anchor="ctr"/>
+          <a:lstStyle/>
+          <a:p>
+            <a:pPr algn="ctr"/>
+            <a:endParaRPr lang="en-GB"/>
+          </a:p>
+        </p:txBody>
+      </p:sp>
+      <p:sp>
+        <p:nvSpPr>
+          <p:cNvPr id="6" name="TextBox 5">
+            <a:extLst>
+              <a:ext uri="{FF2B5EF4-FFF2-40B4-BE49-F238E27FC236}">
+                <a16:creationId xmlns:a16="http://schemas.microsoft.com/office/drawing/2014/main" id="{F8290A0C-7548-0947-E7C2-00D85C830A3F}"/>
+              </a:ext>
+            </a:extLst>
+          </p:cNvPr>
+          <p:cNvSpPr txBox="1"/>
+          <p:nvPr/>
+        </p:nvSpPr>
+        <p:spPr>
+          <a:xfrm>
+            <a:off x="651702" y="5867400"/>
+            <a:ext cx="2114177" cy="646331"/>
+          </a:xfrm>
+          <a:prstGeom prst="rect">
+            <a:avLst/>
+          </a:prstGeom>
+          <a:noFill/>
+        </p:spPr>
+        <p:txBody>
+          <a:bodyPr wrap="square" rtlCol="0">
+            <a:spAutoFit/>
+          </a:bodyPr>
+          <a:lstStyle/>
+          <a:p>
+            <a:r>
+              <a:rPr lang="en-GB" dirty="0"/>
+              <a:t>Old Rules:</a:t>
+            </a:r>
+          </a:p>
+          <a:p>
+            <a:r>
+              <a:rPr lang="en-GB" dirty="0"/>
+              <a:t>These would be NA</a:t>
+            </a:r>
+          </a:p>
+        </p:txBody>
+      </p:sp>
+    </p:spTree>
+    <p:extLst>
+      <p:ext uri="{BB962C8B-B14F-4D97-AF65-F5344CB8AC3E}">
+        <p14:creationId xmlns:p14="http://schemas.microsoft.com/office/powerpoint/2010/main" val="2852127733"/>
+      </p:ext>
+    </p:extLst>
+  </p:cSld>
+  <p:clrMapOvr>
+    <a:masterClrMapping/>
+  </p:clrMapOvr>
+</p:sld>
+</file>
+
+<file path=ppt/slides/slide7.xml><?xml version="1.0" encoding="utf-8"?>
+<p:sld xmlns:a="http://schemas.openxmlformats.org/drawingml/2006/main" xmlns:r="http://schemas.openxmlformats.org/officeDocument/2006/relationships" xmlns:p="http://schemas.openxmlformats.org/presentationml/2006/main">
+  <p:cSld>
+    <p:spTree>
+      <p:nvGrpSpPr>
+        <p:cNvPr id="1" name=""/>
+        <p:cNvGrpSpPr/>
+        <p:nvPr/>
+      </p:nvGrpSpPr>
+      <p:grpSpPr>
+        <a:xfrm>
+          <a:off x="0" y="0"/>
+          <a:ext cx="0" cy="0"/>
+          <a:chOff x="0" y="0"/>
+          <a:chExt cx="0" cy="0"/>
+        </a:xfrm>
+      </p:grpSpPr>
+      <p:graphicFrame>
+        <p:nvGraphicFramePr>
+          <p:cNvPr id="4" name="Table 3">
+            <a:extLst>
+              <a:ext uri="{FF2B5EF4-FFF2-40B4-BE49-F238E27FC236}">
+                <a16:creationId xmlns:a16="http://schemas.microsoft.com/office/drawing/2014/main" id="{66C6E2E5-8FCC-4CA6-092E-05ABC3F9C97F}"/>
+              </a:ext>
+            </a:extLst>
+          </p:cNvPr>
+          <p:cNvGraphicFramePr>
+            <a:graphicFrameLocks noGrp="1"/>
+          </p:cNvGraphicFramePr>
+          <p:nvPr>
+            <p:extLst>
+              <p:ext uri="{D42A27DB-BD31-4B8C-83A1-F6EECF244321}">
+                <p14:modId xmlns:p14="http://schemas.microsoft.com/office/powerpoint/2010/main" val="3865526428"/>
+              </p:ext>
+            </p:extLst>
+          </p:nvPr>
+        </p:nvGraphicFramePr>
+        <p:xfrm>
+          <a:off x="717550" y="1310216"/>
+          <a:ext cx="7281913" cy="2966720"/>
+        </p:xfrm>
+        <a:graphic>
+          <a:graphicData uri="http://schemas.openxmlformats.org/drawingml/2006/table">
+            <a:tbl>
+              <a:tblPr firstRow="1" bandRow="1">
+                <a:tableStyleId>{5C22544A-7EE6-4342-B048-85BDC9FD1C3A}</a:tableStyleId>
+              </a:tblPr>
+              <a:tblGrid>
+                <a:gridCol w="1803273">
+                  <a:extLst>
+                    <a:ext uri="{9D8B030D-6E8A-4147-A177-3AD203B41FA5}">
+                      <a16:colId xmlns:a16="http://schemas.microsoft.com/office/drawing/2014/main" val="2591732828"/>
+                    </a:ext>
+                  </a:extLst>
+                </a:gridCol>
+                <a:gridCol w="1095728">
+                  <a:extLst>
+                    <a:ext uri="{9D8B030D-6E8A-4147-A177-3AD203B41FA5}">
+                      <a16:colId xmlns:a16="http://schemas.microsoft.com/office/drawing/2014/main" val="115166983"/>
+                    </a:ext>
+                  </a:extLst>
+                </a:gridCol>
+                <a:gridCol w="1095728">
+                  <a:extLst>
+                    <a:ext uri="{9D8B030D-6E8A-4147-A177-3AD203B41FA5}">
+                      <a16:colId xmlns:a16="http://schemas.microsoft.com/office/drawing/2014/main" val="2575733845"/>
+                    </a:ext>
+                  </a:extLst>
+                </a:gridCol>
+                <a:gridCol w="1095728">
+                  <a:extLst>
+                    <a:ext uri="{9D8B030D-6E8A-4147-A177-3AD203B41FA5}">
+                      <a16:colId xmlns:a16="http://schemas.microsoft.com/office/drawing/2014/main" val="3485148647"/>
+                    </a:ext>
+                  </a:extLst>
+                </a:gridCol>
+                <a:gridCol w="1095728">
+                  <a:extLst>
+                    <a:ext uri="{9D8B030D-6E8A-4147-A177-3AD203B41FA5}">
+                      <a16:colId xmlns:a16="http://schemas.microsoft.com/office/drawing/2014/main" val="1824331962"/>
+                    </a:ext>
+                  </a:extLst>
+                </a:gridCol>
+                <a:gridCol w="1095728">
+                  <a:extLst>
+                    <a:ext uri="{9D8B030D-6E8A-4147-A177-3AD203B41FA5}">
+                      <a16:colId xmlns:a16="http://schemas.microsoft.com/office/drawing/2014/main" val="3080864844"/>
+                    </a:ext>
+                  </a:extLst>
+                </a:gridCol>
+              </a:tblGrid>
+              <a:tr h="370840">
+                <a:tc>
+                  <a:txBody>
+                    <a:bodyPr/>
+                    <a:lstStyle/>
+                    <a:p>
+                      <a:endParaRPr lang="en-GB" dirty="0"/>
+                    </a:p>
+                  </a:txBody>
+                  <a:tcPr/>
+                </a:tc>
+                <a:tc gridSpan="5">
+                  <a:txBody>
+                    <a:bodyPr/>
+                    <a:lstStyle/>
+                    <a:p>
+                      <a:r>
+                        <a:rPr lang="en-GB" dirty="0"/>
+                        <a:t>Drug periods recorded</a:t>
+                      </a:r>
+                    </a:p>
+                  </a:txBody>
+                  <a:tcPr/>
+                </a:tc>
+                <a:tc hMerge="1">
+                  <a:txBody>
+                    <a:bodyPr/>
+                    <a:lstStyle/>
+                    <a:p>
+                      <a:endParaRPr lang="en-GB" dirty="0"/>
+                    </a:p>
+                  </a:txBody>
+                  <a:tcPr/>
+                </a:tc>
+                <a:tc hMerge="1">
+                  <a:txBody>
+                    <a:bodyPr/>
+                    <a:lstStyle/>
+                    <a:p>
+                      <a:endParaRPr lang="en-GB" dirty="0"/>
+                    </a:p>
+                  </a:txBody>
+                  <a:tcPr/>
+                </a:tc>
+                <a:tc hMerge="1">
+                  <a:txBody>
+                    <a:bodyPr/>
+                    <a:lstStyle/>
+                    <a:p>
+                      <a:endParaRPr lang="en-GB" dirty="0"/>
+                    </a:p>
+                  </a:txBody>
+                  <a:tcPr/>
+                </a:tc>
+                <a:tc hMerge="1">
+                  <a:txBody>
+                    <a:bodyPr/>
+                    <a:lstStyle/>
+                    <a:p>
+                      <a:endParaRPr lang="en-GB" dirty="0"/>
+                    </a:p>
+                  </a:txBody>
+                  <a:tcPr/>
+                </a:tc>
+                <a:extLst>
+                  <a:ext uri="{0D108BD9-81ED-4DB2-BD59-A6C34878D82A}">
+                    <a16:rowId xmlns:a16="http://schemas.microsoft.com/office/drawing/2014/main" val="3449528469"/>
+                  </a:ext>
+                </a:extLst>
+              </a:tr>
+              <a:tr h="370840">
+                <a:tc>
+                  <a:txBody>
+                    <a:bodyPr/>
+                    <a:lstStyle/>
+                    <a:p>
+                      <a:r>
+                        <a:rPr lang="en-GB" dirty="0"/>
+                        <a:t>Discontinuation</a:t>
+                      </a:r>
+                    </a:p>
+                  </a:txBody>
+                  <a:tcPr/>
+                </a:tc>
+                <a:tc>
+                  <a:txBody>
+                    <a:bodyPr/>
+                    <a:lstStyle/>
+                    <a:p>
+                      <a:r>
+                        <a:rPr lang="en-GB" dirty="0"/>
+                        <a:t>1</a:t>
+                      </a:r>
+                    </a:p>
+                  </a:txBody>
+                  <a:tcPr/>
+                </a:tc>
+                <a:tc>
+                  <a:txBody>
+                    <a:bodyPr/>
+                    <a:lstStyle/>
+                    <a:p>
+                      <a:r>
+                        <a:rPr lang="en-GB" dirty="0"/>
+                        <a:t>2</a:t>
+                      </a:r>
+                    </a:p>
+                  </a:txBody>
+                  <a:tcPr/>
+                </a:tc>
+                <a:tc>
+                  <a:txBody>
+                    <a:bodyPr/>
+                    <a:lstStyle/>
+                    <a:p>
+                      <a:r>
+                        <a:rPr lang="en-GB" dirty="0"/>
+                        <a:t>3</a:t>
+                      </a:r>
+                    </a:p>
+                  </a:txBody>
+                  <a:tcPr/>
+                </a:tc>
+                <a:tc>
+                  <a:txBody>
+                    <a:bodyPr/>
+                    <a:lstStyle/>
+                    <a:p>
+                      <a:r>
+                        <a:rPr lang="en-GB" dirty="0"/>
+                        <a:t>4</a:t>
+                      </a:r>
+                    </a:p>
+                  </a:txBody>
+                  <a:tcPr/>
+                </a:tc>
+                <a:tc>
+                  <a:txBody>
+                    <a:bodyPr/>
+                    <a:lstStyle/>
+                    <a:p>
+                      <a:r>
+                        <a:rPr lang="en-GB" dirty="0"/>
+                        <a:t>5</a:t>
+                      </a:r>
+                    </a:p>
+                  </a:txBody>
+                  <a:tcPr/>
+                </a:tc>
+                <a:extLst>
+                  <a:ext uri="{0D108BD9-81ED-4DB2-BD59-A6C34878D82A}">
+                    <a16:rowId xmlns:a16="http://schemas.microsoft.com/office/drawing/2014/main" val="1496173031"/>
+                  </a:ext>
+                </a:extLst>
+              </a:tr>
+              <a:tr h="370840">
+                <a:tc>
+                  <a:txBody>
+                    <a:bodyPr/>
+                    <a:lstStyle/>
+                    <a:p>
+                      <a:r>
+                        <a:rPr lang="en-GB" dirty="0"/>
+                        <a:t>0 (n=5,035)</a:t>
+                      </a:r>
+                    </a:p>
+                  </a:txBody>
+                  <a:tcPr/>
+                </a:tc>
+                <a:tc>
+                  <a:txBody>
+                    <a:bodyPr/>
+                    <a:lstStyle/>
+                    <a:p>
+                      <a:r>
+                        <a:rPr lang="en-GB" dirty="0"/>
+                        <a:t>93.90</a:t>
+                      </a:r>
+                    </a:p>
+                  </a:txBody>
+                  <a:tcPr/>
+                </a:tc>
+                <a:tc>
+                  <a:txBody>
+                    <a:bodyPr/>
+                    <a:lstStyle/>
+                    <a:p>
+                      <a:r>
+                        <a:rPr lang="en-GB" dirty="0"/>
+                        <a:t>5.48</a:t>
+                      </a:r>
+                    </a:p>
+                  </a:txBody>
+                  <a:tcPr/>
+                </a:tc>
+                <a:tc>
+                  <a:txBody>
+                    <a:bodyPr/>
+                    <a:lstStyle/>
+                    <a:p>
+                      <a:r>
+                        <a:rPr lang="en-GB" dirty="0"/>
+                        <a:t>0.54</a:t>
+                      </a:r>
+                    </a:p>
+                  </a:txBody>
+                  <a:tcPr/>
+                </a:tc>
+                <a:tc>
+                  <a:txBody>
+                    <a:bodyPr/>
+                    <a:lstStyle/>
+                    <a:p>
+                      <a:r>
+                        <a:rPr lang="en-GB" dirty="0"/>
+                        <a:t>0.06</a:t>
+                      </a:r>
+                    </a:p>
+                  </a:txBody>
+                  <a:tcPr/>
+                </a:tc>
+                <a:tc>
+                  <a:txBody>
+                    <a:bodyPr/>
+                    <a:lstStyle/>
+                    <a:p>
+                      <a:r>
+                        <a:rPr lang="en-GB" dirty="0"/>
+                        <a:t>0.02</a:t>
+                      </a:r>
+                    </a:p>
+                  </a:txBody>
+                  <a:tcPr/>
+                </a:tc>
+                <a:extLst>
+                  <a:ext uri="{0D108BD9-81ED-4DB2-BD59-A6C34878D82A}">
+                    <a16:rowId xmlns:a16="http://schemas.microsoft.com/office/drawing/2014/main" val="926079196"/>
+                  </a:ext>
+                </a:extLst>
+              </a:tr>
+              <a:tr h="370840">
+                <a:tc>
+                  <a:txBody>
+                    <a:bodyPr/>
+                    <a:lstStyle/>
+                    <a:p>
+                      <a:r>
+                        <a:rPr lang="en-GB" dirty="0"/>
+                        <a:t>1 (n=1,241)</a:t>
+                      </a:r>
+                    </a:p>
+                  </a:txBody>
+                  <a:tcPr/>
+                </a:tc>
+                <a:tc>
+                  <a:txBody>
+                    <a:bodyPr/>
+                    <a:lstStyle/>
+                    <a:p>
+                      <a:r>
+                        <a:rPr lang="en-GB" dirty="0"/>
+                        <a:t>88.64</a:t>
+                      </a:r>
+                    </a:p>
+                  </a:txBody>
+                  <a:tcPr/>
+                </a:tc>
+                <a:tc>
+                  <a:txBody>
+                    <a:bodyPr/>
+                    <a:lstStyle/>
+                    <a:p>
+                      <a:r>
+                        <a:rPr lang="en-GB" dirty="0"/>
+                        <a:t>10.23</a:t>
+                      </a:r>
+                    </a:p>
+                  </a:txBody>
+                  <a:tcPr/>
+                </a:tc>
+                <a:tc>
+                  <a:txBody>
+                    <a:bodyPr/>
+                    <a:lstStyle/>
+                    <a:p>
+                      <a:r>
+                        <a:rPr lang="en-GB" dirty="0"/>
+                        <a:t>0.73</a:t>
+                      </a:r>
+                    </a:p>
+                  </a:txBody>
+                  <a:tcPr/>
+                </a:tc>
+                <a:tc>
+                  <a:txBody>
+                    <a:bodyPr/>
+                    <a:lstStyle/>
+                    <a:p>
+                      <a:r>
+                        <a:rPr lang="en-GB" dirty="0"/>
+                        <a:t>0.32</a:t>
+                      </a:r>
+                    </a:p>
+                  </a:txBody>
+                  <a:tcPr/>
+                </a:tc>
+                <a:tc>
+                  <a:txBody>
+                    <a:bodyPr/>
+                    <a:lstStyle/>
+                    <a:p>
+                      <a:r>
+                        <a:rPr lang="en-GB" dirty="0"/>
+                        <a:t>0.08</a:t>
+                      </a:r>
+                    </a:p>
+                  </a:txBody>
+                  <a:tcPr/>
+                </a:tc>
+                <a:extLst>
+                  <a:ext uri="{0D108BD9-81ED-4DB2-BD59-A6C34878D82A}">
+                    <a16:rowId xmlns:a16="http://schemas.microsoft.com/office/drawing/2014/main" val="1232296111"/>
+                  </a:ext>
+                </a:extLst>
+              </a:tr>
+              <a:tr h="370840">
+                <a:tc>
+                  <a:txBody>
+                    <a:bodyPr/>
+                    <a:lstStyle/>
+                    <a:p>
+                      <a:r>
+                        <a:rPr lang="en-GB" dirty="0"/>
+                        <a:t>2 (n=222)</a:t>
+                      </a:r>
+                    </a:p>
+                  </a:txBody>
+                  <a:tcPr/>
+                </a:tc>
+                <a:tc>
+                  <a:txBody>
+                    <a:bodyPr/>
+                    <a:lstStyle/>
+                    <a:p>
+                      <a:r>
+                        <a:rPr lang="en-GB" dirty="0"/>
+                        <a:t>86.94</a:t>
+                      </a:r>
+                    </a:p>
+                  </a:txBody>
+                  <a:tcPr/>
+                </a:tc>
+                <a:tc>
+                  <a:txBody>
+                    <a:bodyPr/>
+                    <a:lstStyle/>
+                    <a:p>
+                      <a:r>
+                        <a:rPr lang="en-GB" dirty="0"/>
+                        <a:t>9.46</a:t>
+                      </a:r>
+                    </a:p>
+                  </a:txBody>
+                  <a:tcPr/>
+                </a:tc>
+                <a:tc>
+                  <a:txBody>
+                    <a:bodyPr/>
+                    <a:lstStyle/>
+                    <a:p>
+                      <a:r>
+                        <a:rPr lang="en-GB" dirty="0"/>
+                        <a:t>2.70</a:t>
+                      </a:r>
+                    </a:p>
+                  </a:txBody>
+                  <a:tcPr/>
+                </a:tc>
+                <a:tc>
+                  <a:txBody>
+                    <a:bodyPr/>
+                    <a:lstStyle/>
+                    <a:p>
+                      <a:r>
+                        <a:rPr lang="en-GB" dirty="0"/>
+                        <a:t>0.45</a:t>
+                      </a:r>
+                    </a:p>
+                  </a:txBody>
+                  <a:tcPr/>
+                </a:tc>
+                <a:tc>
+                  <a:txBody>
+                    <a:bodyPr/>
+                    <a:lstStyle/>
+                    <a:p>
+                      <a:r>
+                        <a:rPr lang="en-GB" dirty="0"/>
+                        <a:t>0.45</a:t>
+                      </a:r>
+                    </a:p>
+                  </a:txBody>
+                  <a:tcPr/>
+                </a:tc>
+                <a:extLst>
+                  <a:ext uri="{0D108BD9-81ED-4DB2-BD59-A6C34878D82A}">
+                    <a16:rowId xmlns:a16="http://schemas.microsoft.com/office/drawing/2014/main" val="3569907657"/>
+                  </a:ext>
+                </a:extLst>
+              </a:tr>
+              <a:tr h="370840">
+                <a:tc>
+                  <a:txBody>
+                    <a:bodyPr/>
+                    <a:lstStyle/>
+                    <a:p>
+                      <a:r>
+                        <a:rPr lang="en-GB" dirty="0"/>
+                        <a:t>3 (n=133)</a:t>
+                      </a:r>
+                    </a:p>
+                  </a:txBody>
+                  <a:tcPr/>
+                </a:tc>
+                <a:tc>
+                  <a:txBody>
+                    <a:bodyPr/>
+                    <a:lstStyle/>
+                    <a:p>
+                      <a:r>
+                        <a:rPr lang="en-GB" dirty="0"/>
+                        <a:t>87.97</a:t>
+                      </a:r>
+                    </a:p>
+                  </a:txBody>
+                  <a:tcPr/>
+                </a:tc>
+                <a:tc>
+                  <a:txBody>
+                    <a:bodyPr/>
+                    <a:lstStyle/>
+                    <a:p>
+                      <a:r>
+                        <a:rPr lang="en-GB" dirty="0"/>
+                        <a:t>9.77</a:t>
+                      </a:r>
+                    </a:p>
+                  </a:txBody>
+                  <a:tcPr/>
+                </a:tc>
+                <a:tc>
+                  <a:txBody>
+                    <a:bodyPr/>
+                    <a:lstStyle/>
+                    <a:p>
+                      <a:r>
+                        <a:rPr lang="en-GB" dirty="0"/>
+                        <a:t>2.26</a:t>
+                      </a:r>
+                    </a:p>
+                  </a:txBody>
+                  <a:tcPr/>
+                </a:tc>
+                <a:tc>
+                  <a:txBody>
+                    <a:bodyPr/>
+                    <a:lstStyle/>
+                    <a:p>
+                      <a:r>
+                        <a:rPr lang="en-GB" dirty="0"/>
+                        <a:t>0.00</a:t>
+                      </a:r>
+                    </a:p>
+                  </a:txBody>
+                  <a:tcPr/>
+                </a:tc>
+                <a:tc>
+                  <a:txBody>
+                    <a:bodyPr/>
+                    <a:lstStyle/>
+                    <a:p>
+                      <a:r>
+                        <a:rPr lang="en-GB" dirty="0"/>
+                        <a:t>0.00</a:t>
+                      </a:r>
+                    </a:p>
+                  </a:txBody>
+                  <a:tcPr/>
+                </a:tc>
+                <a:extLst>
+                  <a:ext uri="{0D108BD9-81ED-4DB2-BD59-A6C34878D82A}">
+                    <a16:rowId xmlns:a16="http://schemas.microsoft.com/office/drawing/2014/main" val="2193292983"/>
+                  </a:ext>
+                </a:extLst>
+              </a:tr>
+              <a:tr h="370840">
+                <a:tc>
+                  <a:txBody>
+                    <a:bodyPr/>
+                    <a:lstStyle/>
+                    <a:p>
+                      <a:r>
+                        <a:rPr lang="en-GB" dirty="0"/>
+                        <a:t>4 (n=78)</a:t>
+                      </a:r>
+                    </a:p>
+                  </a:txBody>
+                  <a:tcPr/>
+                </a:tc>
+                <a:tc>
+                  <a:txBody>
+                    <a:bodyPr/>
+                    <a:lstStyle/>
+                    <a:p>
+                      <a:r>
+                        <a:rPr lang="en-GB" dirty="0"/>
+                        <a:t>100.00</a:t>
+                      </a:r>
+                    </a:p>
+                  </a:txBody>
+                  <a:tcPr/>
+                </a:tc>
+                <a:tc>
+                  <a:txBody>
+                    <a:bodyPr/>
+                    <a:lstStyle/>
+                    <a:p>
+                      <a:r>
+                        <a:rPr lang="en-GB" dirty="0"/>
+                        <a:t>0.00</a:t>
+                      </a:r>
+                    </a:p>
+                  </a:txBody>
+                  <a:tcPr/>
+                </a:tc>
+                <a:tc>
+                  <a:txBody>
+                    <a:bodyPr/>
+                    <a:lstStyle/>
+                    <a:p>
+                      <a:r>
+                        <a:rPr lang="en-GB" dirty="0"/>
+                        <a:t>0.00</a:t>
+                      </a:r>
+                    </a:p>
+                  </a:txBody>
+                  <a:tcPr/>
+                </a:tc>
+                <a:tc>
+                  <a:txBody>
+                    <a:bodyPr/>
+                    <a:lstStyle/>
+                    <a:p>
+                      <a:r>
+                        <a:rPr lang="en-GB" dirty="0"/>
+                        <a:t>0.00</a:t>
+                      </a:r>
+                    </a:p>
+                  </a:txBody>
+                  <a:tcPr/>
+                </a:tc>
+                <a:tc>
+                  <a:txBody>
+                    <a:bodyPr/>
+                    <a:lstStyle/>
+                    <a:p>
+                      <a:r>
+                        <a:rPr lang="en-GB" dirty="0"/>
+                        <a:t>0.00</a:t>
+                      </a:r>
+                    </a:p>
+                  </a:txBody>
+                  <a:tcPr/>
+                </a:tc>
+                <a:extLst>
+                  <a:ext uri="{0D108BD9-81ED-4DB2-BD59-A6C34878D82A}">
+                    <a16:rowId xmlns:a16="http://schemas.microsoft.com/office/drawing/2014/main" val="3496583969"/>
+                  </a:ext>
+                </a:extLst>
+              </a:tr>
+              <a:tr h="370840">
+                <a:tc>
+                  <a:txBody>
+                    <a:bodyPr/>
+                    <a:lstStyle/>
+                    <a:p>
+                      <a:r>
+                        <a:rPr lang="en-GB" dirty="0"/>
+                        <a:t>NA (n=4)</a:t>
+                      </a:r>
+                    </a:p>
+                  </a:txBody>
+                  <a:tcPr/>
+                </a:tc>
+                <a:tc>
+                  <a:txBody>
+                    <a:bodyPr/>
+                    <a:lstStyle/>
+                    <a:p>
+                      <a:r>
+                        <a:rPr lang="en-GB" dirty="0"/>
+                        <a:t>100.00</a:t>
+                      </a:r>
+                    </a:p>
+                  </a:txBody>
+                  <a:tcPr/>
+                </a:tc>
+                <a:tc>
+                  <a:txBody>
+                    <a:bodyPr/>
+                    <a:lstStyle/>
+                    <a:p>
+                      <a:r>
+                        <a:rPr lang="en-GB" dirty="0"/>
+                        <a:t>0.00</a:t>
+                      </a:r>
+                    </a:p>
+                  </a:txBody>
+                  <a:tcPr/>
+                </a:tc>
+                <a:tc>
+                  <a:txBody>
+                    <a:bodyPr/>
+                    <a:lstStyle/>
+                    <a:p>
+                      <a:r>
+                        <a:rPr lang="en-GB" dirty="0"/>
+                        <a:t>0.00</a:t>
+                      </a:r>
+                    </a:p>
+                  </a:txBody>
+                  <a:tcPr/>
+                </a:tc>
+                <a:tc>
+                  <a:txBody>
+                    <a:bodyPr/>
+                    <a:lstStyle/>
+                    <a:p>
+                      <a:r>
+                        <a:rPr lang="en-GB" dirty="0"/>
+                        <a:t>0.00</a:t>
+                      </a:r>
+                    </a:p>
+                  </a:txBody>
+                  <a:tcPr/>
+                </a:tc>
+                <a:tc>
+                  <a:txBody>
+                    <a:bodyPr/>
+                    <a:lstStyle/>
+                    <a:p>
+                      <a:r>
+                        <a:rPr lang="en-GB" dirty="0"/>
+                        <a:t>0.00</a:t>
+                      </a:r>
+                    </a:p>
+                  </a:txBody>
+                  <a:tcPr/>
+                </a:tc>
+                <a:extLst>
+                  <a:ext uri="{0D108BD9-81ED-4DB2-BD59-A6C34878D82A}">
+                    <a16:rowId xmlns:a16="http://schemas.microsoft.com/office/drawing/2014/main" val="3970979412"/>
+                  </a:ext>
+                </a:extLst>
+              </a:tr>
+            </a:tbl>
+          </a:graphicData>
+        </a:graphic>
+      </p:graphicFrame>
+      <p:sp>
+        <p:nvSpPr>
+          <p:cNvPr id="5" name="TextBox 4">
+            <a:extLst>
+              <a:ext uri="{FF2B5EF4-FFF2-40B4-BE49-F238E27FC236}">
+                <a16:creationId xmlns:a16="http://schemas.microsoft.com/office/drawing/2014/main" id="{B7E67A8E-C4EE-2E68-D094-CEDFD1BFD3E7}"/>
+              </a:ext>
+            </a:extLst>
+          </p:cNvPr>
+          <p:cNvSpPr txBox="1"/>
+          <p:nvPr/>
+        </p:nvSpPr>
+        <p:spPr>
+          <a:xfrm>
+            <a:off x="234950" y="336550"/>
+            <a:ext cx="7226300" cy="369332"/>
+          </a:xfrm>
+          <a:prstGeom prst="rect">
+            <a:avLst/>
+          </a:prstGeom>
+          <a:noFill/>
+        </p:spPr>
+        <p:txBody>
+          <a:bodyPr wrap="square" rtlCol="0">
+            <a:spAutoFit/>
+          </a:bodyPr>
+          <a:lstStyle/>
+          <a:p>
+            <a:r>
+              <a:rPr lang="en-GB" dirty="0"/>
+              <a:t>TZD</a:t>
+            </a:r>
+          </a:p>
+        </p:txBody>
+      </p:sp>
+      <p:sp>
+        <p:nvSpPr>
+          <p:cNvPr id="2" name="TextBox 1">
+            <a:extLst>
+              <a:ext uri="{FF2B5EF4-FFF2-40B4-BE49-F238E27FC236}">
+                <a16:creationId xmlns:a16="http://schemas.microsoft.com/office/drawing/2014/main" id="{FD487EDE-BA7C-8F71-0CA3-43FEC16448D9}"/>
+              </a:ext>
+            </a:extLst>
+          </p:cNvPr>
+          <p:cNvSpPr txBox="1"/>
+          <p:nvPr/>
+        </p:nvSpPr>
+        <p:spPr>
+          <a:xfrm>
+            <a:off x="3234871" y="4683210"/>
+            <a:ext cx="7826829" cy="2031325"/>
+          </a:xfrm>
+          <a:prstGeom prst="rect">
+            <a:avLst/>
+          </a:prstGeom>
+          <a:noFill/>
+        </p:spPr>
+        <p:txBody>
+          <a:bodyPr wrap="square" rtlCol="0">
+            <a:spAutoFit/>
+          </a:bodyPr>
+          <a:lstStyle/>
+          <a:p>
+            <a:r>
+              <a:rPr lang="en-GB" dirty="0"/>
+              <a:t>Rules:</a:t>
+            </a:r>
+          </a:p>
+          <a:p>
+            <a:r>
+              <a:rPr lang="en-GB" dirty="0"/>
+              <a:t>0. </a:t>
+            </a:r>
+            <a:r>
+              <a:rPr lang="en-GB" i="1" dirty="0" err="1"/>
+              <a:t>timeondrug</a:t>
+            </a:r>
+            <a:r>
+              <a:rPr lang="en-GB" dirty="0"/>
+              <a:t> bigger than 91 / 183 / 365 (not represented here)</a:t>
+            </a:r>
+          </a:p>
+          <a:p>
+            <a:r>
+              <a:rPr lang="en-GB" dirty="0"/>
+              <a:t>1. </a:t>
+            </a:r>
+            <a:r>
+              <a:rPr lang="en-GB" i="1" dirty="0" err="1"/>
+              <a:t>timeondrug</a:t>
+            </a:r>
+            <a:r>
+              <a:rPr lang="en-GB" dirty="0"/>
+              <a:t> less than 91 / 183 / 365</a:t>
+            </a:r>
+          </a:p>
+          <a:p>
+            <a:r>
+              <a:rPr lang="en-GB" dirty="0"/>
+              <a:t>2. </a:t>
+            </a:r>
+            <a:r>
+              <a:rPr lang="en-GB" i="1" dirty="0" err="1"/>
+              <a:t>nextremdrug</a:t>
+            </a:r>
+            <a:r>
+              <a:rPr lang="en-GB" dirty="0"/>
+              <a:t> = NA (represents a break in the current drug before restarting)</a:t>
+            </a:r>
+          </a:p>
+          <a:p>
+            <a:r>
+              <a:rPr lang="en-GB" dirty="0"/>
+              <a:t>3. </a:t>
+            </a:r>
+            <a:r>
+              <a:rPr lang="en-GB" i="1" dirty="0" err="1"/>
+              <a:t>nextremdrug</a:t>
+            </a:r>
+            <a:r>
+              <a:rPr lang="en-GB" dirty="0"/>
+              <a:t> = different drug removed from row drug class</a:t>
+            </a:r>
+          </a:p>
+          <a:p>
+            <a:r>
+              <a:rPr lang="en-GB" dirty="0"/>
+              <a:t>4. </a:t>
+            </a:r>
+            <a:r>
+              <a:rPr lang="en-GB" i="1" dirty="0" err="1"/>
+              <a:t>timetolastpx</a:t>
+            </a:r>
+            <a:r>
+              <a:rPr lang="en-GB" i="1" dirty="0"/>
+              <a:t> – </a:t>
+            </a:r>
+            <a:r>
+              <a:rPr lang="en-GB" i="1" dirty="0" err="1"/>
+              <a:t>timeondrug</a:t>
+            </a:r>
+            <a:r>
+              <a:rPr lang="en-GB" dirty="0"/>
+              <a:t> &lt; 91 / 183</a:t>
+            </a:r>
+          </a:p>
+          <a:p>
+            <a:r>
+              <a:rPr lang="en-GB" dirty="0"/>
+              <a:t>NA. anything else (</a:t>
+            </a:r>
+            <a:r>
+              <a:rPr lang="en-GB" b="1" dirty="0"/>
+              <a:t>what thought??</a:t>
+            </a:r>
+            <a:r>
+              <a:rPr lang="en-GB" dirty="0"/>
+              <a:t>)</a:t>
+            </a:r>
+          </a:p>
+        </p:txBody>
+      </p:sp>
+      <p:sp>
+        <p:nvSpPr>
+          <p:cNvPr id="3" name="Left Brace 2">
+            <a:extLst>
+              <a:ext uri="{FF2B5EF4-FFF2-40B4-BE49-F238E27FC236}">
+                <a16:creationId xmlns:a16="http://schemas.microsoft.com/office/drawing/2014/main" id="{A84063EE-F1D5-2D03-DBAD-EAEFF961CC5A}"/>
+              </a:ext>
+            </a:extLst>
+          </p:cNvPr>
+          <p:cNvSpPr/>
+          <p:nvPr/>
+        </p:nvSpPr>
+        <p:spPr>
+          <a:xfrm>
+            <a:off x="2901950" y="5594350"/>
+            <a:ext cx="196850" cy="1048289"/>
+          </a:xfrm>
+          <a:prstGeom prst="leftBrace">
+            <a:avLst/>
+          </a:prstGeom>
+        </p:spPr>
+        <p:style>
+          <a:lnRef idx="2">
+            <a:schemeClr val="accent1"/>
+          </a:lnRef>
+          <a:fillRef idx="0">
+            <a:schemeClr val="accent1"/>
+          </a:fillRef>
+          <a:effectRef idx="1">
+            <a:schemeClr val="accent1"/>
+          </a:effectRef>
+          <a:fontRef idx="minor">
+            <a:schemeClr val="tx1"/>
+          </a:fontRef>
+        </p:style>
+        <p:txBody>
+          <a:bodyPr rtlCol="0" anchor="ctr"/>
+          <a:lstStyle/>
+          <a:p>
+            <a:pPr algn="ctr"/>
+            <a:endParaRPr lang="en-GB"/>
+          </a:p>
+        </p:txBody>
+      </p:sp>
+      <p:sp>
+        <p:nvSpPr>
+          <p:cNvPr id="6" name="TextBox 5">
+            <a:extLst>
+              <a:ext uri="{FF2B5EF4-FFF2-40B4-BE49-F238E27FC236}">
+                <a16:creationId xmlns:a16="http://schemas.microsoft.com/office/drawing/2014/main" id="{B2C346DC-47B9-0EA6-09FF-7B8374843493}"/>
+              </a:ext>
+            </a:extLst>
+          </p:cNvPr>
+          <p:cNvSpPr txBox="1"/>
+          <p:nvPr/>
+        </p:nvSpPr>
+        <p:spPr>
+          <a:xfrm>
+            <a:off x="651702" y="5867400"/>
+            <a:ext cx="2114177" cy="646331"/>
+          </a:xfrm>
+          <a:prstGeom prst="rect">
+            <a:avLst/>
+          </a:prstGeom>
+          <a:noFill/>
+        </p:spPr>
+        <p:txBody>
+          <a:bodyPr wrap="square" rtlCol="0">
+            <a:spAutoFit/>
+          </a:bodyPr>
+          <a:lstStyle/>
+          <a:p>
+            <a:r>
+              <a:rPr lang="en-GB" dirty="0"/>
+              <a:t>Old Rules:</a:t>
+            </a:r>
+          </a:p>
+          <a:p>
+            <a:r>
+              <a:rPr lang="en-GB" dirty="0"/>
+              <a:t>These would be NA</a:t>
+            </a:r>
+          </a:p>
+        </p:txBody>
+      </p:sp>
+    </p:spTree>
+    <p:extLst>
+      <p:ext uri="{BB962C8B-B14F-4D97-AF65-F5344CB8AC3E}">
+        <p14:creationId xmlns:p14="http://schemas.microsoft.com/office/powerpoint/2010/main" val="1046862339"/>
+      </p:ext>
+    </p:extLst>
+  </p:cSld>
+  <p:clrMapOvr>
+    <a:masterClrMapping/>
+  </p:clrMapOvr>
+</p:sld>
+</file>
+
 <file path=ppt/theme/theme1.xml><?xml version="1.0" encoding="utf-8"?>
 <a:theme xmlns:a="http://schemas.openxmlformats.org/drawingml/2006/main" name="Office Theme">
   <a:themeElements>
